--- a/activities/Activity-08-Budget-and-Effectiveness-Decision/A08-Budget-and-Effectiveness-Decision-Sample.pptx
+++ b/activities/Activity-08-Budget-and-Effectiveness-Decision/A08-Budget-and-Effectiveness-Decision-Sample.pptx
@@ -10,6 +10,7 @@
     <p:sldId id="258" r:id="rId9"/>
     <p:sldId id="259" r:id="rId10"/>
     <p:sldId id="260" r:id="rId11"/>
+    <p:sldId id="261" r:id="rId12"/>
   </p:sldIdLst>
   <p:sldSz cx="12191695" cy="6858000" type="screen4x3"/>
   <p:notesSz cx="6858000" cy="9144000"/>
@@ -3525,6 +3526,246 @@
             <a:avLst/>
           </a:prstGeom>
           <a:solidFill>
+            <a:srgbClr val="7C3AED"/>
+          </a:solidFill>
+          <a:ln>
+            <a:solidFill>
+              <a:srgbClr val="7C3AED"/>
+            </a:solidFill>
+          </a:ln>
+        </p:spPr>
+        <p:style>
+          <a:lnRef idx="1">
+            <a:schemeClr val="accent1"/>
+          </a:lnRef>
+          <a:fillRef idx="3">
+            <a:schemeClr val="accent1"/>
+          </a:fillRef>
+          <a:effectRef idx="2">
+            <a:schemeClr val="accent1"/>
+          </a:effectRef>
+          <a:fontRef idx="minor">
+            <a:schemeClr val="lt1"/>
+          </a:fontRef>
+        </p:style>
+        <p:txBody>
+          <a:bodyPr rtlCol="0" anchor="ctr"/>
+          <a:lstStyle/>
+          <a:p>
+            <a:pPr algn="ctr"/>
+          </a:p>
+        </p:txBody>
+      </p:sp>
+      <p:sp>
+        <p:nvSpPr>
+          <p:cNvPr id="4" name="TextBox 3"/>
+          <p:cNvSpPr txBox="1"/>
+          <p:nvPr/>
+        </p:nvSpPr>
+        <p:spPr>
+          <a:xfrm>
+            <a:off x="658368" y="384048"/>
+            <a:ext cx="10789920" cy="320040"/>
+          </a:xfrm>
+          <a:prstGeom prst="rect">
+            <a:avLst/>
+          </a:prstGeom>
+          <a:noFill/>
+        </p:spPr>
+        <p:txBody>
+          <a:bodyPr wrap="square" anchor="t">
+            <a:spAutoFit/>
+          </a:bodyPr>
+          <a:lstStyle/>
+          <a:p>
+            <a:pPr algn="l"/>
+            <a:r>
+              <a:rPr sz="1100" b="1">
+                <a:solidFill>
+                  <a:srgbClr val="7C3AED"/>
+                </a:solidFill>
+                <a:latin typeface="Arial"/>
+              </a:rPr>
+              <a:t>ACTIVITY 08 · FULL COPY-READY TEXT IN PROMPTS.MD AND AI PROMPT LAB</a:t>
+            </a:r>
+          </a:p>
+        </p:txBody>
+      </p:sp>
+      <p:sp>
+        <p:nvSpPr>
+          <p:cNvPr id="5" name="TextBox 4"/>
+          <p:cNvSpPr txBox="1"/>
+          <p:nvPr/>
+        </p:nvSpPr>
+        <p:spPr>
+          <a:xfrm>
+            <a:off x="658368" y="749808"/>
+            <a:ext cx="10789920" cy="658368"/>
+          </a:xfrm>
+          <a:prstGeom prst="rect">
+            <a:avLst/>
+          </a:prstGeom>
+          <a:noFill/>
+        </p:spPr>
+        <p:txBody>
+          <a:bodyPr wrap="square" anchor="t">
+            <a:spAutoFit/>
+          </a:bodyPr>
+          <a:lstStyle/>
+          <a:p>
+            <a:pPr algn="l"/>
+            <a:r>
+              <a:rPr sz="2700" b="1">
+                <a:solidFill>
+                  <a:srgbClr val="161B26"/>
+                </a:solidFill>
+                <a:latin typeface="Arial"/>
+              </a:rPr>
+              <a:t>AI Prompt Starters</a:t>
+            </a:r>
+          </a:p>
+        </p:txBody>
+      </p:sp>
+      <p:sp>
+        <p:nvSpPr>
+          <p:cNvPr id="6" name="Rectangle 5"/>
+          <p:cNvSpPr/>
+          <p:nvPr/>
+        </p:nvSpPr>
+        <p:spPr>
+          <a:xfrm>
+            <a:off x="658368" y="1444752"/>
+            <a:ext cx="10881360" cy="18288"/>
+          </a:xfrm>
+          <a:prstGeom prst="rect">
+            <a:avLst/>
+          </a:prstGeom>
+          <a:solidFill>
+            <a:srgbClr val="E2E8F0"/>
+          </a:solidFill>
+          <a:ln>
+            <a:solidFill>
+              <a:srgbClr val="E2E8F0"/>
+            </a:solidFill>
+          </a:ln>
+        </p:spPr>
+        <p:style>
+          <a:lnRef idx="1">
+            <a:schemeClr val="accent1"/>
+          </a:lnRef>
+          <a:fillRef idx="3">
+            <a:schemeClr val="accent1"/>
+          </a:fillRef>
+          <a:effectRef idx="2">
+            <a:schemeClr val="accent1"/>
+          </a:effectRef>
+          <a:fontRef idx="minor">
+            <a:schemeClr val="lt1"/>
+          </a:fontRef>
+        </p:style>
+        <p:txBody>
+          <a:bodyPr rtlCol="0" anchor="ctr"/>
+          <a:lstStyle/>
+          <a:p>
+            <a:pPr algn="ctr"/>
+          </a:p>
+        </p:txBody>
+      </p:sp>
+      <p:sp>
+        <p:nvSpPr>
+          <p:cNvPr id="7" name="TextBox 6"/>
+          <p:cNvSpPr txBox="1"/>
+          <p:nvPr/>
+        </p:nvSpPr>
+        <p:spPr>
+          <a:xfrm>
+            <a:off x="658368" y="6473952"/>
+            <a:ext cx="9875520" cy="201168"/>
+          </a:xfrm>
+          <a:prstGeom prst="rect">
+            <a:avLst/>
+          </a:prstGeom>
+          <a:noFill/>
+        </p:spPr>
+        <p:txBody>
+          <a:bodyPr wrap="square" anchor="t">
+            <a:spAutoFit/>
+          </a:bodyPr>
+          <a:lstStyle/>
+          <a:p>
+            <a:pPr algn="l"/>
+            <a:r>
+              <a:rPr sz="800" b="0">
+                <a:solidFill>
+                  <a:srgbClr val="5B6372"/>
+                </a:solidFill>
+                <a:latin typeface="Arial"/>
+              </a:rPr>
+              <a:t>TGS-2026064178 · ACTIVITY PRACTICE · Tertiary Infotech Academy Pte Ltd</a:t>
+            </a:r>
+          </a:p>
+        </p:txBody>
+      </p:sp>
+      <p:sp>
+        <p:nvSpPr>
+          <p:cNvPr id="8" name="Rounded Rectangle 7"/>
+          <p:cNvSpPr/>
+          <p:nvPr/>
+        </p:nvSpPr>
+        <p:spPr>
+          <a:xfrm>
+            <a:off x="731520" y="1755648"/>
+            <a:ext cx="5166360" cy="1847088"/>
+          </a:xfrm>
+          <a:prstGeom prst="roundRect">
+            <a:avLst/>
+          </a:prstGeom>
+          <a:solidFill>
+            <a:srgbClr val="F5F8FC"/>
+          </a:solidFill>
+          <a:ln>
+            <a:solidFill>
+              <a:srgbClr val="E2E8F0"/>
+            </a:solidFill>
+          </a:ln>
+        </p:spPr>
+        <p:style>
+          <a:lnRef idx="1">
+            <a:schemeClr val="accent1"/>
+          </a:lnRef>
+          <a:fillRef idx="3">
+            <a:schemeClr val="accent1"/>
+          </a:fillRef>
+          <a:effectRef idx="2">
+            <a:schemeClr val="accent1"/>
+          </a:effectRef>
+          <a:fontRef idx="minor">
+            <a:schemeClr val="lt1"/>
+          </a:fontRef>
+        </p:style>
+        <p:txBody>
+          <a:bodyPr rtlCol="0" anchor="ctr"/>
+          <a:lstStyle/>
+          <a:p>
+            <a:pPr algn="ctr"/>
+          </a:p>
+        </p:txBody>
+      </p:sp>
+      <p:sp>
+        <p:nvSpPr>
+          <p:cNvPr id="9" name="Rectangle 8"/>
+          <p:cNvSpPr/>
+          <p:nvPr/>
+        </p:nvSpPr>
+        <p:spPr>
+          <a:xfrm>
+            <a:off x="731520" y="1755648"/>
+            <a:ext cx="73152" cy="1847088"/>
+          </a:xfrm>
+          <a:prstGeom prst="rect">
+            <a:avLst/>
+          </a:prstGeom>
+          <a:solidFill>
             <a:srgbClr val="1F6FEB"/>
           </a:solidFill>
           <a:ln>
@@ -3557,14 +3798,94 @@
       </p:sp>
       <p:sp>
         <p:nvSpPr>
-          <p:cNvPr id="4" name="TextBox 3"/>
+          <p:cNvPr id="10" name="Rounded Rectangle 9"/>
+          <p:cNvSpPr/>
+          <p:nvPr/>
+        </p:nvSpPr>
+        <p:spPr>
+          <a:xfrm>
+            <a:off x="932688" y="1975104"/>
+            <a:ext cx="438912" cy="438912"/>
+          </a:xfrm>
+          <a:prstGeom prst="roundRect">
+            <a:avLst/>
+          </a:prstGeom>
+          <a:solidFill>
+            <a:srgbClr val="1F6FEB"/>
+          </a:solidFill>
+          <a:ln>
+            <a:solidFill>
+              <a:srgbClr val="1F6FEB"/>
+            </a:solidFill>
+          </a:ln>
+        </p:spPr>
+        <p:style>
+          <a:lnRef idx="1">
+            <a:schemeClr val="accent1"/>
+          </a:lnRef>
+          <a:fillRef idx="3">
+            <a:schemeClr val="accent1"/>
+          </a:fillRef>
+          <a:effectRef idx="2">
+            <a:schemeClr val="accent1"/>
+          </a:effectRef>
+          <a:fontRef idx="minor">
+            <a:schemeClr val="lt1"/>
+          </a:fontRef>
+        </p:style>
+        <p:txBody>
+          <a:bodyPr rtlCol="0" anchor="ctr"/>
+          <a:lstStyle/>
+          <a:p>
+            <a:pPr algn="ctr"/>
+          </a:p>
+        </p:txBody>
+      </p:sp>
+      <p:sp>
+        <p:nvSpPr>
+          <p:cNvPr id="11" name="TextBox 10"/>
           <p:cNvSpPr txBox="1"/>
           <p:nvPr/>
         </p:nvSpPr>
         <p:spPr>
           <a:xfrm>
-            <a:off x="658368" y="384048"/>
-            <a:ext cx="10789920" cy="320040"/>
+            <a:off x="932688" y="1984248"/>
+            <a:ext cx="438912" cy="420624"/>
+          </a:xfrm>
+          <a:prstGeom prst="rect">
+            <a:avLst/>
+          </a:prstGeom>
+          <a:noFill/>
+        </p:spPr>
+        <p:txBody>
+          <a:bodyPr wrap="square" anchor="ctr">
+            <a:spAutoFit/>
+          </a:bodyPr>
+          <a:lstStyle/>
+          <a:p>
+            <a:pPr algn="ctr"/>
+            <a:r>
+              <a:rPr sz="1400" b="1">
+                <a:solidFill>
+                  <a:srgbClr val="FFFFFF"/>
+                </a:solidFill>
+                <a:latin typeface="Arial"/>
+              </a:rPr>
+              <a:t>1</a:t>
+            </a:r>
+          </a:p>
+        </p:txBody>
+      </p:sp>
+      <p:sp>
+        <p:nvSpPr>
+          <p:cNvPr id="12" name="TextBox 11"/>
+          <p:cNvSpPr txBox="1"/>
+          <p:nvPr/>
+        </p:nvSpPr>
+        <p:spPr>
+          <a:xfrm>
+            <a:off x="1536192" y="1938528"/>
+            <a:ext cx="4178808" cy="329184"/>
           </a:xfrm>
           <a:prstGeom prst="rect">
             <a:avLst/>
@@ -3579,27 +3900,27 @@
           <a:p>
             <a:pPr algn="l"/>
             <a:r>
-              <a:rPr sz="1100" b="1">
+              <a:rPr sz="1400" b="1">
                 <a:solidFill>
                   <a:srgbClr val="1F6FEB"/>
                 </a:solidFill>
                 <a:latin typeface="Arial"/>
               </a:rPr>
-              <a:t>ACTIVITY 08 · CONTEXT</a:t>
-            </a:r>
-          </a:p>
-        </p:txBody>
-      </p:sp>
-      <p:sp>
-        <p:nvSpPr>
-          <p:cNvPr id="5" name="TextBox 4"/>
+              <a:t>Data analyst</a:t>
+            </a:r>
+          </a:p>
+        </p:txBody>
+      </p:sp>
+      <p:sp>
+        <p:nvSpPr>
+          <p:cNvPr id="13" name="TextBox 12"/>
           <p:cNvSpPr txBox="1"/>
           <p:nvPr/>
         </p:nvSpPr>
         <p:spPr>
           <a:xfrm>
-            <a:off x="658368" y="749808"/>
-            <a:ext cx="10789920" cy="658368"/>
+            <a:off x="1536192" y="2322576"/>
+            <a:ext cx="4178808" cy="1133856"/>
           </a:xfrm>
           <a:prstGeom prst="rect">
             <a:avLst/>
@@ -3614,33 +3935,33 @@
           <a:p>
             <a:pPr algn="l"/>
             <a:r>
-              <a:rPr sz="2700" b="1">
+              <a:rPr sz="1150" b="0">
                 <a:solidFill>
                   <a:srgbClr val="161B26"/>
                 </a:solidFill>
                 <a:latin typeface="Arial"/>
               </a:rPr>
-              <a:t>The Scenario</a:t>
-            </a:r>
-          </a:p>
-        </p:txBody>
-      </p:sp>
-      <p:sp>
-        <p:nvSpPr>
-          <p:cNvPr id="6" name="Rectangle 5"/>
+              <a:t>Using only the attached approved sources, create a source register, identify duplicates or conflicting definitions, clean the table, show formulas or transformations, and return five candidate insights with citations, caveats and a con…</a:t>
+            </a:r>
+          </a:p>
+        </p:txBody>
+      </p:sp>
+      <p:sp>
+        <p:nvSpPr>
+          <p:cNvPr id="14" name="Rounded Rectangle 13"/>
           <p:cNvSpPr/>
           <p:nvPr/>
         </p:nvSpPr>
         <p:spPr>
           <a:xfrm>
-            <a:off x="658368" y="1444752"/>
-            <a:ext cx="10881360" cy="18288"/>
-          </a:xfrm>
-          <a:prstGeom prst="rect">
-            <a:avLst/>
-          </a:prstGeom>
-          <a:solidFill>
-            <a:srgbClr val="E2E8F0"/>
+            <a:off x="6144768" y="1755648"/>
+            <a:ext cx="5166360" cy="1847088"/>
+          </a:xfrm>
+          <a:prstGeom prst="roundRect">
+            <a:avLst/>
+          </a:prstGeom>
+          <a:solidFill>
+            <a:srgbClr val="F5F8FC"/>
           </a:solidFill>
           <a:ln>
             <a:solidFill>
@@ -3672,14 +3993,139 @@
       </p:sp>
       <p:sp>
         <p:nvSpPr>
-          <p:cNvPr id="7" name="TextBox 6"/>
+          <p:cNvPr id="15" name="Rectangle 14"/>
+          <p:cNvSpPr/>
+          <p:nvPr/>
+        </p:nvSpPr>
+        <p:spPr>
+          <a:xfrm>
+            <a:off x="6144768" y="1755648"/>
+            <a:ext cx="73152" cy="1847088"/>
+          </a:xfrm>
+          <a:prstGeom prst="rect">
+            <a:avLst/>
+          </a:prstGeom>
+          <a:solidFill>
+            <a:srgbClr val="10B981"/>
+          </a:solidFill>
+          <a:ln>
+            <a:solidFill>
+              <a:srgbClr val="10B981"/>
+            </a:solidFill>
+          </a:ln>
+        </p:spPr>
+        <p:style>
+          <a:lnRef idx="1">
+            <a:schemeClr val="accent1"/>
+          </a:lnRef>
+          <a:fillRef idx="3">
+            <a:schemeClr val="accent1"/>
+          </a:fillRef>
+          <a:effectRef idx="2">
+            <a:schemeClr val="accent1"/>
+          </a:effectRef>
+          <a:fontRef idx="minor">
+            <a:schemeClr val="lt1"/>
+          </a:fontRef>
+        </p:style>
+        <p:txBody>
+          <a:bodyPr rtlCol="0" anchor="ctr"/>
+          <a:lstStyle/>
+          <a:p>
+            <a:pPr algn="ctr"/>
+          </a:p>
+        </p:txBody>
+      </p:sp>
+      <p:sp>
+        <p:nvSpPr>
+          <p:cNvPr id="16" name="Rounded Rectangle 15"/>
+          <p:cNvSpPr/>
+          <p:nvPr/>
+        </p:nvSpPr>
+        <p:spPr>
+          <a:xfrm>
+            <a:off x="6345936" y="1975104"/>
+            <a:ext cx="438912" cy="438912"/>
+          </a:xfrm>
+          <a:prstGeom prst="roundRect">
+            <a:avLst/>
+          </a:prstGeom>
+          <a:solidFill>
+            <a:srgbClr val="10B981"/>
+          </a:solidFill>
+          <a:ln>
+            <a:solidFill>
+              <a:srgbClr val="10B981"/>
+            </a:solidFill>
+          </a:ln>
+        </p:spPr>
+        <p:style>
+          <a:lnRef idx="1">
+            <a:schemeClr val="accent1"/>
+          </a:lnRef>
+          <a:fillRef idx="3">
+            <a:schemeClr val="accent1"/>
+          </a:fillRef>
+          <a:effectRef idx="2">
+            <a:schemeClr val="accent1"/>
+          </a:effectRef>
+          <a:fontRef idx="minor">
+            <a:schemeClr val="lt1"/>
+          </a:fontRef>
+        </p:style>
+        <p:txBody>
+          <a:bodyPr rtlCol="0" anchor="ctr"/>
+          <a:lstStyle/>
+          <a:p>
+            <a:pPr algn="ctr"/>
+          </a:p>
+        </p:txBody>
+      </p:sp>
+      <p:sp>
+        <p:nvSpPr>
+          <p:cNvPr id="17" name="TextBox 16"/>
           <p:cNvSpPr txBox="1"/>
           <p:nvPr/>
         </p:nvSpPr>
         <p:spPr>
           <a:xfrm>
-            <a:off x="658368" y="6473952"/>
-            <a:ext cx="9875520" cy="201168"/>
+            <a:off x="6345936" y="1984248"/>
+            <a:ext cx="438912" cy="420624"/>
+          </a:xfrm>
+          <a:prstGeom prst="rect">
+            <a:avLst/>
+          </a:prstGeom>
+          <a:noFill/>
+        </p:spPr>
+        <p:txBody>
+          <a:bodyPr wrap="square" anchor="ctr">
+            <a:spAutoFit/>
+          </a:bodyPr>
+          <a:lstStyle/>
+          <a:p>
+            <a:pPr algn="ctr"/>
+            <a:r>
+              <a:rPr sz="1400" b="1">
+                <a:solidFill>
+                  <a:srgbClr val="FFFFFF"/>
+                </a:solidFill>
+                <a:latin typeface="Arial"/>
+              </a:rPr>
+              <a:t>2</a:t>
+            </a:r>
+          </a:p>
+        </p:txBody>
+      </p:sp>
+      <p:sp>
+        <p:nvSpPr>
+          <p:cNvPr id="18" name="TextBox 17"/>
+          <p:cNvSpPr txBox="1"/>
+          <p:nvPr/>
+        </p:nvSpPr>
+        <p:spPr>
+          <a:xfrm>
+            <a:off x="6949440" y="1938528"/>
+            <a:ext cx="4178808" cy="329184"/>
           </a:xfrm>
           <a:prstGeom prst="rect">
             <a:avLst/>
@@ -3694,27 +4140,62 @@
           <a:p>
             <a:pPr algn="l"/>
             <a:r>
-              <a:rPr sz="800" b="0">
-                <a:solidFill>
-                  <a:srgbClr val="5B6372"/>
+              <a:rPr sz="1400" b="1">
+                <a:solidFill>
+                  <a:srgbClr val="10B981"/>
                 </a:solidFill>
                 <a:latin typeface="Arial"/>
               </a:rPr>
-              <a:t>TGS-2024048310 · ACTIVITY PRACTICE · Tertiary Infotech Academy Pte Ltd</a:t>
-            </a:r>
-          </a:p>
-        </p:txBody>
-      </p:sp>
-      <p:sp>
-        <p:nvSpPr>
-          <p:cNvPr id="8" name="Rounded Rectangle 7"/>
+              <a:t>Infographic</a:t>
+            </a:r>
+          </a:p>
+        </p:txBody>
+      </p:sp>
+      <p:sp>
+        <p:nvSpPr>
+          <p:cNvPr id="19" name="TextBox 18"/>
+          <p:cNvSpPr txBox="1"/>
+          <p:nvPr/>
+        </p:nvSpPr>
+        <p:spPr>
+          <a:xfrm>
+            <a:off x="6949440" y="2322576"/>
+            <a:ext cx="4178808" cy="1133856"/>
+          </a:xfrm>
+          <a:prstGeom prst="rect">
+            <a:avLst/>
+          </a:prstGeom>
+          <a:noFill/>
+        </p:spPr>
+        <p:txBody>
+          <a:bodyPr wrap="square" anchor="t">
+            <a:spAutoFit/>
+          </a:bodyPr>
+          <a:lstStyle/>
+          <a:p>
+            <a:pPr algn="l"/>
+            <a:r>
+              <a:rPr sz="1150" b="0">
+                <a:solidFill>
+                  <a:srgbClr val="161B26"/>
+                </a:solidFill>
+                <a:latin typeface="Arial"/>
+              </a:rPr>
+              <a:t>Create a one-page executive infographic for Singapore retail managers. Lead with one decision insight, show three supporting metrics, include a five-stage flow and a source footer. Use a clean professional style, strong hierarchy and n…</a:t>
+            </a:r>
+          </a:p>
+        </p:txBody>
+      </p:sp>
+      <p:sp>
+        <p:nvSpPr>
+          <p:cNvPr id="20" name="Rounded Rectangle 19"/>
           <p:cNvSpPr/>
           <p:nvPr/>
         </p:nvSpPr>
         <p:spPr>
           <a:xfrm>
-            <a:off x="731520" y="1783080"/>
-            <a:ext cx="10698480" cy="1691640"/>
+            <a:off x="731520" y="3877056"/>
+            <a:ext cx="5166360" cy="1847088"/>
           </a:xfrm>
           <a:prstGeom prst="roundRect">
             <a:avLst/>
@@ -3752,24 +4233,24 @@
       </p:sp>
       <p:sp>
         <p:nvSpPr>
-          <p:cNvPr id="9" name="Rectangle 8"/>
+          <p:cNvPr id="21" name="Rectangle 20"/>
           <p:cNvSpPr/>
           <p:nvPr/>
         </p:nvSpPr>
         <p:spPr>
           <a:xfrm>
-            <a:off x="731520" y="1783080"/>
-            <a:ext cx="73152" cy="1691640"/>
-          </a:xfrm>
-          <a:prstGeom prst="rect">
-            <a:avLst/>
-          </a:prstGeom>
-          <a:solidFill>
-            <a:srgbClr val="1F6FEB"/>
+            <a:off x="731520" y="3877056"/>
+            <a:ext cx="73152" cy="1847088"/>
+          </a:xfrm>
+          <a:prstGeom prst="rect">
+            <a:avLst/>
+          </a:prstGeom>
+          <a:solidFill>
+            <a:srgbClr val="7C3AED"/>
           </a:solidFill>
           <a:ln>
             <a:solidFill>
-              <a:srgbClr val="1F6FEB"/>
+              <a:srgbClr val="7C3AED"/>
             </a:solidFill>
           </a:ln>
         </p:spPr>
@@ -3797,24 +4278,24 @@
       </p:sp>
       <p:sp>
         <p:nvSpPr>
-          <p:cNvPr id="10" name="Rounded Rectangle 9"/>
+          <p:cNvPr id="22" name="Rounded Rectangle 21"/>
           <p:cNvSpPr/>
           <p:nvPr/>
         </p:nvSpPr>
         <p:spPr>
           <a:xfrm>
-            <a:off x="932688" y="2002536"/>
+            <a:off x="932688" y="4096512"/>
             <a:ext cx="438912" cy="438912"/>
           </a:xfrm>
           <a:prstGeom prst="roundRect">
             <a:avLst/>
           </a:prstGeom>
           <a:solidFill>
-            <a:srgbClr val="1F6FEB"/>
+            <a:srgbClr val="7C3AED"/>
           </a:solidFill>
           <a:ln>
             <a:solidFill>
-              <a:srgbClr val="1F6FEB"/>
+              <a:srgbClr val="7C3AED"/>
             </a:solidFill>
           </a:ln>
         </p:spPr>
@@ -3842,13 +4323,13 @@
       </p:sp>
       <p:sp>
         <p:nvSpPr>
-          <p:cNvPr id="11" name="TextBox 10"/>
+          <p:cNvPr id="23" name="TextBox 22"/>
           <p:cNvSpPr txBox="1"/>
           <p:nvPr/>
         </p:nvSpPr>
         <p:spPr>
           <a:xfrm>
-            <a:off x="932688" y="2011680"/>
+            <a:off x="932688" y="4105656"/>
             <a:ext cx="438912" cy="420624"/>
           </a:xfrm>
           <a:prstGeom prst="rect">
@@ -3870,21 +4351,21 @@
                 </a:solidFill>
                 <a:latin typeface="Arial"/>
               </a:rPr>
-              <a:t>1</a:t>
-            </a:r>
-          </a:p>
-        </p:txBody>
-      </p:sp>
-      <p:sp>
-        <p:nvSpPr>
-          <p:cNvPr id="12" name="TextBox 11"/>
+              <a:t>3</a:t>
+            </a:r>
+          </a:p>
+        </p:txBody>
+      </p:sp>
+      <p:sp>
+        <p:nvSpPr>
+          <p:cNvPr id="24" name="TextBox 23"/>
           <p:cNvSpPr txBox="1"/>
           <p:nvPr/>
         </p:nvSpPr>
         <p:spPr>
           <a:xfrm>
-            <a:off x="1536192" y="1965960"/>
-            <a:ext cx="9710928" cy="329184"/>
+            <a:off x="1536192" y="4059936"/>
+            <a:ext cx="4178808" cy="329184"/>
           </a:xfrm>
           <a:prstGeom prst="rect">
             <a:avLst/>
@@ -3901,25 +4382,25 @@
             <a:r>
               <a:rPr sz="1400" b="1">
                 <a:solidFill>
-                  <a:srgbClr val="1F6FEB"/>
+                  <a:srgbClr val="7C3AED"/>
                 </a:solidFill>
                 <a:latin typeface="Arial"/>
               </a:rPr>
-              <a:t>Context</a:t>
-            </a:r>
-          </a:p>
-        </p:txBody>
-      </p:sp>
-      <p:sp>
-        <p:nvSpPr>
-          <p:cNvPr id="13" name="TextBox 12"/>
+              <a:t>Text to image</a:t>
+            </a:r>
+          </a:p>
+        </p:txBody>
+      </p:sp>
+      <p:sp>
+        <p:nvSpPr>
+          <p:cNvPr id="25" name="TextBox 24"/>
           <p:cNvSpPr txBox="1"/>
           <p:nvPr/>
         </p:nvSpPr>
         <p:spPr>
           <a:xfrm>
-            <a:off x="1536192" y="2350008"/>
-            <a:ext cx="9710928" cy="978408"/>
+            <a:off x="1536192" y="4443984"/>
+            <a:ext cx="4178808" cy="1133856"/>
           </a:xfrm>
           <a:prstGeom prst="rect">
             <a:avLst/>
@@ -3940,21 +4421,21 @@
                 </a:solidFill>
                 <a:latin typeface="Arial"/>
               </a:rPr>
-              <a:t>Northstar can fund one standard workflow for 12 staff. Options include PowerPoint templates only, PowerPoint with Copilot, or a mixed workflow using external design tools plus PowerPoint for final production.</a:t>
-            </a:r>
-          </a:p>
-        </p:txBody>
-      </p:sp>
-      <p:sp>
-        <p:nvSpPr>
-          <p:cNvPr id="14" name="Rounded Rectangle 13"/>
+              <a:t>Create a clean vector-like sustainability delivery illustration for a PowerPoint infographic: one electric van, one reusable parcel, a simple route and a feedback symbol. Transparent background, consistent blue/teal/violet/amber palett…</a:t>
+            </a:r>
+          </a:p>
+        </p:txBody>
+      </p:sp>
+      <p:sp>
+        <p:nvSpPr>
+          <p:cNvPr id="26" name="Rounded Rectangle 25"/>
           <p:cNvSpPr/>
           <p:nvPr/>
         </p:nvSpPr>
         <p:spPr>
           <a:xfrm>
-            <a:off x="731520" y="3776472"/>
-            <a:ext cx="10698480" cy="1691640"/>
+            <a:off x="6144768" y="3877056"/>
+            <a:ext cx="5166360" cy="1847088"/>
           </a:xfrm>
           <a:prstGeom prst="roundRect">
             <a:avLst/>
@@ -3992,24 +4473,24 @@
       </p:sp>
       <p:sp>
         <p:nvSpPr>
-          <p:cNvPr id="15" name="Rectangle 14"/>
+          <p:cNvPr id="27" name="Rectangle 26"/>
           <p:cNvSpPr/>
           <p:nvPr/>
         </p:nvSpPr>
         <p:spPr>
           <a:xfrm>
-            <a:off x="731520" y="3776472"/>
-            <a:ext cx="73152" cy="1691640"/>
-          </a:xfrm>
-          <a:prstGeom prst="rect">
-            <a:avLst/>
-          </a:prstGeom>
-          <a:solidFill>
-            <a:srgbClr val="10B981"/>
+            <a:off x="6144768" y="3877056"/>
+            <a:ext cx="73152" cy="1847088"/>
+          </a:xfrm>
+          <a:prstGeom prst="rect">
+            <a:avLst/>
+          </a:prstGeom>
+          <a:solidFill>
+            <a:srgbClr val="F59E0B"/>
           </a:solidFill>
           <a:ln>
             <a:solidFill>
-              <a:srgbClr val="10B981"/>
+              <a:srgbClr val="F59E0B"/>
             </a:solidFill>
           </a:ln>
         </p:spPr>
@@ -4037,24 +4518,24 @@
       </p:sp>
       <p:sp>
         <p:nvSpPr>
-          <p:cNvPr id="16" name="Rounded Rectangle 15"/>
+          <p:cNvPr id="28" name="Rounded Rectangle 27"/>
           <p:cNvSpPr/>
           <p:nvPr/>
         </p:nvSpPr>
         <p:spPr>
           <a:xfrm>
-            <a:off x="932688" y="3995928"/>
+            <a:off x="6345936" y="4096512"/>
             <a:ext cx="438912" cy="438912"/>
           </a:xfrm>
           <a:prstGeom prst="roundRect">
             <a:avLst/>
           </a:prstGeom>
           <a:solidFill>
-            <a:srgbClr val="10B981"/>
+            <a:srgbClr val="F59E0B"/>
           </a:solidFill>
           <a:ln>
             <a:solidFill>
-              <a:srgbClr val="10B981"/>
+              <a:srgbClr val="F59E0B"/>
             </a:solidFill>
           </a:ln>
         </p:spPr>
@@ -4082,13 +4563,13 @@
       </p:sp>
       <p:sp>
         <p:nvSpPr>
-          <p:cNvPr id="17" name="TextBox 16"/>
+          <p:cNvPr id="29" name="TextBox 28"/>
           <p:cNvSpPr txBox="1"/>
           <p:nvPr/>
         </p:nvSpPr>
         <p:spPr>
           <a:xfrm>
-            <a:off x="932688" y="4005072"/>
+            <a:off x="6345936" y="4105656"/>
             <a:ext cx="438912" cy="420624"/>
           </a:xfrm>
           <a:prstGeom prst="rect">
@@ -4110,21 +4591,21 @@
                 </a:solidFill>
                 <a:latin typeface="Arial"/>
               </a:rPr>
-              <a:t>2</a:t>
-            </a:r>
-          </a:p>
-        </p:txBody>
-      </p:sp>
-      <p:sp>
-        <p:nvSpPr>
-          <p:cNvPr id="18" name="TextBox 17"/>
+              <a:t>4</a:t>
+            </a:r>
+          </a:p>
+        </p:txBody>
+      </p:sp>
+      <p:sp>
+        <p:nvSpPr>
+          <p:cNvPr id="30" name="TextBox 29"/>
           <p:cNvSpPr txBox="1"/>
           <p:nvPr/>
         </p:nvSpPr>
         <p:spPr>
           <a:xfrm>
-            <a:off x="1536192" y="3959352"/>
-            <a:ext cx="9710928" cy="329184"/>
+            <a:off x="6949440" y="4059936"/>
+            <a:ext cx="4178808" cy="329184"/>
           </a:xfrm>
           <a:prstGeom prst="rect">
             <a:avLst/>
@@ -4141,25 +4622,25 @@
             <a:r>
               <a:rPr sz="1400" b="1">
                 <a:solidFill>
-                  <a:srgbClr val="10B981"/>
+                  <a:srgbClr val="F59E0B"/>
                 </a:solidFill>
                 <a:latin typeface="Arial"/>
               </a:rPr>
-              <a:t>Decision pressure</a:t>
-            </a:r>
-          </a:p>
-        </p:txBody>
-      </p:sp>
-      <p:sp>
-        <p:nvSpPr>
-          <p:cNvPr id="19" name="TextBox 18"/>
+              <a:t>Gemini Notebook deck</a:t>
+            </a:r>
+          </a:p>
+        </p:txBody>
+      </p:sp>
+      <p:sp>
+        <p:nvSpPr>
+          <p:cNvPr id="31" name="TextBox 30"/>
           <p:cNvSpPr txBox="1"/>
           <p:nvPr/>
         </p:nvSpPr>
         <p:spPr>
           <a:xfrm>
-            <a:off x="1536192" y="4343400"/>
-            <a:ext cx="9710928" cy="978408"/>
+            <a:off x="6949440" y="4443984"/>
+            <a:ext cx="4178808" cy="1133856"/>
           </a:xfrm>
           <a:prstGeom prst="rect">
             <a:avLst/>
@@ -4180,7 +4661,7 @@
                 </a:solidFill>
                 <a:latin typeface="Arial"/>
               </a:rPr>
-              <a:t>Use the supplied budget workbook and effectiveness evidence to recommend a 12-month tool, training and governance plan aligned with business outcomes.</a:t>
+              <a:t>Create Presenter Slides for business stakeholders. Focus on the verified decision insight, use a concise professional style, include source-grounded comparisons and a final recommendation. Avoid claims not supported by selected sources…</a:t>
             </a:r>
           </a:p>
         </p:txBody>
@@ -4263,6 +4744,486 @@
             <a:avLst/>
           </a:prstGeom>
           <a:solidFill>
+            <a:srgbClr val="1F6FEB"/>
+          </a:solidFill>
+          <a:ln>
+            <a:solidFill>
+              <a:srgbClr val="1F6FEB"/>
+            </a:solidFill>
+          </a:ln>
+        </p:spPr>
+        <p:style>
+          <a:lnRef idx="1">
+            <a:schemeClr val="accent1"/>
+          </a:lnRef>
+          <a:fillRef idx="3">
+            <a:schemeClr val="accent1"/>
+          </a:fillRef>
+          <a:effectRef idx="2">
+            <a:schemeClr val="accent1"/>
+          </a:effectRef>
+          <a:fontRef idx="minor">
+            <a:schemeClr val="lt1"/>
+          </a:fontRef>
+        </p:style>
+        <p:txBody>
+          <a:bodyPr rtlCol="0" anchor="ctr"/>
+          <a:lstStyle/>
+          <a:p>
+            <a:pPr algn="ctr"/>
+          </a:p>
+        </p:txBody>
+      </p:sp>
+      <p:sp>
+        <p:nvSpPr>
+          <p:cNvPr id="4" name="TextBox 3"/>
+          <p:cNvSpPr txBox="1"/>
+          <p:nvPr/>
+        </p:nvSpPr>
+        <p:spPr>
+          <a:xfrm>
+            <a:off x="658368" y="384048"/>
+            <a:ext cx="10789920" cy="320040"/>
+          </a:xfrm>
+          <a:prstGeom prst="rect">
+            <a:avLst/>
+          </a:prstGeom>
+          <a:noFill/>
+        </p:spPr>
+        <p:txBody>
+          <a:bodyPr wrap="square" anchor="t">
+            <a:spAutoFit/>
+          </a:bodyPr>
+          <a:lstStyle/>
+          <a:p>
+            <a:pPr algn="l"/>
+            <a:r>
+              <a:rPr sz="1100" b="1">
+                <a:solidFill>
+                  <a:srgbClr val="1F6FEB"/>
+                </a:solidFill>
+                <a:latin typeface="Arial"/>
+              </a:rPr>
+              <a:t>ACTIVITY 08 · CONTEXT</a:t>
+            </a:r>
+          </a:p>
+        </p:txBody>
+      </p:sp>
+      <p:sp>
+        <p:nvSpPr>
+          <p:cNvPr id="5" name="TextBox 4"/>
+          <p:cNvSpPr txBox="1"/>
+          <p:nvPr/>
+        </p:nvSpPr>
+        <p:spPr>
+          <a:xfrm>
+            <a:off x="658368" y="749808"/>
+            <a:ext cx="10789920" cy="658368"/>
+          </a:xfrm>
+          <a:prstGeom prst="rect">
+            <a:avLst/>
+          </a:prstGeom>
+          <a:noFill/>
+        </p:spPr>
+        <p:txBody>
+          <a:bodyPr wrap="square" anchor="t">
+            <a:spAutoFit/>
+          </a:bodyPr>
+          <a:lstStyle/>
+          <a:p>
+            <a:pPr algn="l"/>
+            <a:r>
+              <a:rPr sz="2700" b="1">
+                <a:solidFill>
+                  <a:srgbClr val="161B26"/>
+                </a:solidFill>
+                <a:latin typeface="Arial"/>
+              </a:rPr>
+              <a:t>The Scenario</a:t>
+            </a:r>
+          </a:p>
+        </p:txBody>
+      </p:sp>
+      <p:sp>
+        <p:nvSpPr>
+          <p:cNvPr id="6" name="Rectangle 5"/>
+          <p:cNvSpPr/>
+          <p:nvPr/>
+        </p:nvSpPr>
+        <p:spPr>
+          <a:xfrm>
+            <a:off x="658368" y="1444752"/>
+            <a:ext cx="10881360" cy="18288"/>
+          </a:xfrm>
+          <a:prstGeom prst="rect">
+            <a:avLst/>
+          </a:prstGeom>
+          <a:solidFill>
+            <a:srgbClr val="E2E8F0"/>
+          </a:solidFill>
+          <a:ln>
+            <a:solidFill>
+              <a:srgbClr val="E2E8F0"/>
+            </a:solidFill>
+          </a:ln>
+        </p:spPr>
+        <p:style>
+          <a:lnRef idx="1">
+            <a:schemeClr val="accent1"/>
+          </a:lnRef>
+          <a:fillRef idx="3">
+            <a:schemeClr val="accent1"/>
+          </a:fillRef>
+          <a:effectRef idx="2">
+            <a:schemeClr val="accent1"/>
+          </a:effectRef>
+          <a:fontRef idx="minor">
+            <a:schemeClr val="lt1"/>
+          </a:fontRef>
+        </p:style>
+        <p:txBody>
+          <a:bodyPr rtlCol="0" anchor="ctr"/>
+          <a:lstStyle/>
+          <a:p>
+            <a:pPr algn="ctr"/>
+          </a:p>
+        </p:txBody>
+      </p:sp>
+      <p:sp>
+        <p:nvSpPr>
+          <p:cNvPr id="7" name="TextBox 6"/>
+          <p:cNvSpPr txBox="1"/>
+          <p:nvPr/>
+        </p:nvSpPr>
+        <p:spPr>
+          <a:xfrm>
+            <a:off x="658368" y="6473952"/>
+            <a:ext cx="9875520" cy="201168"/>
+          </a:xfrm>
+          <a:prstGeom prst="rect">
+            <a:avLst/>
+          </a:prstGeom>
+          <a:noFill/>
+        </p:spPr>
+        <p:txBody>
+          <a:bodyPr wrap="square" anchor="t">
+            <a:spAutoFit/>
+          </a:bodyPr>
+          <a:lstStyle/>
+          <a:p>
+            <a:pPr algn="l"/>
+            <a:r>
+              <a:rPr sz="800" b="0">
+                <a:solidFill>
+                  <a:srgbClr val="5B6372"/>
+                </a:solidFill>
+                <a:latin typeface="Arial"/>
+              </a:rPr>
+              <a:t>TGS-2026064178 · ACTIVITY PRACTICE · Tertiary Infotech Academy Pte Ltd</a:t>
+            </a:r>
+          </a:p>
+        </p:txBody>
+      </p:sp>
+      <p:sp>
+        <p:nvSpPr>
+          <p:cNvPr id="8" name="Rounded Rectangle 7"/>
+          <p:cNvSpPr/>
+          <p:nvPr/>
+        </p:nvSpPr>
+        <p:spPr>
+          <a:xfrm>
+            <a:off x="731520" y="1783080"/>
+            <a:ext cx="10698480" cy="1691640"/>
+          </a:xfrm>
+          <a:prstGeom prst="roundRect">
+            <a:avLst/>
+          </a:prstGeom>
+          <a:solidFill>
+            <a:srgbClr val="F5F8FC"/>
+          </a:solidFill>
+          <a:ln>
+            <a:solidFill>
+              <a:srgbClr val="E2E8F0"/>
+            </a:solidFill>
+          </a:ln>
+        </p:spPr>
+        <p:style>
+          <a:lnRef idx="1">
+            <a:schemeClr val="accent1"/>
+          </a:lnRef>
+          <a:fillRef idx="3">
+            <a:schemeClr val="accent1"/>
+          </a:fillRef>
+          <a:effectRef idx="2">
+            <a:schemeClr val="accent1"/>
+          </a:effectRef>
+          <a:fontRef idx="minor">
+            <a:schemeClr val="lt1"/>
+          </a:fontRef>
+        </p:style>
+        <p:txBody>
+          <a:bodyPr rtlCol="0" anchor="ctr"/>
+          <a:lstStyle/>
+          <a:p>
+            <a:pPr algn="ctr"/>
+          </a:p>
+        </p:txBody>
+      </p:sp>
+      <p:sp>
+        <p:nvSpPr>
+          <p:cNvPr id="9" name="Rectangle 8"/>
+          <p:cNvSpPr/>
+          <p:nvPr/>
+        </p:nvSpPr>
+        <p:spPr>
+          <a:xfrm>
+            <a:off x="731520" y="1783080"/>
+            <a:ext cx="73152" cy="1691640"/>
+          </a:xfrm>
+          <a:prstGeom prst="rect">
+            <a:avLst/>
+          </a:prstGeom>
+          <a:solidFill>
+            <a:srgbClr val="1F6FEB"/>
+          </a:solidFill>
+          <a:ln>
+            <a:solidFill>
+              <a:srgbClr val="1F6FEB"/>
+            </a:solidFill>
+          </a:ln>
+        </p:spPr>
+        <p:style>
+          <a:lnRef idx="1">
+            <a:schemeClr val="accent1"/>
+          </a:lnRef>
+          <a:fillRef idx="3">
+            <a:schemeClr val="accent1"/>
+          </a:fillRef>
+          <a:effectRef idx="2">
+            <a:schemeClr val="accent1"/>
+          </a:effectRef>
+          <a:fontRef idx="minor">
+            <a:schemeClr val="lt1"/>
+          </a:fontRef>
+        </p:style>
+        <p:txBody>
+          <a:bodyPr rtlCol="0" anchor="ctr"/>
+          <a:lstStyle/>
+          <a:p>
+            <a:pPr algn="ctr"/>
+          </a:p>
+        </p:txBody>
+      </p:sp>
+      <p:sp>
+        <p:nvSpPr>
+          <p:cNvPr id="10" name="Rounded Rectangle 9"/>
+          <p:cNvSpPr/>
+          <p:nvPr/>
+        </p:nvSpPr>
+        <p:spPr>
+          <a:xfrm>
+            <a:off x="932688" y="2002536"/>
+            <a:ext cx="438912" cy="438912"/>
+          </a:xfrm>
+          <a:prstGeom prst="roundRect">
+            <a:avLst/>
+          </a:prstGeom>
+          <a:solidFill>
+            <a:srgbClr val="1F6FEB"/>
+          </a:solidFill>
+          <a:ln>
+            <a:solidFill>
+              <a:srgbClr val="1F6FEB"/>
+            </a:solidFill>
+          </a:ln>
+        </p:spPr>
+        <p:style>
+          <a:lnRef idx="1">
+            <a:schemeClr val="accent1"/>
+          </a:lnRef>
+          <a:fillRef idx="3">
+            <a:schemeClr val="accent1"/>
+          </a:fillRef>
+          <a:effectRef idx="2">
+            <a:schemeClr val="accent1"/>
+          </a:effectRef>
+          <a:fontRef idx="minor">
+            <a:schemeClr val="lt1"/>
+          </a:fontRef>
+        </p:style>
+        <p:txBody>
+          <a:bodyPr rtlCol="0" anchor="ctr"/>
+          <a:lstStyle/>
+          <a:p>
+            <a:pPr algn="ctr"/>
+          </a:p>
+        </p:txBody>
+      </p:sp>
+      <p:sp>
+        <p:nvSpPr>
+          <p:cNvPr id="11" name="TextBox 10"/>
+          <p:cNvSpPr txBox="1"/>
+          <p:nvPr/>
+        </p:nvSpPr>
+        <p:spPr>
+          <a:xfrm>
+            <a:off x="932688" y="2011680"/>
+            <a:ext cx="438912" cy="420624"/>
+          </a:xfrm>
+          <a:prstGeom prst="rect">
+            <a:avLst/>
+          </a:prstGeom>
+          <a:noFill/>
+        </p:spPr>
+        <p:txBody>
+          <a:bodyPr wrap="square" anchor="ctr">
+            <a:spAutoFit/>
+          </a:bodyPr>
+          <a:lstStyle/>
+          <a:p>
+            <a:pPr algn="ctr"/>
+            <a:r>
+              <a:rPr sz="1400" b="1">
+                <a:solidFill>
+                  <a:srgbClr val="FFFFFF"/>
+                </a:solidFill>
+                <a:latin typeface="Arial"/>
+              </a:rPr>
+              <a:t>1</a:t>
+            </a:r>
+          </a:p>
+        </p:txBody>
+      </p:sp>
+      <p:sp>
+        <p:nvSpPr>
+          <p:cNvPr id="12" name="TextBox 11"/>
+          <p:cNvSpPr txBox="1"/>
+          <p:nvPr/>
+        </p:nvSpPr>
+        <p:spPr>
+          <a:xfrm>
+            <a:off x="1536192" y="1965960"/>
+            <a:ext cx="9710928" cy="329184"/>
+          </a:xfrm>
+          <a:prstGeom prst="rect">
+            <a:avLst/>
+          </a:prstGeom>
+          <a:noFill/>
+        </p:spPr>
+        <p:txBody>
+          <a:bodyPr wrap="square" anchor="t">
+            <a:spAutoFit/>
+          </a:bodyPr>
+          <a:lstStyle/>
+          <a:p>
+            <a:pPr algn="l"/>
+            <a:r>
+              <a:rPr sz="1400" b="1">
+                <a:solidFill>
+                  <a:srgbClr val="1F6FEB"/>
+                </a:solidFill>
+                <a:latin typeface="Arial"/>
+              </a:rPr>
+              <a:t>Context</a:t>
+            </a:r>
+          </a:p>
+        </p:txBody>
+      </p:sp>
+      <p:sp>
+        <p:nvSpPr>
+          <p:cNvPr id="13" name="TextBox 12"/>
+          <p:cNvSpPr txBox="1"/>
+          <p:nvPr/>
+        </p:nvSpPr>
+        <p:spPr>
+          <a:xfrm>
+            <a:off x="1536192" y="2350008"/>
+            <a:ext cx="9710928" cy="978408"/>
+          </a:xfrm>
+          <a:prstGeom prst="rect">
+            <a:avLst/>
+          </a:prstGeom>
+          <a:noFill/>
+        </p:spPr>
+        <p:txBody>
+          <a:bodyPr wrap="square" anchor="t">
+            <a:spAutoFit/>
+          </a:bodyPr>
+          <a:lstStyle/>
+          <a:p>
+            <a:pPr algn="l"/>
+            <a:r>
+              <a:rPr sz="1150" b="0">
+                <a:solidFill>
+                  <a:srgbClr val="161B26"/>
+                </a:solidFill>
+                <a:latin typeface="Arial"/>
+              </a:rPr>
+              <a:t>Northstar can fund one standard workflow for 12 staff. Options include PowerPoint templates only, PowerPoint with Copilot, Gemini Notebook with PowerPoint, or a mixed AI workflow with PowerPoint as the controlled final-production layer.</a:t>
+            </a:r>
+          </a:p>
+        </p:txBody>
+      </p:sp>
+      <p:sp>
+        <p:nvSpPr>
+          <p:cNvPr id="14" name="Rounded Rectangle 13"/>
+          <p:cNvSpPr/>
+          <p:nvPr/>
+        </p:nvSpPr>
+        <p:spPr>
+          <a:xfrm>
+            <a:off x="731520" y="3776472"/>
+            <a:ext cx="10698480" cy="1691640"/>
+          </a:xfrm>
+          <a:prstGeom prst="roundRect">
+            <a:avLst/>
+          </a:prstGeom>
+          <a:solidFill>
+            <a:srgbClr val="F5F8FC"/>
+          </a:solidFill>
+          <a:ln>
+            <a:solidFill>
+              <a:srgbClr val="E2E8F0"/>
+            </a:solidFill>
+          </a:ln>
+        </p:spPr>
+        <p:style>
+          <a:lnRef idx="1">
+            <a:schemeClr val="accent1"/>
+          </a:lnRef>
+          <a:fillRef idx="3">
+            <a:schemeClr val="accent1"/>
+          </a:fillRef>
+          <a:effectRef idx="2">
+            <a:schemeClr val="accent1"/>
+          </a:effectRef>
+          <a:fontRef idx="minor">
+            <a:schemeClr val="lt1"/>
+          </a:fontRef>
+        </p:style>
+        <p:txBody>
+          <a:bodyPr rtlCol="0" anchor="ctr"/>
+          <a:lstStyle/>
+          <a:p>
+            <a:pPr algn="ctr"/>
+          </a:p>
+        </p:txBody>
+      </p:sp>
+      <p:sp>
+        <p:nvSpPr>
+          <p:cNvPr id="15" name="Rectangle 14"/>
+          <p:cNvSpPr/>
+          <p:nvPr/>
+        </p:nvSpPr>
+        <p:spPr>
+          <a:xfrm>
+            <a:off x="731520" y="3776472"/>
+            <a:ext cx="73152" cy="1691640"/>
+          </a:xfrm>
+          <a:prstGeom prst="rect">
+            <a:avLst/>
+          </a:prstGeom>
+          <a:solidFill>
             <a:srgbClr val="10B981"/>
           </a:solidFill>
           <a:ln>
@@ -4295,94 +5256,24 @@
       </p:sp>
       <p:sp>
         <p:nvSpPr>
-          <p:cNvPr id="4" name="TextBox 3"/>
-          <p:cNvSpPr txBox="1"/>
-          <p:nvPr/>
-        </p:nvSpPr>
-        <p:spPr>
-          <a:xfrm>
-            <a:off x="658368" y="384048"/>
-            <a:ext cx="10789920" cy="320040"/>
-          </a:xfrm>
-          <a:prstGeom prst="rect">
-            <a:avLst/>
-          </a:prstGeom>
-          <a:noFill/>
-        </p:spPr>
-        <p:txBody>
-          <a:bodyPr wrap="square" anchor="t">
-            <a:spAutoFit/>
-          </a:bodyPr>
-          <a:lstStyle/>
-          <a:p>
-            <a:pPr algn="l"/>
-            <a:r>
-              <a:rPr sz="1100" b="1">
-                <a:solidFill>
-                  <a:srgbClr val="10B981"/>
-                </a:solidFill>
-                <a:latin typeface="Arial"/>
-              </a:rPr>
-              <a:t>ACTIVITY 08 · FRAMEWORK</a:t>
-            </a:r>
-          </a:p>
-        </p:txBody>
-      </p:sp>
-      <p:sp>
-        <p:nvSpPr>
-          <p:cNvPr id="5" name="TextBox 4"/>
-          <p:cNvSpPr txBox="1"/>
-          <p:nvPr/>
-        </p:nvSpPr>
-        <p:spPr>
-          <a:xfrm>
-            <a:off x="658368" y="749808"/>
-            <a:ext cx="10789920" cy="658368"/>
-          </a:xfrm>
-          <a:prstGeom prst="rect">
-            <a:avLst/>
-          </a:prstGeom>
-          <a:noFill/>
-        </p:spPr>
-        <p:txBody>
-          <a:bodyPr wrap="square" anchor="t">
-            <a:spAutoFit/>
-          </a:bodyPr>
-          <a:lstStyle/>
-          <a:p>
-            <a:pPr algn="l"/>
-            <a:r>
-              <a:rPr sz="2700" b="1">
-                <a:solidFill>
-                  <a:srgbClr val="161B26"/>
-                </a:solidFill>
-                <a:latin typeface="Arial"/>
-              </a:rPr>
-              <a:t>Investment Decision Loop</a:t>
-            </a:r>
-          </a:p>
-        </p:txBody>
-      </p:sp>
-      <p:sp>
-        <p:nvSpPr>
-          <p:cNvPr id="6" name="Rectangle 5"/>
+          <p:cNvPr id="16" name="Rounded Rectangle 15"/>
           <p:cNvSpPr/>
           <p:nvPr/>
         </p:nvSpPr>
         <p:spPr>
           <a:xfrm>
-            <a:off x="658368" y="1444752"/>
-            <a:ext cx="10881360" cy="18288"/>
-          </a:xfrm>
-          <a:prstGeom prst="rect">
-            <a:avLst/>
-          </a:prstGeom>
-          <a:solidFill>
-            <a:srgbClr val="E2E8F0"/>
+            <a:off x="932688" y="3995928"/>
+            <a:ext cx="438912" cy="438912"/>
+          </a:xfrm>
+          <a:prstGeom prst="roundRect">
+            <a:avLst/>
+          </a:prstGeom>
+          <a:solidFill>
+            <a:srgbClr val="10B981"/>
           </a:solidFill>
           <a:ln>
             <a:solidFill>
-              <a:srgbClr val="E2E8F0"/>
+              <a:srgbClr val="10B981"/>
             </a:solidFill>
           </a:ln>
         </p:spPr>
@@ -4410,14 +5301,49 @@
       </p:sp>
       <p:sp>
         <p:nvSpPr>
-          <p:cNvPr id="7" name="TextBox 6"/>
+          <p:cNvPr id="17" name="TextBox 16"/>
           <p:cNvSpPr txBox="1"/>
           <p:nvPr/>
         </p:nvSpPr>
         <p:spPr>
           <a:xfrm>
-            <a:off x="658368" y="6473952"/>
-            <a:ext cx="9875520" cy="201168"/>
+            <a:off x="932688" y="4005072"/>
+            <a:ext cx="438912" cy="420624"/>
+          </a:xfrm>
+          <a:prstGeom prst="rect">
+            <a:avLst/>
+          </a:prstGeom>
+          <a:noFill/>
+        </p:spPr>
+        <p:txBody>
+          <a:bodyPr wrap="square" anchor="ctr">
+            <a:spAutoFit/>
+          </a:bodyPr>
+          <a:lstStyle/>
+          <a:p>
+            <a:pPr algn="ctr"/>
+            <a:r>
+              <a:rPr sz="1400" b="1">
+                <a:solidFill>
+                  <a:srgbClr val="FFFFFF"/>
+                </a:solidFill>
+                <a:latin typeface="Arial"/>
+              </a:rPr>
+              <a:t>2</a:t>
+            </a:r>
+          </a:p>
+        </p:txBody>
+      </p:sp>
+      <p:sp>
+        <p:nvSpPr>
+          <p:cNvPr id="18" name="TextBox 17"/>
+          <p:cNvSpPr txBox="1"/>
+          <p:nvPr/>
+        </p:nvSpPr>
+        <p:spPr>
+          <a:xfrm>
+            <a:off x="1536192" y="3959352"/>
+            <a:ext cx="9710928" cy="329184"/>
           </a:xfrm>
           <a:prstGeom prst="rect">
             <a:avLst/>
@@ -4432,197 +5358,27 @@
           <a:p>
             <a:pPr algn="l"/>
             <a:r>
-              <a:rPr sz="800" b="0">
-                <a:solidFill>
-                  <a:srgbClr val="5B6372"/>
+              <a:rPr sz="1400" b="1">
+                <a:solidFill>
+                  <a:srgbClr val="10B981"/>
                 </a:solidFill>
                 <a:latin typeface="Arial"/>
               </a:rPr>
-              <a:t>TGS-2024048310 · ACTIVITY PRACTICE · Tertiary Infotech Academy Pte Ltd</a:t>
-            </a:r>
-          </a:p>
-        </p:txBody>
-      </p:sp>
-      <p:sp>
-        <p:nvSpPr>
-          <p:cNvPr id="8" name="Rounded Rectangle 7"/>
-          <p:cNvSpPr/>
-          <p:nvPr/>
-        </p:nvSpPr>
-        <p:spPr>
-          <a:xfrm>
-            <a:off x="685800" y="1920240"/>
-            <a:ext cx="1997049" cy="3566160"/>
-          </a:xfrm>
-          <a:prstGeom prst="roundRect">
-            <a:avLst/>
-          </a:prstGeom>
-          <a:solidFill>
-            <a:srgbClr val="F5F8FC"/>
-          </a:solidFill>
-          <a:ln>
-            <a:solidFill>
-              <a:srgbClr val="E2E8F0"/>
-            </a:solidFill>
-          </a:ln>
-        </p:spPr>
-        <p:style>
-          <a:lnRef idx="1">
-            <a:schemeClr val="accent1"/>
-          </a:lnRef>
-          <a:fillRef idx="3">
-            <a:schemeClr val="accent1"/>
-          </a:fillRef>
-          <a:effectRef idx="2">
-            <a:schemeClr val="accent1"/>
-          </a:effectRef>
-          <a:fontRef idx="minor">
-            <a:schemeClr val="lt1"/>
-          </a:fontRef>
-        </p:style>
-        <p:txBody>
-          <a:bodyPr rtlCol="0" anchor="ctr"/>
-          <a:lstStyle/>
-          <a:p>
-            <a:pPr algn="ctr"/>
-          </a:p>
-        </p:txBody>
-      </p:sp>
-      <p:sp>
-        <p:nvSpPr>
-          <p:cNvPr id="9" name="Rectangle 8"/>
-          <p:cNvSpPr/>
-          <p:nvPr/>
-        </p:nvSpPr>
-        <p:spPr>
-          <a:xfrm>
-            <a:off x="685800" y="1920240"/>
-            <a:ext cx="73152" cy="3566160"/>
-          </a:xfrm>
-          <a:prstGeom prst="rect">
-            <a:avLst/>
-          </a:prstGeom>
-          <a:solidFill>
-            <a:srgbClr val="1F6FEB"/>
-          </a:solidFill>
-          <a:ln>
-            <a:solidFill>
-              <a:srgbClr val="1F6FEB"/>
-            </a:solidFill>
-          </a:ln>
-        </p:spPr>
-        <p:style>
-          <a:lnRef idx="1">
-            <a:schemeClr val="accent1"/>
-          </a:lnRef>
-          <a:fillRef idx="3">
-            <a:schemeClr val="accent1"/>
-          </a:fillRef>
-          <a:effectRef idx="2">
-            <a:schemeClr val="accent1"/>
-          </a:effectRef>
-          <a:fontRef idx="minor">
-            <a:schemeClr val="lt1"/>
-          </a:fontRef>
-        </p:style>
-        <p:txBody>
-          <a:bodyPr rtlCol="0" anchor="ctr"/>
-          <a:lstStyle/>
-          <a:p>
-            <a:pPr algn="ctr"/>
-          </a:p>
-        </p:txBody>
-      </p:sp>
-      <p:sp>
-        <p:nvSpPr>
-          <p:cNvPr id="10" name="Rounded Rectangle 9"/>
-          <p:cNvSpPr/>
-          <p:nvPr/>
-        </p:nvSpPr>
-        <p:spPr>
-          <a:xfrm>
-            <a:off x="886968" y="2139696"/>
-            <a:ext cx="438912" cy="438912"/>
-          </a:xfrm>
-          <a:prstGeom prst="roundRect">
-            <a:avLst/>
-          </a:prstGeom>
-          <a:solidFill>
-            <a:srgbClr val="1F6FEB"/>
-          </a:solidFill>
-          <a:ln>
-            <a:solidFill>
-              <a:srgbClr val="1F6FEB"/>
-            </a:solidFill>
-          </a:ln>
-        </p:spPr>
-        <p:style>
-          <a:lnRef idx="1">
-            <a:schemeClr val="accent1"/>
-          </a:lnRef>
-          <a:fillRef idx="3">
-            <a:schemeClr val="accent1"/>
-          </a:fillRef>
-          <a:effectRef idx="2">
-            <a:schemeClr val="accent1"/>
-          </a:effectRef>
-          <a:fontRef idx="minor">
-            <a:schemeClr val="lt1"/>
-          </a:fontRef>
-        </p:style>
-        <p:txBody>
-          <a:bodyPr rtlCol="0" anchor="ctr"/>
-          <a:lstStyle/>
-          <a:p>
-            <a:pPr algn="ctr"/>
-          </a:p>
-        </p:txBody>
-      </p:sp>
-      <p:sp>
-        <p:nvSpPr>
-          <p:cNvPr id="11" name="TextBox 10"/>
+              <a:t>Decision pressure</a:t>
+            </a:r>
+          </a:p>
+        </p:txBody>
+      </p:sp>
+      <p:sp>
+        <p:nvSpPr>
+          <p:cNvPr id="19" name="TextBox 18"/>
           <p:cNvSpPr txBox="1"/>
           <p:nvPr/>
         </p:nvSpPr>
         <p:spPr>
           <a:xfrm>
-            <a:off x="886968" y="2148840"/>
-            <a:ext cx="438912" cy="420624"/>
-          </a:xfrm>
-          <a:prstGeom prst="rect">
-            <a:avLst/>
-          </a:prstGeom>
-          <a:noFill/>
-        </p:spPr>
-        <p:txBody>
-          <a:bodyPr wrap="square" anchor="ctr">
-            <a:spAutoFit/>
-          </a:bodyPr>
-          <a:lstStyle/>
-          <a:p>
-            <a:pPr algn="ctr"/>
-            <a:r>
-              <a:rPr sz="1400" b="1">
-                <a:solidFill>
-                  <a:srgbClr val="FFFFFF"/>
-                </a:solidFill>
-                <a:latin typeface="Arial"/>
-              </a:rPr>
-              <a:t>1</a:t>
-            </a:r>
-          </a:p>
-        </p:txBody>
-      </p:sp>
-      <p:sp>
-        <p:nvSpPr>
-          <p:cNvPr id="12" name="TextBox 11"/>
-          <p:cNvSpPr txBox="1"/>
-          <p:nvPr/>
-        </p:nvSpPr>
-        <p:spPr>
-          <a:xfrm>
-            <a:off x="1490472" y="2103120"/>
-            <a:ext cx="1009497" cy="329184"/>
+            <a:off x="1536192" y="4343400"/>
+            <a:ext cx="9710928" cy="978408"/>
           </a:xfrm>
           <a:prstGeom prst="rect">
             <a:avLst/>
@@ -4637,1008 +5393,13 @@
           <a:p>
             <a:pPr algn="l"/>
             <a:r>
-              <a:rPr sz="1400" b="1">
-                <a:solidFill>
-                  <a:srgbClr val="1F6FEB"/>
+              <a:rPr sz="1150" b="0">
+                <a:solidFill>
+                  <a:srgbClr val="161B26"/>
                 </a:solidFill>
                 <a:latin typeface="Arial"/>
               </a:rPr>
-              <a:t>Need</a:t>
-            </a:r>
-          </a:p>
-        </p:txBody>
-      </p:sp>
-      <p:sp>
-        <p:nvSpPr>
-          <p:cNvPr id="13" name="TextBox 12"/>
-          <p:cNvSpPr txBox="1"/>
-          <p:nvPr/>
-        </p:nvSpPr>
-        <p:spPr>
-          <a:xfrm>
-            <a:off x="1490472" y="2487168"/>
-            <a:ext cx="1009497" cy="2852928"/>
-          </a:xfrm>
-          <a:prstGeom prst="rect">
-            <a:avLst/>
-          </a:prstGeom>
-          <a:noFill/>
-        </p:spPr>
-        <p:txBody>
-          <a:bodyPr wrap="square" anchor="t">
-            <a:spAutoFit/>
-          </a:bodyPr>
-          <a:lstStyle/>
-          <a:p>
-            <a:pPr algn="l"/>
-            <a:r>
-              <a:rPr sz="1150" b="0">
-                <a:solidFill>
-                  <a:srgbClr val="161B26"/>
-                </a:solidFill>
-                <a:latin typeface="Arial"/>
-              </a:rPr>
-              <a:t>Define outputs, volume, users and business outcomes.</a:t>
-            </a:r>
-          </a:p>
-        </p:txBody>
-      </p:sp>
-      <p:sp>
-        <p:nvSpPr>
-          <p:cNvPr id="14" name="Rounded Rectangle 13"/>
-          <p:cNvSpPr/>
-          <p:nvPr/>
-        </p:nvSpPr>
-        <p:spPr>
-          <a:xfrm>
-            <a:off x="2884017" y="1920240"/>
-            <a:ext cx="1997049" cy="3566160"/>
-          </a:xfrm>
-          <a:prstGeom prst="roundRect">
-            <a:avLst/>
-          </a:prstGeom>
-          <a:solidFill>
-            <a:srgbClr val="F5F8FC"/>
-          </a:solidFill>
-          <a:ln>
-            <a:solidFill>
-              <a:srgbClr val="E2E8F0"/>
-            </a:solidFill>
-          </a:ln>
-        </p:spPr>
-        <p:style>
-          <a:lnRef idx="1">
-            <a:schemeClr val="accent1"/>
-          </a:lnRef>
-          <a:fillRef idx="3">
-            <a:schemeClr val="accent1"/>
-          </a:fillRef>
-          <a:effectRef idx="2">
-            <a:schemeClr val="accent1"/>
-          </a:effectRef>
-          <a:fontRef idx="minor">
-            <a:schemeClr val="lt1"/>
-          </a:fontRef>
-        </p:style>
-        <p:txBody>
-          <a:bodyPr rtlCol="0" anchor="ctr"/>
-          <a:lstStyle/>
-          <a:p>
-            <a:pPr algn="ctr"/>
-          </a:p>
-        </p:txBody>
-      </p:sp>
-      <p:sp>
-        <p:nvSpPr>
-          <p:cNvPr id="15" name="Rectangle 14"/>
-          <p:cNvSpPr/>
-          <p:nvPr/>
-        </p:nvSpPr>
-        <p:spPr>
-          <a:xfrm>
-            <a:off x="2884017" y="1920240"/>
-            <a:ext cx="73152" cy="3566160"/>
-          </a:xfrm>
-          <a:prstGeom prst="rect">
-            <a:avLst/>
-          </a:prstGeom>
-          <a:solidFill>
-            <a:srgbClr val="10B981"/>
-          </a:solidFill>
-          <a:ln>
-            <a:solidFill>
-              <a:srgbClr val="10B981"/>
-            </a:solidFill>
-          </a:ln>
-        </p:spPr>
-        <p:style>
-          <a:lnRef idx="1">
-            <a:schemeClr val="accent1"/>
-          </a:lnRef>
-          <a:fillRef idx="3">
-            <a:schemeClr val="accent1"/>
-          </a:fillRef>
-          <a:effectRef idx="2">
-            <a:schemeClr val="accent1"/>
-          </a:effectRef>
-          <a:fontRef idx="minor">
-            <a:schemeClr val="lt1"/>
-          </a:fontRef>
-        </p:style>
-        <p:txBody>
-          <a:bodyPr rtlCol="0" anchor="ctr"/>
-          <a:lstStyle/>
-          <a:p>
-            <a:pPr algn="ctr"/>
-          </a:p>
-        </p:txBody>
-      </p:sp>
-      <p:sp>
-        <p:nvSpPr>
-          <p:cNvPr id="16" name="Rounded Rectangle 15"/>
-          <p:cNvSpPr/>
-          <p:nvPr/>
-        </p:nvSpPr>
-        <p:spPr>
-          <a:xfrm>
-            <a:off x="3085185" y="2139696"/>
-            <a:ext cx="438912" cy="438912"/>
-          </a:xfrm>
-          <a:prstGeom prst="roundRect">
-            <a:avLst/>
-          </a:prstGeom>
-          <a:solidFill>
-            <a:srgbClr val="10B981"/>
-          </a:solidFill>
-          <a:ln>
-            <a:solidFill>
-              <a:srgbClr val="10B981"/>
-            </a:solidFill>
-          </a:ln>
-        </p:spPr>
-        <p:style>
-          <a:lnRef idx="1">
-            <a:schemeClr val="accent1"/>
-          </a:lnRef>
-          <a:fillRef idx="3">
-            <a:schemeClr val="accent1"/>
-          </a:fillRef>
-          <a:effectRef idx="2">
-            <a:schemeClr val="accent1"/>
-          </a:effectRef>
-          <a:fontRef idx="minor">
-            <a:schemeClr val="lt1"/>
-          </a:fontRef>
-        </p:style>
-        <p:txBody>
-          <a:bodyPr rtlCol="0" anchor="ctr"/>
-          <a:lstStyle/>
-          <a:p>
-            <a:pPr algn="ctr"/>
-          </a:p>
-        </p:txBody>
-      </p:sp>
-      <p:sp>
-        <p:nvSpPr>
-          <p:cNvPr id="17" name="TextBox 16"/>
-          <p:cNvSpPr txBox="1"/>
-          <p:nvPr/>
-        </p:nvSpPr>
-        <p:spPr>
-          <a:xfrm>
-            <a:off x="3085185" y="2148840"/>
-            <a:ext cx="438912" cy="420624"/>
-          </a:xfrm>
-          <a:prstGeom prst="rect">
-            <a:avLst/>
-          </a:prstGeom>
-          <a:noFill/>
-        </p:spPr>
-        <p:txBody>
-          <a:bodyPr wrap="square" anchor="ctr">
-            <a:spAutoFit/>
-          </a:bodyPr>
-          <a:lstStyle/>
-          <a:p>
-            <a:pPr algn="ctr"/>
-            <a:r>
-              <a:rPr sz="1400" b="1">
-                <a:solidFill>
-                  <a:srgbClr val="FFFFFF"/>
-                </a:solidFill>
-                <a:latin typeface="Arial"/>
-              </a:rPr>
-              <a:t>2</a:t>
-            </a:r>
-          </a:p>
-        </p:txBody>
-      </p:sp>
-      <p:sp>
-        <p:nvSpPr>
-          <p:cNvPr id="18" name="TextBox 17"/>
-          <p:cNvSpPr txBox="1"/>
-          <p:nvPr/>
-        </p:nvSpPr>
-        <p:spPr>
-          <a:xfrm>
-            <a:off x="3688689" y="2103120"/>
-            <a:ext cx="1009497" cy="329184"/>
-          </a:xfrm>
-          <a:prstGeom prst="rect">
-            <a:avLst/>
-          </a:prstGeom>
-          <a:noFill/>
-        </p:spPr>
-        <p:txBody>
-          <a:bodyPr wrap="square" anchor="t">
-            <a:spAutoFit/>
-          </a:bodyPr>
-          <a:lstStyle/>
-          <a:p>
-            <a:pPr algn="l"/>
-            <a:r>
-              <a:rPr sz="1400" b="1">
-                <a:solidFill>
-                  <a:srgbClr val="10B981"/>
-                </a:solidFill>
-                <a:latin typeface="Arial"/>
-              </a:rPr>
-              <a:t>Compare</a:t>
-            </a:r>
-          </a:p>
-        </p:txBody>
-      </p:sp>
-      <p:sp>
-        <p:nvSpPr>
-          <p:cNvPr id="19" name="TextBox 18"/>
-          <p:cNvSpPr txBox="1"/>
-          <p:nvPr/>
-        </p:nvSpPr>
-        <p:spPr>
-          <a:xfrm>
-            <a:off x="3688689" y="2487168"/>
-            <a:ext cx="1009497" cy="2852928"/>
-          </a:xfrm>
-          <a:prstGeom prst="rect">
-            <a:avLst/>
-          </a:prstGeom>
-          <a:noFill/>
-        </p:spPr>
-        <p:txBody>
-          <a:bodyPr wrap="square" anchor="t">
-            <a:spAutoFit/>
-          </a:bodyPr>
-          <a:lstStyle/>
-          <a:p>
-            <a:pPr algn="l"/>
-            <a:r>
-              <a:rPr sz="1150" b="0">
-                <a:solidFill>
-                  <a:srgbClr val="161B26"/>
-                </a:solidFill>
-                <a:latin typeface="Arial"/>
-              </a:rPr>
-              <a:t>Score capability, cost, workflow and risk.</a:t>
-            </a:r>
-          </a:p>
-        </p:txBody>
-      </p:sp>
-      <p:sp>
-        <p:nvSpPr>
-          <p:cNvPr id="20" name="Rounded Rectangle 19"/>
-          <p:cNvSpPr/>
-          <p:nvPr/>
-        </p:nvSpPr>
-        <p:spPr>
-          <a:xfrm>
-            <a:off x="5082235" y="1920240"/>
-            <a:ext cx="1997049" cy="3566160"/>
-          </a:xfrm>
-          <a:prstGeom prst="roundRect">
-            <a:avLst/>
-          </a:prstGeom>
-          <a:solidFill>
-            <a:srgbClr val="F5F8FC"/>
-          </a:solidFill>
-          <a:ln>
-            <a:solidFill>
-              <a:srgbClr val="E2E8F0"/>
-            </a:solidFill>
-          </a:ln>
-        </p:spPr>
-        <p:style>
-          <a:lnRef idx="1">
-            <a:schemeClr val="accent1"/>
-          </a:lnRef>
-          <a:fillRef idx="3">
-            <a:schemeClr val="accent1"/>
-          </a:fillRef>
-          <a:effectRef idx="2">
-            <a:schemeClr val="accent1"/>
-          </a:effectRef>
-          <a:fontRef idx="minor">
-            <a:schemeClr val="lt1"/>
-          </a:fontRef>
-        </p:style>
-        <p:txBody>
-          <a:bodyPr rtlCol="0" anchor="ctr"/>
-          <a:lstStyle/>
-          <a:p>
-            <a:pPr algn="ctr"/>
-          </a:p>
-        </p:txBody>
-      </p:sp>
-      <p:sp>
-        <p:nvSpPr>
-          <p:cNvPr id="21" name="Rectangle 20"/>
-          <p:cNvSpPr/>
-          <p:nvPr/>
-        </p:nvSpPr>
-        <p:spPr>
-          <a:xfrm>
-            <a:off x="5082235" y="1920240"/>
-            <a:ext cx="73152" cy="3566160"/>
-          </a:xfrm>
-          <a:prstGeom prst="rect">
-            <a:avLst/>
-          </a:prstGeom>
-          <a:solidFill>
-            <a:srgbClr val="7C3AED"/>
-          </a:solidFill>
-          <a:ln>
-            <a:solidFill>
-              <a:srgbClr val="7C3AED"/>
-            </a:solidFill>
-          </a:ln>
-        </p:spPr>
-        <p:style>
-          <a:lnRef idx="1">
-            <a:schemeClr val="accent1"/>
-          </a:lnRef>
-          <a:fillRef idx="3">
-            <a:schemeClr val="accent1"/>
-          </a:fillRef>
-          <a:effectRef idx="2">
-            <a:schemeClr val="accent1"/>
-          </a:effectRef>
-          <a:fontRef idx="minor">
-            <a:schemeClr val="lt1"/>
-          </a:fontRef>
-        </p:style>
-        <p:txBody>
-          <a:bodyPr rtlCol="0" anchor="ctr"/>
-          <a:lstStyle/>
-          <a:p>
-            <a:pPr algn="ctr"/>
-          </a:p>
-        </p:txBody>
-      </p:sp>
-      <p:sp>
-        <p:nvSpPr>
-          <p:cNvPr id="22" name="Rounded Rectangle 21"/>
-          <p:cNvSpPr/>
-          <p:nvPr/>
-        </p:nvSpPr>
-        <p:spPr>
-          <a:xfrm>
-            <a:off x="5283403" y="2139696"/>
-            <a:ext cx="438912" cy="438912"/>
-          </a:xfrm>
-          <a:prstGeom prst="roundRect">
-            <a:avLst/>
-          </a:prstGeom>
-          <a:solidFill>
-            <a:srgbClr val="7C3AED"/>
-          </a:solidFill>
-          <a:ln>
-            <a:solidFill>
-              <a:srgbClr val="7C3AED"/>
-            </a:solidFill>
-          </a:ln>
-        </p:spPr>
-        <p:style>
-          <a:lnRef idx="1">
-            <a:schemeClr val="accent1"/>
-          </a:lnRef>
-          <a:fillRef idx="3">
-            <a:schemeClr val="accent1"/>
-          </a:fillRef>
-          <a:effectRef idx="2">
-            <a:schemeClr val="accent1"/>
-          </a:effectRef>
-          <a:fontRef idx="minor">
-            <a:schemeClr val="lt1"/>
-          </a:fontRef>
-        </p:style>
-        <p:txBody>
-          <a:bodyPr rtlCol="0" anchor="ctr"/>
-          <a:lstStyle/>
-          <a:p>
-            <a:pPr algn="ctr"/>
-          </a:p>
-        </p:txBody>
-      </p:sp>
-      <p:sp>
-        <p:nvSpPr>
-          <p:cNvPr id="23" name="TextBox 22"/>
-          <p:cNvSpPr txBox="1"/>
-          <p:nvPr/>
-        </p:nvSpPr>
-        <p:spPr>
-          <a:xfrm>
-            <a:off x="5283403" y="2148840"/>
-            <a:ext cx="438912" cy="420624"/>
-          </a:xfrm>
-          <a:prstGeom prst="rect">
-            <a:avLst/>
-          </a:prstGeom>
-          <a:noFill/>
-        </p:spPr>
-        <p:txBody>
-          <a:bodyPr wrap="square" anchor="ctr">
-            <a:spAutoFit/>
-          </a:bodyPr>
-          <a:lstStyle/>
-          <a:p>
-            <a:pPr algn="ctr"/>
-            <a:r>
-              <a:rPr sz="1400" b="1">
-                <a:solidFill>
-                  <a:srgbClr val="FFFFFF"/>
-                </a:solidFill>
-                <a:latin typeface="Arial"/>
-              </a:rPr>
-              <a:t>3</a:t>
-            </a:r>
-          </a:p>
-        </p:txBody>
-      </p:sp>
-      <p:sp>
-        <p:nvSpPr>
-          <p:cNvPr id="24" name="TextBox 23"/>
-          <p:cNvSpPr txBox="1"/>
-          <p:nvPr/>
-        </p:nvSpPr>
-        <p:spPr>
-          <a:xfrm>
-            <a:off x="5886907" y="2103120"/>
-            <a:ext cx="1009497" cy="329184"/>
-          </a:xfrm>
-          <a:prstGeom prst="rect">
-            <a:avLst/>
-          </a:prstGeom>
-          <a:noFill/>
-        </p:spPr>
-        <p:txBody>
-          <a:bodyPr wrap="square" anchor="t">
-            <a:spAutoFit/>
-          </a:bodyPr>
-          <a:lstStyle/>
-          <a:p>
-            <a:pPr algn="l"/>
-            <a:r>
-              <a:rPr sz="1400" b="1">
-                <a:solidFill>
-                  <a:srgbClr val="7C3AED"/>
-                </a:solidFill>
-                <a:latin typeface="Arial"/>
-              </a:rPr>
-              <a:t>Pilot</a:t>
-            </a:r>
-          </a:p>
-        </p:txBody>
-      </p:sp>
-      <p:sp>
-        <p:nvSpPr>
-          <p:cNvPr id="25" name="TextBox 24"/>
-          <p:cNvSpPr txBox="1"/>
-          <p:nvPr/>
-        </p:nvSpPr>
-        <p:spPr>
-          <a:xfrm>
-            <a:off x="5886907" y="2487168"/>
-            <a:ext cx="1009497" cy="2852928"/>
-          </a:xfrm>
-          <a:prstGeom prst="rect">
-            <a:avLst/>
-          </a:prstGeom>
-          <a:noFill/>
-        </p:spPr>
-        <p:txBody>
-          <a:bodyPr wrap="square" anchor="t">
-            <a:spAutoFit/>
-          </a:bodyPr>
-          <a:lstStyle/>
-          <a:p>
-            <a:pPr algn="l"/>
-            <a:r>
-              <a:rPr sz="1150" b="0">
-                <a:solidFill>
-                  <a:srgbClr val="161B26"/>
-                </a:solidFill>
-                <a:latin typeface="Arial"/>
-              </a:rPr>
-              <a:t>Test the same brief in shortlisted workflows.</a:t>
-            </a:r>
-          </a:p>
-        </p:txBody>
-      </p:sp>
-      <p:sp>
-        <p:nvSpPr>
-          <p:cNvPr id="26" name="Rounded Rectangle 25"/>
-          <p:cNvSpPr/>
-          <p:nvPr/>
-        </p:nvSpPr>
-        <p:spPr>
-          <a:xfrm>
-            <a:off x="7280452" y="1920240"/>
-            <a:ext cx="1997049" cy="3566160"/>
-          </a:xfrm>
-          <a:prstGeom prst="roundRect">
-            <a:avLst/>
-          </a:prstGeom>
-          <a:solidFill>
-            <a:srgbClr val="F5F8FC"/>
-          </a:solidFill>
-          <a:ln>
-            <a:solidFill>
-              <a:srgbClr val="E2E8F0"/>
-            </a:solidFill>
-          </a:ln>
-        </p:spPr>
-        <p:style>
-          <a:lnRef idx="1">
-            <a:schemeClr val="accent1"/>
-          </a:lnRef>
-          <a:fillRef idx="3">
-            <a:schemeClr val="accent1"/>
-          </a:fillRef>
-          <a:effectRef idx="2">
-            <a:schemeClr val="accent1"/>
-          </a:effectRef>
-          <a:fontRef idx="minor">
-            <a:schemeClr val="lt1"/>
-          </a:fontRef>
-        </p:style>
-        <p:txBody>
-          <a:bodyPr rtlCol="0" anchor="ctr"/>
-          <a:lstStyle/>
-          <a:p>
-            <a:pPr algn="ctr"/>
-          </a:p>
-        </p:txBody>
-      </p:sp>
-      <p:sp>
-        <p:nvSpPr>
-          <p:cNvPr id="27" name="Rectangle 26"/>
-          <p:cNvSpPr/>
-          <p:nvPr/>
-        </p:nvSpPr>
-        <p:spPr>
-          <a:xfrm>
-            <a:off x="7280452" y="1920240"/>
-            <a:ext cx="73152" cy="3566160"/>
-          </a:xfrm>
-          <a:prstGeom prst="rect">
-            <a:avLst/>
-          </a:prstGeom>
-          <a:solidFill>
-            <a:srgbClr val="F59E0B"/>
-          </a:solidFill>
-          <a:ln>
-            <a:solidFill>
-              <a:srgbClr val="F59E0B"/>
-            </a:solidFill>
-          </a:ln>
-        </p:spPr>
-        <p:style>
-          <a:lnRef idx="1">
-            <a:schemeClr val="accent1"/>
-          </a:lnRef>
-          <a:fillRef idx="3">
-            <a:schemeClr val="accent1"/>
-          </a:fillRef>
-          <a:effectRef idx="2">
-            <a:schemeClr val="accent1"/>
-          </a:effectRef>
-          <a:fontRef idx="minor">
-            <a:schemeClr val="lt1"/>
-          </a:fontRef>
-        </p:style>
-        <p:txBody>
-          <a:bodyPr rtlCol="0" anchor="ctr"/>
-          <a:lstStyle/>
-          <a:p>
-            <a:pPr algn="ctr"/>
-          </a:p>
-        </p:txBody>
-      </p:sp>
-      <p:sp>
-        <p:nvSpPr>
-          <p:cNvPr id="28" name="Rounded Rectangle 27"/>
-          <p:cNvSpPr/>
-          <p:nvPr/>
-        </p:nvSpPr>
-        <p:spPr>
-          <a:xfrm>
-            <a:off x="7481620" y="2139696"/>
-            <a:ext cx="438912" cy="438912"/>
-          </a:xfrm>
-          <a:prstGeom prst="roundRect">
-            <a:avLst/>
-          </a:prstGeom>
-          <a:solidFill>
-            <a:srgbClr val="F59E0B"/>
-          </a:solidFill>
-          <a:ln>
-            <a:solidFill>
-              <a:srgbClr val="F59E0B"/>
-            </a:solidFill>
-          </a:ln>
-        </p:spPr>
-        <p:style>
-          <a:lnRef idx="1">
-            <a:schemeClr val="accent1"/>
-          </a:lnRef>
-          <a:fillRef idx="3">
-            <a:schemeClr val="accent1"/>
-          </a:fillRef>
-          <a:effectRef idx="2">
-            <a:schemeClr val="accent1"/>
-          </a:effectRef>
-          <a:fontRef idx="minor">
-            <a:schemeClr val="lt1"/>
-          </a:fontRef>
-        </p:style>
-        <p:txBody>
-          <a:bodyPr rtlCol="0" anchor="ctr"/>
-          <a:lstStyle/>
-          <a:p>
-            <a:pPr algn="ctr"/>
-          </a:p>
-        </p:txBody>
-      </p:sp>
-      <p:sp>
-        <p:nvSpPr>
-          <p:cNvPr id="29" name="TextBox 28"/>
-          <p:cNvSpPr txBox="1"/>
-          <p:nvPr/>
-        </p:nvSpPr>
-        <p:spPr>
-          <a:xfrm>
-            <a:off x="7481620" y="2148840"/>
-            <a:ext cx="438912" cy="420624"/>
-          </a:xfrm>
-          <a:prstGeom prst="rect">
-            <a:avLst/>
-          </a:prstGeom>
-          <a:noFill/>
-        </p:spPr>
-        <p:txBody>
-          <a:bodyPr wrap="square" anchor="ctr">
-            <a:spAutoFit/>
-          </a:bodyPr>
-          <a:lstStyle/>
-          <a:p>
-            <a:pPr algn="ctr"/>
-            <a:r>
-              <a:rPr sz="1400" b="1">
-                <a:solidFill>
-                  <a:srgbClr val="FFFFFF"/>
-                </a:solidFill>
-                <a:latin typeface="Arial"/>
-              </a:rPr>
-              <a:t>4</a:t>
-            </a:r>
-          </a:p>
-        </p:txBody>
-      </p:sp>
-      <p:sp>
-        <p:nvSpPr>
-          <p:cNvPr id="30" name="TextBox 29"/>
-          <p:cNvSpPr txBox="1"/>
-          <p:nvPr/>
-        </p:nvSpPr>
-        <p:spPr>
-          <a:xfrm>
-            <a:off x="8085124" y="2103120"/>
-            <a:ext cx="1009497" cy="329184"/>
-          </a:xfrm>
-          <a:prstGeom prst="rect">
-            <a:avLst/>
-          </a:prstGeom>
-          <a:noFill/>
-        </p:spPr>
-        <p:txBody>
-          <a:bodyPr wrap="square" anchor="t">
-            <a:spAutoFit/>
-          </a:bodyPr>
-          <a:lstStyle/>
-          <a:p>
-            <a:pPr algn="l"/>
-            <a:r>
-              <a:rPr sz="1400" b="1">
-                <a:solidFill>
-                  <a:srgbClr val="F59E0B"/>
-                </a:solidFill>
-                <a:latin typeface="Arial"/>
-              </a:rPr>
-              <a:t>Measure</a:t>
-            </a:r>
-          </a:p>
-        </p:txBody>
-      </p:sp>
-      <p:sp>
-        <p:nvSpPr>
-          <p:cNvPr id="31" name="TextBox 30"/>
-          <p:cNvSpPr txBox="1"/>
-          <p:nvPr/>
-        </p:nvSpPr>
-        <p:spPr>
-          <a:xfrm>
-            <a:off x="8085124" y="2487168"/>
-            <a:ext cx="1009497" cy="2852928"/>
-          </a:xfrm>
-          <a:prstGeom prst="rect">
-            <a:avLst/>
-          </a:prstGeom>
-          <a:noFill/>
-        </p:spPr>
-        <p:txBody>
-          <a:bodyPr wrap="square" anchor="t">
-            <a:spAutoFit/>
-          </a:bodyPr>
-          <a:lstStyle/>
-          <a:p>
-            <a:pPr algn="l"/>
-            <a:r>
-              <a:rPr sz="1150" b="0">
-                <a:solidFill>
-                  <a:srgbClr val="161B26"/>
-                </a:solidFill>
-                <a:latin typeface="Arial"/>
-              </a:rPr>
-              <a:t>Collect quality, time, adoption and outcome evidence.</a:t>
-            </a:r>
-          </a:p>
-        </p:txBody>
-      </p:sp>
-      <p:sp>
-        <p:nvSpPr>
-          <p:cNvPr id="32" name="Rounded Rectangle 31"/>
-          <p:cNvSpPr/>
-          <p:nvPr/>
-        </p:nvSpPr>
-        <p:spPr>
-          <a:xfrm>
-            <a:off x="9478670" y="1920240"/>
-            <a:ext cx="1997049" cy="3566160"/>
-          </a:xfrm>
-          <a:prstGeom prst="roundRect">
-            <a:avLst/>
-          </a:prstGeom>
-          <a:solidFill>
-            <a:srgbClr val="F5F8FC"/>
-          </a:solidFill>
-          <a:ln>
-            <a:solidFill>
-              <a:srgbClr val="E2E8F0"/>
-            </a:solidFill>
-          </a:ln>
-        </p:spPr>
-        <p:style>
-          <a:lnRef idx="1">
-            <a:schemeClr val="accent1"/>
-          </a:lnRef>
-          <a:fillRef idx="3">
-            <a:schemeClr val="accent1"/>
-          </a:fillRef>
-          <a:effectRef idx="2">
-            <a:schemeClr val="accent1"/>
-          </a:effectRef>
-          <a:fontRef idx="minor">
-            <a:schemeClr val="lt1"/>
-          </a:fontRef>
-        </p:style>
-        <p:txBody>
-          <a:bodyPr rtlCol="0" anchor="ctr"/>
-          <a:lstStyle/>
-          <a:p>
-            <a:pPr algn="ctr"/>
-          </a:p>
-        </p:txBody>
-      </p:sp>
-      <p:sp>
-        <p:nvSpPr>
-          <p:cNvPr id="33" name="Rectangle 32"/>
-          <p:cNvSpPr/>
-          <p:nvPr/>
-        </p:nvSpPr>
-        <p:spPr>
-          <a:xfrm>
-            <a:off x="9478670" y="1920240"/>
-            <a:ext cx="73152" cy="3566160"/>
-          </a:xfrm>
-          <a:prstGeom prst="rect">
-            <a:avLst/>
-          </a:prstGeom>
-          <a:solidFill>
-            <a:srgbClr val="1F6FEB"/>
-          </a:solidFill>
-          <a:ln>
-            <a:solidFill>
-              <a:srgbClr val="1F6FEB"/>
-            </a:solidFill>
-          </a:ln>
-        </p:spPr>
-        <p:style>
-          <a:lnRef idx="1">
-            <a:schemeClr val="accent1"/>
-          </a:lnRef>
-          <a:fillRef idx="3">
-            <a:schemeClr val="accent1"/>
-          </a:fillRef>
-          <a:effectRef idx="2">
-            <a:schemeClr val="accent1"/>
-          </a:effectRef>
-          <a:fontRef idx="minor">
-            <a:schemeClr val="lt1"/>
-          </a:fontRef>
-        </p:style>
-        <p:txBody>
-          <a:bodyPr rtlCol="0" anchor="ctr"/>
-          <a:lstStyle/>
-          <a:p>
-            <a:pPr algn="ctr"/>
-          </a:p>
-        </p:txBody>
-      </p:sp>
-      <p:sp>
-        <p:nvSpPr>
-          <p:cNvPr id="34" name="Rounded Rectangle 33"/>
-          <p:cNvSpPr/>
-          <p:nvPr/>
-        </p:nvSpPr>
-        <p:spPr>
-          <a:xfrm>
-            <a:off x="9679838" y="2139696"/>
-            <a:ext cx="438912" cy="438912"/>
-          </a:xfrm>
-          <a:prstGeom prst="roundRect">
-            <a:avLst/>
-          </a:prstGeom>
-          <a:solidFill>
-            <a:srgbClr val="1F6FEB"/>
-          </a:solidFill>
-          <a:ln>
-            <a:solidFill>
-              <a:srgbClr val="1F6FEB"/>
-            </a:solidFill>
-          </a:ln>
-        </p:spPr>
-        <p:style>
-          <a:lnRef idx="1">
-            <a:schemeClr val="accent1"/>
-          </a:lnRef>
-          <a:fillRef idx="3">
-            <a:schemeClr val="accent1"/>
-          </a:fillRef>
-          <a:effectRef idx="2">
-            <a:schemeClr val="accent1"/>
-          </a:effectRef>
-          <a:fontRef idx="minor">
-            <a:schemeClr val="lt1"/>
-          </a:fontRef>
-        </p:style>
-        <p:txBody>
-          <a:bodyPr rtlCol="0" anchor="ctr"/>
-          <a:lstStyle/>
-          <a:p>
-            <a:pPr algn="ctr"/>
-          </a:p>
-        </p:txBody>
-      </p:sp>
-      <p:sp>
-        <p:nvSpPr>
-          <p:cNvPr id="35" name="TextBox 34"/>
-          <p:cNvSpPr txBox="1"/>
-          <p:nvPr/>
-        </p:nvSpPr>
-        <p:spPr>
-          <a:xfrm>
-            <a:off x="9679838" y="2148840"/>
-            <a:ext cx="438912" cy="420624"/>
-          </a:xfrm>
-          <a:prstGeom prst="rect">
-            <a:avLst/>
-          </a:prstGeom>
-          <a:noFill/>
-        </p:spPr>
-        <p:txBody>
-          <a:bodyPr wrap="square" anchor="ctr">
-            <a:spAutoFit/>
-          </a:bodyPr>
-          <a:lstStyle/>
-          <a:p>
-            <a:pPr algn="ctr"/>
-            <a:r>
-              <a:rPr sz="1400" b="1">
-                <a:solidFill>
-                  <a:srgbClr val="FFFFFF"/>
-                </a:solidFill>
-                <a:latin typeface="Arial"/>
-              </a:rPr>
-              <a:t>5</a:t>
-            </a:r>
-          </a:p>
-        </p:txBody>
-      </p:sp>
-      <p:sp>
-        <p:nvSpPr>
-          <p:cNvPr id="36" name="TextBox 35"/>
-          <p:cNvSpPr txBox="1"/>
-          <p:nvPr/>
-        </p:nvSpPr>
-        <p:spPr>
-          <a:xfrm>
-            <a:off x="10283342" y="2103120"/>
-            <a:ext cx="1009497" cy="329184"/>
-          </a:xfrm>
-          <a:prstGeom prst="rect">
-            <a:avLst/>
-          </a:prstGeom>
-          <a:noFill/>
-        </p:spPr>
-        <p:txBody>
-          <a:bodyPr wrap="square" anchor="t">
-            <a:spAutoFit/>
-          </a:bodyPr>
-          <a:lstStyle/>
-          <a:p>
-            <a:pPr algn="l"/>
-            <a:r>
-              <a:rPr sz="1400" b="1">
-                <a:solidFill>
-                  <a:srgbClr val="1F6FEB"/>
-                </a:solidFill>
-                <a:latin typeface="Arial"/>
-              </a:rPr>
-              <a:t>Decide</a:t>
-            </a:r>
-          </a:p>
-        </p:txBody>
-      </p:sp>
-      <p:sp>
-        <p:nvSpPr>
-          <p:cNvPr id="37" name="TextBox 36"/>
-          <p:cNvSpPr txBox="1"/>
-          <p:nvPr/>
-        </p:nvSpPr>
-        <p:spPr>
-          <a:xfrm>
-            <a:off x="10283342" y="2487168"/>
-            <a:ext cx="1009497" cy="2852928"/>
-          </a:xfrm>
-          <a:prstGeom prst="rect">
-            <a:avLst/>
-          </a:prstGeom>
-          <a:noFill/>
-        </p:spPr>
-        <p:txBody>
-          <a:bodyPr wrap="square" anchor="t">
-            <a:spAutoFit/>
-          </a:bodyPr>
-          <a:lstStyle/>
-          <a:p>
-            <a:pPr algn="l"/>
-            <a:r>
-              <a:rPr sz="1150" b="0">
-                <a:solidFill>
-                  <a:srgbClr val="161B26"/>
-                </a:solidFill>
-                <a:latin typeface="Arial"/>
-              </a:rPr>
-              <a:t>Recommend tools, budget, controls and review date.</a:t>
+              <a:t>Use the supplied budget workbook and effectiveness evidence to recommend a 12-month tool, training and governance plan aligned with business outcomes.</a:t>
             </a:r>
           </a:p>
         </p:txBody>
@@ -5721,6 +5482,726 @@
             <a:avLst/>
           </a:prstGeom>
           <a:solidFill>
+            <a:srgbClr val="10B981"/>
+          </a:solidFill>
+          <a:ln>
+            <a:solidFill>
+              <a:srgbClr val="10B981"/>
+            </a:solidFill>
+          </a:ln>
+        </p:spPr>
+        <p:style>
+          <a:lnRef idx="1">
+            <a:schemeClr val="accent1"/>
+          </a:lnRef>
+          <a:fillRef idx="3">
+            <a:schemeClr val="accent1"/>
+          </a:fillRef>
+          <a:effectRef idx="2">
+            <a:schemeClr val="accent1"/>
+          </a:effectRef>
+          <a:fontRef idx="minor">
+            <a:schemeClr val="lt1"/>
+          </a:fontRef>
+        </p:style>
+        <p:txBody>
+          <a:bodyPr rtlCol="0" anchor="ctr"/>
+          <a:lstStyle/>
+          <a:p>
+            <a:pPr algn="ctr"/>
+          </a:p>
+        </p:txBody>
+      </p:sp>
+      <p:sp>
+        <p:nvSpPr>
+          <p:cNvPr id="4" name="TextBox 3"/>
+          <p:cNvSpPr txBox="1"/>
+          <p:nvPr/>
+        </p:nvSpPr>
+        <p:spPr>
+          <a:xfrm>
+            <a:off x="658368" y="384048"/>
+            <a:ext cx="10789920" cy="320040"/>
+          </a:xfrm>
+          <a:prstGeom prst="rect">
+            <a:avLst/>
+          </a:prstGeom>
+          <a:noFill/>
+        </p:spPr>
+        <p:txBody>
+          <a:bodyPr wrap="square" anchor="t">
+            <a:spAutoFit/>
+          </a:bodyPr>
+          <a:lstStyle/>
+          <a:p>
+            <a:pPr algn="l"/>
+            <a:r>
+              <a:rPr sz="1100" b="1">
+                <a:solidFill>
+                  <a:srgbClr val="10B981"/>
+                </a:solidFill>
+                <a:latin typeface="Arial"/>
+              </a:rPr>
+              <a:t>ACTIVITY 08 · FRAMEWORK</a:t>
+            </a:r>
+          </a:p>
+        </p:txBody>
+      </p:sp>
+      <p:sp>
+        <p:nvSpPr>
+          <p:cNvPr id="5" name="TextBox 4"/>
+          <p:cNvSpPr txBox="1"/>
+          <p:nvPr/>
+        </p:nvSpPr>
+        <p:spPr>
+          <a:xfrm>
+            <a:off x="658368" y="749808"/>
+            <a:ext cx="10789920" cy="658368"/>
+          </a:xfrm>
+          <a:prstGeom prst="rect">
+            <a:avLst/>
+          </a:prstGeom>
+          <a:noFill/>
+        </p:spPr>
+        <p:txBody>
+          <a:bodyPr wrap="square" anchor="t">
+            <a:spAutoFit/>
+          </a:bodyPr>
+          <a:lstStyle/>
+          <a:p>
+            <a:pPr algn="l"/>
+            <a:r>
+              <a:rPr sz="2700" b="1">
+                <a:solidFill>
+                  <a:srgbClr val="161B26"/>
+                </a:solidFill>
+                <a:latin typeface="Arial"/>
+              </a:rPr>
+              <a:t>Investment Decision Loop</a:t>
+            </a:r>
+          </a:p>
+        </p:txBody>
+      </p:sp>
+      <p:sp>
+        <p:nvSpPr>
+          <p:cNvPr id="6" name="Rectangle 5"/>
+          <p:cNvSpPr/>
+          <p:nvPr/>
+        </p:nvSpPr>
+        <p:spPr>
+          <a:xfrm>
+            <a:off x="658368" y="1444752"/>
+            <a:ext cx="10881360" cy="18288"/>
+          </a:xfrm>
+          <a:prstGeom prst="rect">
+            <a:avLst/>
+          </a:prstGeom>
+          <a:solidFill>
+            <a:srgbClr val="E2E8F0"/>
+          </a:solidFill>
+          <a:ln>
+            <a:solidFill>
+              <a:srgbClr val="E2E8F0"/>
+            </a:solidFill>
+          </a:ln>
+        </p:spPr>
+        <p:style>
+          <a:lnRef idx="1">
+            <a:schemeClr val="accent1"/>
+          </a:lnRef>
+          <a:fillRef idx="3">
+            <a:schemeClr val="accent1"/>
+          </a:fillRef>
+          <a:effectRef idx="2">
+            <a:schemeClr val="accent1"/>
+          </a:effectRef>
+          <a:fontRef idx="minor">
+            <a:schemeClr val="lt1"/>
+          </a:fontRef>
+        </p:style>
+        <p:txBody>
+          <a:bodyPr rtlCol="0" anchor="ctr"/>
+          <a:lstStyle/>
+          <a:p>
+            <a:pPr algn="ctr"/>
+          </a:p>
+        </p:txBody>
+      </p:sp>
+      <p:sp>
+        <p:nvSpPr>
+          <p:cNvPr id="7" name="TextBox 6"/>
+          <p:cNvSpPr txBox="1"/>
+          <p:nvPr/>
+        </p:nvSpPr>
+        <p:spPr>
+          <a:xfrm>
+            <a:off x="658368" y="6473952"/>
+            <a:ext cx="9875520" cy="201168"/>
+          </a:xfrm>
+          <a:prstGeom prst="rect">
+            <a:avLst/>
+          </a:prstGeom>
+          <a:noFill/>
+        </p:spPr>
+        <p:txBody>
+          <a:bodyPr wrap="square" anchor="t">
+            <a:spAutoFit/>
+          </a:bodyPr>
+          <a:lstStyle/>
+          <a:p>
+            <a:pPr algn="l"/>
+            <a:r>
+              <a:rPr sz="800" b="0">
+                <a:solidFill>
+                  <a:srgbClr val="5B6372"/>
+                </a:solidFill>
+                <a:latin typeface="Arial"/>
+              </a:rPr>
+              <a:t>TGS-2026064178 · ACTIVITY PRACTICE · Tertiary Infotech Academy Pte Ltd</a:t>
+            </a:r>
+          </a:p>
+        </p:txBody>
+      </p:sp>
+      <p:sp>
+        <p:nvSpPr>
+          <p:cNvPr id="8" name="Rounded Rectangle 7"/>
+          <p:cNvSpPr/>
+          <p:nvPr/>
+        </p:nvSpPr>
+        <p:spPr>
+          <a:xfrm>
+            <a:off x="685800" y="1920240"/>
+            <a:ext cx="1997049" cy="3566160"/>
+          </a:xfrm>
+          <a:prstGeom prst="roundRect">
+            <a:avLst/>
+          </a:prstGeom>
+          <a:solidFill>
+            <a:srgbClr val="F5F8FC"/>
+          </a:solidFill>
+          <a:ln>
+            <a:solidFill>
+              <a:srgbClr val="E2E8F0"/>
+            </a:solidFill>
+          </a:ln>
+        </p:spPr>
+        <p:style>
+          <a:lnRef idx="1">
+            <a:schemeClr val="accent1"/>
+          </a:lnRef>
+          <a:fillRef idx="3">
+            <a:schemeClr val="accent1"/>
+          </a:fillRef>
+          <a:effectRef idx="2">
+            <a:schemeClr val="accent1"/>
+          </a:effectRef>
+          <a:fontRef idx="minor">
+            <a:schemeClr val="lt1"/>
+          </a:fontRef>
+        </p:style>
+        <p:txBody>
+          <a:bodyPr rtlCol="0" anchor="ctr"/>
+          <a:lstStyle/>
+          <a:p>
+            <a:pPr algn="ctr"/>
+          </a:p>
+        </p:txBody>
+      </p:sp>
+      <p:sp>
+        <p:nvSpPr>
+          <p:cNvPr id="9" name="Rectangle 8"/>
+          <p:cNvSpPr/>
+          <p:nvPr/>
+        </p:nvSpPr>
+        <p:spPr>
+          <a:xfrm>
+            <a:off x="685800" y="1920240"/>
+            <a:ext cx="73152" cy="3566160"/>
+          </a:xfrm>
+          <a:prstGeom prst="rect">
+            <a:avLst/>
+          </a:prstGeom>
+          <a:solidFill>
+            <a:srgbClr val="1F6FEB"/>
+          </a:solidFill>
+          <a:ln>
+            <a:solidFill>
+              <a:srgbClr val="1F6FEB"/>
+            </a:solidFill>
+          </a:ln>
+        </p:spPr>
+        <p:style>
+          <a:lnRef idx="1">
+            <a:schemeClr val="accent1"/>
+          </a:lnRef>
+          <a:fillRef idx="3">
+            <a:schemeClr val="accent1"/>
+          </a:fillRef>
+          <a:effectRef idx="2">
+            <a:schemeClr val="accent1"/>
+          </a:effectRef>
+          <a:fontRef idx="minor">
+            <a:schemeClr val="lt1"/>
+          </a:fontRef>
+        </p:style>
+        <p:txBody>
+          <a:bodyPr rtlCol="0" anchor="ctr"/>
+          <a:lstStyle/>
+          <a:p>
+            <a:pPr algn="ctr"/>
+          </a:p>
+        </p:txBody>
+      </p:sp>
+      <p:sp>
+        <p:nvSpPr>
+          <p:cNvPr id="10" name="Rounded Rectangle 9"/>
+          <p:cNvSpPr/>
+          <p:nvPr/>
+        </p:nvSpPr>
+        <p:spPr>
+          <a:xfrm>
+            <a:off x="886968" y="2139696"/>
+            <a:ext cx="438912" cy="438912"/>
+          </a:xfrm>
+          <a:prstGeom prst="roundRect">
+            <a:avLst/>
+          </a:prstGeom>
+          <a:solidFill>
+            <a:srgbClr val="1F6FEB"/>
+          </a:solidFill>
+          <a:ln>
+            <a:solidFill>
+              <a:srgbClr val="1F6FEB"/>
+            </a:solidFill>
+          </a:ln>
+        </p:spPr>
+        <p:style>
+          <a:lnRef idx="1">
+            <a:schemeClr val="accent1"/>
+          </a:lnRef>
+          <a:fillRef idx="3">
+            <a:schemeClr val="accent1"/>
+          </a:fillRef>
+          <a:effectRef idx="2">
+            <a:schemeClr val="accent1"/>
+          </a:effectRef>
+          <a:fontRef idx="minor">
+            <a:schemeClr val="lt1"/>
+          </a:fontRef>
+        </p:style>
+        <p:txBody>
+          <a:bodyPr rtlCol="0" anchor="ctr"/>
+          <a:lstStyle/>
+          <a:p>
+            <a:pPr algn="ctr"/>
+          </a:p>
+        </p:txBody>
+      </p:sp>
+      <p:sp>
+        <p:nvSpPr>
+          <p:cNvPr id="11" name="TextBox 10"/>
+          <p:cNvSpPr txBox="1"/>
+          <p:nvPr/>
+        </p:nvSpPr>
+        <p:spPr>
+          <a:xfrm>
+            <a:off x="886968" y="2148840"/>
+            <a:ext cx="438912" cy="420624"/>
+          </a:xfrm>
+          <a:prstGeom prst="rect">
+            <a:avLst/>
+          </a:prstGeom>
+          <a:noFill/>
+        </p:spPr>
+        <p:txBody>
+          <a:bodyPr wrap="square" anchor="ctr">
+            <a:spAutoFit/>
+          </a:bodyPr>
+          <a:lstStyle/>
+          <a:p>
+            <a:pPr algn="ctr"/>
+            <a:r>
+              <a:rPr sz="1400" b="1">
+                <a:solidFill>
+                  <a:srgbClr val="FFFFFF"/>
+                </a:solidFill>
+                <a:latin typeface="Arial"/>
+              </a:rPr>
+              <a:t>1</a:t>
+            </a:r>
+          </a:p>
+        </p:txBody>
+      </p:sp>
+      <p:sp>
+        <p:nvSpPr>
+          <p:cNvPr id="12" name="TextBox 11"/>
+          <p:cNvSpPr txBox="1"/>
+          <p:nvPr/>
+        </p:nvSpPr>
+        <p:spPr>
+          <a:xfrm>
+            <a:off x="1490472" y="2103120"/>
+            <a:ext cx="1009497" cy="329184"/>
+          </a:xfrm>
+          <a:prstGeom prst="rect">
+            <a:avLst/>
+          </a:prstGeom>
+          <a:noFill/>
+        </p:spPr>
+        <p:txBody>
+          <a:bodyPr wrap="square" anchor="t">
+            <a:spAutoFit/>
+          </a:bodyPr>
+          <a:lstStyle/>
+          <a:p>
+            <a:pPr algn="l"/>
+            <a:r>
+              <a:rPr sz="1400" b="1">
+                <a:solidFill>
+                  <a:srgbClr val="1F6FEB"/>
+                </a:solidFill>
+                <a:latin typeface="Arial"/>
+              </a:rPr>
+              <a:t>Need</a:t>
+            </a:r>
+          </a:p>
+        </p:txBody>
+      </p:sp>
+      <p:sp>
+        <p:nvSpPr>
+          <p:cNvPr id="13" name="TextBox 12"/>
+          <p:cNvSpPr txBox="1"/>
+          <p:nvPr/>
+        </p:nvSpPr>
+        <p:spPr>
+          <a:xfrm>
+            <a:off x="1490472" y="2487168"/>
+            <a:ext cx="1009497" cy="2852928"/>
+          </a:xfrm>
+          <a:prstGeom prst="rect">
+            <a:avLst/>
+          </a:prstGeom>
+          <a:noFill/>
+        </p:spPr>
+        <p:txBody>
+          <a:bodyPr wrap="square" anchor="t">
+            <a:spAutoFit/>
+          </a:bodyPr>
+          <a:lstStyle/>
+          <a:p>
+            <a:pPr algn="l"/>
+            <a:r>
+              <a:rPr sz="1150" b="0">
+                <a:solidFill>
+                  <a:srgbClr val="161B26"/>
+                </a:solidFill>
+                <a:latin typeface="Arial"/>
+              </a:rPr>
+              <a:t>Define outputs, volume, users and business outcomes.</a:t>
+            </a:r>
+          </a:p>
+        </p:txBody>
+      </p:sp>
+      <p:sp>
+        <p:nvSpPr>
+          <p:cNvPr id="14" name="Rounded Rectangle 13"/>
+          <p:cNvSpPr/>
+          <p:nvPr/>
+        </p:nvSpPr>
+        <p:spPr>
+          <a:xfrm>
+            <a:off x="2884017" y="1920240"/>
+            <a:ext cx="1997049" cy="3566160"/>
+          </a:xfrm>
+          <a:prstGeom prst="roundRect">
+            <a:avLst/>
+          </a:prstGeom>
+          <a:solidFill>
+            <a:srgbClr val="F5F8FC"/>
+          </a:solidFill>
+          <a:ln>
+            <a:solidFill>
+              <a:srgbClr val="E2E8F0"/>
+            </a:solidFill>
+          </a:ln>
+        </p:spPr>
+        <p:style>
+          <a:lnRef idx="1">
+            <a:schemeClr val="accent1"/>
+          </a:lnRef>
+          <a:fillRef idx="3">
+            <a:schemeClr val="accent1"/>
+          </a:fillRef>
+          <a:effectRef idx="2">
+            <a:schemeClr val="accent1"/>
+          </a:effectRef>
+          <a:fontRef idx="minor">
+            <a:schemeClr val="lt1"/>
+          </a:fontRef>
+        </p:style>
+        <p:txBody>
+          <a:bodyPr rtlCol="0" anchor="ctr"/>
+          <a:lstStyle/>
+          <a:p>
+            <a:pPr algn="ctr"/>
+          </a:p>
+        </p:txBody>
+      </p:sp>
+      <p:sp>
+        <p:nvSpPr>
+          <p:cNvPr id="15" name="Rectangle 14"/>
+          <p:cNvSpPr/>
+          <p:nvPr/>
+        </p:nvSpPr>
+        <p:spPr>
+          <a:xfrm>
+            <a:off x="2884017" y="1920240"/>
+            <a:ext cx="73152" cy="3566160"/>
+          </a:xfrm>
+          <a:prstGeom prst="rect">
+            <a:avLst/>
+          </a:prstGeom>
+          <a:solidFill>
+            <a:srgbClr val="10B981"/>
+          </a:solidFill>
+          <a:ln>
+            <a:solidFill>
+              <a:srgbClr val="10B981"/>
+            </a:solidFill>
+          </a:ln>
+        </p:spPr>
+        <p:style>
+          <a:lnRef idx="1">
+            <a:schemeClr val="accent1"/>
+          </a:lnRef>
+          <a:fillRef idx="3">
+            <a:schemeClr val="accent1"/>
+          </a:fillRef>
+          <a:effectRef idx="2">
+            <a:schemeClr val="accent1"/>
+          </a:effectRef>
+          <a:fontRef idx="minor">
+            <a:schemeClr val="lt1"/>
+          </a:fontRef>
+        </p:style>
+        <p:txBody>
+          <a:bodyPr rtlCol="0" anchor="ctr"/>
+          <a:lstStyle/>
+          <a:p>
+            <a:pPr algn="ctr"/>
+          </a:p>
+        </p:txBody>
+      </p:sp>
+      <p:sp>
+        <p:nvSpPr>
+          <p:cNvPr id="16" name="Rounded Rectangle 15"/>
+          <p:cNvSpPr/>
+          <p:nvPr/>
+        </p:nvSpPr>
+        <p:spPr>
+          <a:xfrm>
+            <a:off x="3085185" y="2139696"/>
+            <a:ext cx="438912" cy="438912"/>
+          </a:xfrm>
+          <a:prstGeom prst="roundRect">
+            <a:avLst/>
+          </a:prstGeom>
+          <a:solidFill>
+            <a:srgbClr val="10B981"/>
+          </a:solidFill>
+          <a:ln>
+            <a:solidFill>
+              <a:srgbClr val="10B981"/>
+            </a:solidFill>
+          </a:ln>
+        </p:spPr>
+        <p:style>
+          <a:lnRef idx="1">
+            <a:schemeClr val="accent1"/>
+          </a:lnRef>
+          <a:fillRef idx="3">
+            <a:schemeClr val="accent1"/>
+          </a:fillRef>
+          <a:effectRef idx="2">
+            <a:schemeClr val="accent1"/>
+          </a:effectRef>
+          <a:fontRef idx="minor">
+            <a:schemeClr val="lt1"/>
+          </a:fontRef>
+        </p:style>
+        <p:txBody>
+          <a:bodyPr rtlCol="0" anchor="ctr"/>
+          <a:lstStyle/>
+          <a:p>
+            <a:pPr algn="ctr"/>
+          </a:p>
+        </p:txBody>
+      </p:sp>
+      <p:sp>
+        <p:nvSpPr>
+          <p:cNvPr id="17" name="TextBox 16"/>
+          <p:cNvSpPr txBox="1"/>
+          <p:nvPr/>
+        </p:nvSpPr>
+        <p:spPr>
+          <a:xfrm>
+            <a:off x="3085185" y="2148840"/>
+            <a:ext cx="438912" cy="420624"/>
+          </a:xfrm>
+          <a:prstGeom prst="rect">
+            <a:avLst/>
+          </a:prstGeom>
+          <a:noFill/>
+        </p:spPr>
+        <p:txBody>
+          <a:bodyPr wrap="square" anchor="ctr">
+            <a:spAutoFit/>
+          </a:bodyPr>
+          <a:lstStyle/>
+          <a:p>
+            <a:pPr algn="ctr"/>
+            <a:r>
+              <a:rPr sz="1400" b="1">
+                <a:solidFill>
+                  <a:srgbClr val="FFFFFF"/>
+                </a:solidFill>
+                <a:latin typeface="Arial"/>
+              </a:rPr>
+              <a:t>2</a:t>
+            </a:r>
+          </a:p>
+        </p:txBody>
+      </p:sp>
+      <p:sp>
+        <p:nvSpPr>
+          <p:cNvPr id="18" name="TextBox 17"/>
+          <p:cNvSpPr txBox="1"/>
+          <p:nvPr/>
+        </p:nvSpPr>
+        <p:spPr>
+          <a:xfrm>
+            <a:off x="3688689" y="2103120"/>
+            <a:ext cx="1009497" cy="329184"/>
+          </a:xfrm>
+          <a:prstGeom prst="rect">
+            <a:avLst/>
+          </a:prstGeom>
+          <a:noFill/>
+        </p:spPr>
+        <p:txBody>
+          <a:bodyPr wrap="square" anchor="t">
+            <a:spAutoFit/>
+          </a:bodyPr>
+          <a:lstStyle/>
+          <a:p>
+            <a:pPr algn="l"/>
+            <a:r>
+              <a:rPr sz="1400" b="1">
+                <a:solidFill>
+                  <a:srgbClr val="10B981"/>
+                </a:solidFill>
+                <a:latin typeface="Arial"/>
+              </a:rPr>
+              <a:t>Compare</a:t>
+            </a:r>
+          </a:p>
+        </p:txBody>
+      </p:sp>
+      <p:sp>
+        <p:nvSpPr>
+          <p:cNvPr id="19" name="TextBox 18"/>
+          <p:cNvSpPr txBox="1"/>
+          <p:nvPr/>
+        </p:nvSpPr>
+        <p:spPr>
+          <a:xfrm>
+            <a:off x="3688689" y="2487168"/>
+            <a:ext cx="1009497" cy="2852928"/>
+          </a:xfrm>
+          <a:prstGeom prst="rect">
+            <a:avLst/>
+          </a:prstGeom>
+          <a:noFill/>
+        </p:spPr>
+        <p:txBody>
+          <a:bodyPr wrap="square" anchor="t">
+            <a:spAutoFit/>
+          </a:bodyPr>
+          <a:lstStyle/>
+          <a:p>
+            <a:pPr algn="l"/>
+            <a:r>
+              <a:rPr sz="1150" b="0">
+                <a:solidFill>
+                  <a:srgbClr val="161B26"/>
+                </a:solidFill>
+                <a:latin typeface="Arial"/>
+              </a:rPr>
+              <a:t>Score capability, cost, workflow and risk.</a:t>
+            </a:r>
+          </a:p>
+        </p:txBody>
+      </p:sp>
+      <p:sp>
+        <p:nvSpPr>
+          <p:cNvPr id="20" name="Rounded Rectangle 19"/>
+          <p:cNvSpPr/>
+          <p:nvPr/>
+        </p:nvSpPr>
+        <p:spPr>
+          <a:xfrm>
+            <a:off x="5082235" y="1920240"/>
+            <a:ext cx="1997049" cy="3566160"/>
+          </a:xfrm>
+          <a:prstGeom prst="roundRect">
+            <a:avLst/>
+          </a:prstGeom>
+          <a:solidFill>
+            <a:srgbClr val="F5F8FC"/>
+          </a:solidFill>
+          <a:ln>
+            <a:solidFill>
+              <a:srgbClr val="E2E8F0"/>
+            </a:solidFill>
+          </a:ln>
+        </p:spPr>
+        <p:style>
+          <a:lnRef idx="1">
+            <a:schemeClr val="accent1"/>
+          </a:lnRef>
+          <a:fillRef idx="3">
+            <a:schemeClr val="accent1"/>
+          </a:fillRef>
+          <a:effectRef idx="2">
+            <a:schemeClr val="accent1"/>
+          </a:effectRef>
+          <a:fontRef idx="minor">
+            <a:schemeClr val="lt1"/>
+          </a:fontRef>
+        </p:style>
+        <p:txBody>
+          <a:bodyPr rtlCol="0" anchor="ctr"/>
+          <a:lstStyle/>
+          <a:p>
+            <a:pPr algn="ctr"/>
+          </a:p>
+        </p:txBody>
+      </p:sp>
+      <p:sp>
+        <p:nvSpPr>
+          <p:cNvPr id="21" name="Rectangle 20"/>
+          <p:cNvSpPr/>
+          <p:nvPr/>
+        </p:nvSpPr>
+        <p:spPr>
+          <a:xfrm>
+            <a:off x="5082235" y="1920240"/>
+            <a:ext cx="73152" cy="3566160"/>
+          </a:xfrm>
+          <a:prstGeom prst="rect">
+            <a:avLst/>
+          </a:prstGeom>
+          <a:solidFill>
             <a:srgbClr val="7C3AED"/>
           </a:solidFill>
           <a:ln>
@@ -5753,14 +6234,94 @@
       </p:sp>
       <p:sp>
         <p:nvSpPr>
-          <p:cNvPr id="4" name="TextBox 3"/>
+          <p:cNvPr id="22" name="Rounded Rectangle 21"/>
+          <p:cNvSpPr/>
+          <p:nvPr/>
+        </p:nvSpPr>
+        <p:spPr>
+          <a:xfrm>
+            <a:off x="5283403" y="2139696"/>
+            <a:ext cx="438912" cy="438912"/>
+          </a:xfrm>
+          <a:prstGeom prst="roundRect">
+            <a:avLst/>
+          </a:prstGeom>
+          <a:solidFill>
+            <a:srgbClr val="7C3AED"/>
+          </a:solidFill>
+          <a:ln>
+            <a:solidFill>
+              <a:srgbClr val="7C3AED"/>
+            </a:solidFill>
+          </a:ln>
+        </p:spPr>
+        <p:style>
+          <a:lnRef idx="1">
+            <a:schemeClr val="accent1"/>
+          </a:lnRef>
+          <a:fillRef idx="3">
+            <a:schemeClr val="accent1"/>
+          </a:fillRef>
+          <a:effectRef idx="2">
+            <a:schemeClr val="accent1"/>
+          </a:effectRef>
+          <a:fontRef idx="minor">
+            <a:schemeClr val="lt1"/>
+          </a:fontRef>
+        </p:style>
+        <p:txBody>
+          <a:bodyPr rtlCol="0" anchor="ctr"/>
+          <a:lstStyle/>
+          <a:p>
+            <a:pPr algn="ctr"/>
+          </a:p>
+        </p:txBody>
+      </p:sp>
+      <p:sp>
+        <p:nvSpPr>
+          <p:cNvPr id="23" name="TextBox 22"/>
           <p:cNvSpPr txBox="1"/>
           <p:nvPr/>
         </p:nvSpPr>
         <p:spPr>
           <a:xfrm>
-            <a:off x="658368" y="384048"/>
-            <a:ext cx="10789920" cy="320040"/>
+            <a:off x="5283403" y="2148840"/>
+            <a:ext cx="438912" cy="420624"/>
+          </a:xfrm>
+          <a:prstGeom prst="rect">
+            <a:avLst/>
+          </a:prstGeom>
+          <a:noFill/>
+        </p:spPr>
+        <p:txBody>
+          <a:bodyPr wrap="square" anchor="ctr">
+            <a:spAutoFit/>
+          </a:bodyPr>
+          <a:lstStyle/>
+          <a:p>
+            <a:pPr algn="ctr"/>
+            <a:r>
+              <a:rPr sz="1400" b="1">
+                <a:solidFill>
+                  <a:srgbClr val="FFFFFF"/>
+                </a:solidFill>
+                <a:latin typeface="Arial"/>
+              </a:rPr>
+              <a:t>3</a:t>
+            </a:r>
+          </a:p>
+        </p:txBody>
+      </p:sp>
+      <p:sp>
+        <p:nvSpPr>
+          <p:cNvPr id="24" name="TextBox 23"/>
+          <p:cNvSpPr txBox="1"/>
+          <p:nvPr/>
+        </p:nvSpPr>
+        <p:spPr>
+          <a:xfrm>
+            <a:off x="5886907" y="2103120"/>
+            <a:ext cx="1009497" cy="329184"/>
           </a:xfrm>
           <a:prstGeom prst="rect">
             <a:avLst/>
@@ -5775,27 +6336,27 @@
           <a:p>
             <a:pPr algn="l"/>
             <a:r>
-              <a:rPr sz="1100" b="1">
+              <a:rPr sz="1400" b="1">
                 <a:solidFill>
                   <a:srgbClr val="7C3AED"/>
                 </a:solidFill>
                 <a:latin typeface="Arial"/>
               </a:rPr>
-              <a:t>ACTIVITY 08 · EXAMPLE</a:t>
-            </a:r>
-          </a:p>
-        </p:txBody>
-      </p:sp>
-      <p:sp>
-        <p:nvSpPr>
-          <p:cNvPr id="5" name="TextBox 4"/>
+              <a:t>Pilot</a:t>
+            </a:r>
+          </a:p>
+        </p:txBody>
+      </p:sp>
+      <p:sp>
+        <p:nvSpPr>
+          <p:cNvPr id="25" name="TextBox 24"/>
           <p:cNvSpPr txBox="1"/>
           <p:nvPr/>
         </p:nvSpPr>
         <p:spPr>
           <a:xfrm>
-            <a:off x="658368" y="749808"/>
-            <a:ext cx="10789920" cy="658368"/>
+            <a:off x="5886907" y="2487168"/>
+            <a:ext cx="1009497" cy="2852928"/>
           </a:xfrm>
           <a:prstGeom prst="rect">
             <a:avLst/>
@@ -5810,33 +6371,33 @@
           <a:p>
             <a:pPr algn="l"/>
             <a:r>
-              <a:rPr sz="2700" b="1">
+              <a:rPr sz="1150" b="0">
                 <a:solidFill>
                   <a:srgbClr val="161B26"/>
                 </a:solidFill>
                 <a:latin typeface="Arial"/>
               </a:rPr>
-              <a:t>Worked Output</a:t>
-            </a:r>
-          </a:p>
-        </p:txBody>
-      </p:sp>
-      <p:sp>
-        <p:nvSpPr>
-          <p:cNvPr id="6" name="Rectangle 5"/>
+              <a:t>Test the same brief in shortlisted workflows.</a:t>
+            </a:r>
+          </a:p>
+        </p:txBody>
+      </p:sp>
+      <p:sp>
+        <p:nvSpPr>
+          <p:cNvPr id="26" name="Rounded Rectangle 25"/>
           <p:cNvSpPr/>
           <p:nvPr/>
         </p:nvSpPr>
         <p:spPr>
           <a:xfrm>
-            <a:off x="658368" y="1444752"/>
-            <a:ext cx="10881360" cy="18288"/>
-          </a:xfrm>
-          <a:prstGeom prst="rect">
-            <a:avLst/>
-          </a:prstGeom>
-          <a:solidFill>
-            <a:srgbClr val="E2E8F0"/>
+            <a:off x="7280452" y="1920240"/>
+            <a:ext cx="1997049" cy="3566160"/>
+          </a:xfrm>
+          <a:prstGeom prst="roundRect">
+            <a:avLst/>
+          </a:prstGeom>
+          <a:solidFill>
+            <a:srgbClr val="F5F8FC"/>
           </a:solidFill>
           <a:ln>
             <a:solidFill>
@@ -5868,14 +6429,139 @@
       </p:sp>
       <p:sp>
         <p:nvSpPr>
-          <p:cNvPr id="7" name="TextBox 6"/>
+          <p:cNvPr id="27" name="Rectangle 26"/>
+          <p:cNvSpPr/>
+          <p:nvPr/>
+        </p:nvSpPr>
+        <p:spPr>
+          <a:xfrm>
+            <a:off x="7280452" y="1920240"/>
+            <a:ext cx="73152" cy="3566160"/>
+          </a:xfrm>
+          <a:prstGeom prst="rect">
+            <a:avLst/>
+          </a:prstGeom>
+          <a:solidFill>
+            <a:srgbClr val="F59E0B"/>
+          </a:solidFill>
+          <a:ln>
+            <a:solidFill>
+              <a:srgbClr val="F59E0B"/>
+            </a:solidFill>
+          </a:ln>
+        </p:spPr>
+        <p:style>
+          <a:lnRef idx="1">
+            <a:schemeClr val="accent1"/>
+          </a:lnRef>
+          <a:fillRef idx="3">
+            <a:schemeClr val="accent1"/>
+          </a:fillRef>
+          <a:effectRef idx="2">
+            <a:schemeClr val="accent1"/>
+          </a:effectRef>
+          <a:fontRef idx="minor">
+            <a:schemeClr val="lt1"/>
+          </a:fontRef>
+        </p:style>
+        <p:txBody>
+          <a:bodyPr rtlCol="0" anchor="ctr"/>
+          <a:lstStyle/>
+          <a:p>
+            <a:pPr algn="ctr"/>
+          </a:p>
+        </p:txBody>
+      </p:sp>
+      <p:sp>
+        <p:nvSpPr>
+          <p:cNvPr id="28" name="Rounded Rectangle 27"/>
+          <p:cNvSpPr/>
+          <p:nvPr/>
+        </p:nvSpPr>
+        <p:spPr>
+          <a:xfrm>
+            <a:off x="7481620" y="2139696"/>
+            <a:ext cx="438912" cy="438912"/>
+          </a:xfrm>
+          <a:prstGeom prst="roundRect">
+            <a:avLst/>
+          </a:prstGeom>
+          <a:solidFill>
+            <a:srgbClr val="F59E0B"/>
+          </a:solidFill>
+          <a:ln>
+            <a:solidFill>
+              <a:srgbClr val="F59E0B"/>
+            </a:solidFill>
+          </a:ln>
+        </p:spPr>
+        <p:style>
+          <a:lnRef idx="1">
+            <a:schemeClr val="accent1"/>
+          </a:lnRef>
+          <a:fillRef idx="3">
+            <a:schemeClr val="accent1"/>
+          </a:fillRef>
+          <a:effectRef idx="2">
+            <a:schemeClr val="accent1"/>
+          </a:effectRef>
+          <a:fontRef idx="minor">
+            <a:schemeClr val="lt1"/>
+          </a:fontRef>
+        </p:style>
+        <p:txBody>
+          <a:bodyPr rtlCol="0" anchor="ctr"/>
+          <a:lstStyle/>
+          <a:p>
+            <a:pPr algn="ctr"/>
+          </a:p>
+        </p:txBody>
+      </p:sp>
+      <p:sp>
+        <p:nvSpPr>
+          <p:cNvPr id="29" name="TextBox 28"/>
           <p:cNvSpPr txBox="1"/>
           <p:nvPr/>
         </p:nvSpPr>
         <p:spPr>
           <a:xfrm>
-            <a:off x="658368" y="6473952"/>
-            <a:ext cx="9875520" cy="201168"/>
+            <a:off x="7481620" y="2148840"/>
+            <a:ext cx="438912" cy="420624"/>
+          </a:xfrm>
+          <a:prstGeom prst="rect">
+            <a:avLst/>
+          </a:prstGeom>
+          <a:noFill/>
+        </p:spPr>
+        <p:txBody>
+          <a:bodyPr wrap="square" anchor="ctr">
+            <a:spAutoFit/>
+          </a:bodyPr>
+          <a:lstStyle/>
+          <a:p>
+            <a:pPr algn="ctr"/>
+            <a:r>
+              <a:rPr sz="1400" b="1">
+                <a:solidFill>
+                  <a:srgbClr val="FFFFFF"/>
+                </a:solidFill>
+                <a:latin typeface="Arial"/>
+              </a:rPr>
+              <a:t>4</a:t>
+            </a:r>
+          </a:p>
+        </p:txBody>
+      </p:sp>
+      <p:sp>
+        <p:nvSpPr>
+          <p:cNvPr id="30" name="TextBox 29"/>
+          <p:cNvSpPr txBox="1"/>
+          <p:nvPr/>
+        </p:nvSpPr>
+        <p:spPr>
+          <a:xfrm>
+            <a:off x="8085124" y="2103120"/>
+            <a:ext cx="1009497" cy="329184"/>
           </a:xfrm>
           <a:prstGeom prst="rect">
             <a:avLst/>
@@ -5890,27 +6576,62 @@
           <a:p>
             <a:pPr algn="l"/>
             <a:r>
-              <a:rPr sz="800" b="0">
-                <a:solidFill>
-                  <a:srgbClr val="5B6372"/>
+              <a:rPr sz="1400" b="1">
+                <a:solidFill>
+                  <a:srgbClr val="F59E0B"/>
                 </a:solidFill>
                 <a:latin typeface="Arial"/>
               </a:rPr>
-              <a:t>TGS-2024048310 · ACTIVITY PRACTICE · Tertiary Infotech Academy Pte Ltd</a:t>
-            </a:r>
-          </a:p>
-        </p:txBody>
-      </p:sp>
-      <p:sp>
-        <p:nvSpPr>
-          <p:cNvPr id="8" name="Rounded Rectangle 7"/>
+              <a:t>Measure</a:t>
+            </a:r>
+          </a:p>
+        </p:txBody>
+      </p:sp>
+      <p:sp>
+        <p:nvSpPr>
+          <p:cNvPr id="31" name="TextBox 30"/>
+          <p:cNvSpPr txBox="1"/>
+          <p:nvPr/>
+        </p:nvSpPr>
+        <p:spPr>
+          <a:xfrm>
+            <a:off x="8085124" y="2487168"/>
+            <a:ext cx="1009497" cy="2852928"/>
+          </a:xfrm>
+          <a:prstGeom prst="rect">
+            <a:avLst/>
+          </a:prstGeom>
+          <a:noFill/>
+        </p:spPr>
+        <p:txBody>
+          <a:bodyPr wrap="square" anchor="t">
+            <a:spAutoFit/>
+          </a:bodyPr>
+          <a:lstStyle/>
+          <a:p>
+            <a:pPr algn="l"/>
+            <a:r>
+              <a:rPr sz="1150" b="0">
+                <a:solidFill>
+                  <a:srgbClr val="161B26"/>
+                </a:solidFill>
+                <a:latin typeface="Arial"/>
+              </a:rPr>
+              <a:t>Collect quality, time, adoption and outcome evidence.</a:t>
+            </a:r>
+          </a:p>
+        </p:txBody>
+      </p:sp>
+      <p:sp>
+        <p:nvSpPr>
+          <p:cNvPr id="32" name="Rounded Rectangle 31"/>
           <p:cNvSpPr/>
           <p:nvPr/>
         </p:nvSpPr>
         <p:spPr>
           <a:xfrm>
-            <a:off x="731520" y="1783080"/>
-            <a:ext cx="3401568" cy="1719072"/>
+            <a:off x="9478670" y="1920240"/>
+            <a:ext cx="1997049" cy="3566160"/>
           </a:xfrm>
           <a:prstGeom prst="roundRect">
             <a:avLst/>
@@ -5948,14 +6669,14 @@
       </p:sp>
       <p:sp>
         <p:nvSpPr>
-          <p:cNvPr id="9" name="Rectangle 8"/>
+          <p:cNvPr id="33" name="Rectangle 32"/>
           <p:cNvSpPr/>
           <p:nvPr/>
         </p:nvSpPr>
         <p:spPr>
           <a:xfrm>
-            <a:off x="731520" y="1783080"/>
-            <a:ext cx="73152" cy="1719072"/>
+            <a:off x="9478670" y="1920240"/>
+            <a:ext cx="73152" cy="3566160"/>
           </a:xfrm>
           <a:prstGeom prst="rect">
             <a:avLst/>
@@ -5993,13 +6714,13 @@
       </p:sp>
       <p:sp>
         <p:nvSpPr>
-          <p:cNvPr id="10" name="Rounded Rectangle 9"/>
+          <p:cNvPr id="34" name="Rounded Rectangle 33"/>
           <p:cNvSpPr/>
           <p:nvPr/>
         </p:nvSpPr>
         <p:spPr>
           <a:xfrm>
-            <a:off x="932688" y="2002536"/>
+            <a:off x="9679838" y="2139696"/>
             <a:ext cx="438912" cy="438912"/>
           </a:xfrm>
           <a:prstGeom prst="roundRect">
@@ -6038,13 +6759,13 @@
       </p:sp>
       <p:sp>
         <p:nvSpPr>
-          <p:cNvPr id="11" name="TextBox 10"/>
+          <p:cNvPr id="35" name="TextBox 34"/>
           <p:cNvSpPr txBox="1"/>
           <p:nvPr/>
         </p:nvSpPr>
         <p:spPr>
           <a:xfrm>
-            <a:off x="932688" y="2011680"/>
+            <a:off x="9679838" y="2148840"/>
             <a:ext cx="438912" cy="420624"/>
           </a:xfrm>
           <a:prstGeom prst="rect">
@@ -6066,21 +6787,21 @@
                 </a:solidFill>
                 <a:latin typeface="Arial"/>
               </a:rPr>
-              <a:t>1</a:t>
-            </a:r>
-          </a:p>
-        </p:txBody>
-      </p:sp>
-      <p:sp>
-        <p:nvSpPr>
-          <p:cNvPr id="12" name="TextBox 11"/>
+              <a:t>5</a:t>
+            </a:r>
+          </a:p>
+        </p:txBody>
+      </p:sp>
+      <p:sp>
+        <p:nvSpPr>
+          <p:cNvPr id="36" name="TextBox 35"/>
           <p:cNvSpPr txBox="1"/>
           <p:nvPr/>
         </p:nvSpPr>
         <p:spPr>
           <a:xfrm>
-            <a:off x="1536192" y="1965960"/>
-            <a:ext cx="2414016" cy="329184"/>
+            <a:off x="10283342" y="2103120"/>
+            <a:ext cx="1009497" cy="329184"/>
           </a:xfrm>
           <a:prstGeom prst="rect">
             <a:avLst/>
@@ -6101,21 +6822,21 @@
                 </a:solidFill>
                 <a:latin typeface="Arial"/>
               </a:rPr>
-              <a:t>35%</a:t>
-            </a:r>
-          </a:p>
-        </p:txBody>
-      </p:sp>
-      <p:sp>
-        <p:nvSpPr>
-          <p:cNvPr id="13" name="TextBox 12"/>
+              <a:t>Decide</a:t>
+            </a:r>
+          </a:p>
+        </p:txBody>
+      </p:sp>
+      <p:sp>
+        <p:nvSpPr>
+          <p:cNvPr id="37" name="TextBox 36"/>
           <p:cNvSpPr txBox="1"/>
           <p:nvPr/>
         </p:nvSpPr>
         <p:spPr>
           <a:xfrm>
-            <a:off x="1536192" y="2350008"/>
-            <a:ext cx="2414016" cy="1005839"/>
+            <a:off x="10283342" y="2487168"/>
+            <a:ext cx="1009497" cy="2852928"/>
           </a:xfrm>
           <a:prstGeom prst="rect">
             <a:avLst/>
@@ -6136,1207 +6857,7 @@
                 </a:solidFill>
                 <a:latin typeface="Arial"/>
               </a:rPr>
-              <a:t>Message and data effectiveness</a:t>
-            </a:r>
-          </a:p>
-        </p:txBody>
-      </p:sp>
-      <p:sp>
-        <p:nvSpPr>
-          <p:cNvPr id="14" name="Rounded Rectangle 13"/>
-          <p:cNvSpPr/>
-          <p:nvPr/>
-        </p:nvSpPr>
-        <p:spPr>
-          <a:xfrm>
-            <a:off x="4315968" y="1783080"/>
-            <a:ext cx="3401568" cy="1719072"/>
-          </a:xfrm>
-          <a:prstGeom prst="roundRect">
-            <a:avLst/>
-          </a:prstGeom>
-          <a:solidFill>
-            <a:srgbClr val="F5F8FC"/>
-          </a:solidFill>
-          <a:ln>
-            <a:solidFill>
-              <a:srgbClr val="E2E8F0"/>
-            </a:solidFill>
-          </a:ln>
-        </p:spPr>
-        <p:style>
-          <a:lnRef idx="1">
-            <a:schemeClr val="accent1"/>
-          </a:lnRef>
-          <a:fillRef idx="3">
-            <a:schemeClr val="accent1"/>
-          </a:fillRef>
-          <a:effectRef idx="2">
-            <a:schemeClr val="accent1"/>
-          </a:effectRef>
-          <a:fontRef idx="minor">
-            <a:schemeClr val="lt1"/>
-          </a:fontRef>
-        </p:style>
-        <p:txBody>
-          <a:bodyPr rtlCol="0" anchor="ctr"/>
-          <a:lstStyle/>
-          <a:p>
-            <a:pPr algn="ctr"/>
-          </a:p>
-        </p:txBody>
-      </p:sp>
-      <p:sp>
-        <p:nvSpPr>
-          <p:cNvPr id="15" name="Rectangle 14"/>
-          <p:cNvSpPr/>
-          <p:nvPr/>
-        </p:nvSpPr>
-        <p:spPr>
-          <a:xfrm>
-            <a:off x="4315968" y="1783080"/>
-            <a:ext cx="73152" cy="1719072"/>
-          </a:xfrm>
-          <a:prstGeom prst="rect">
-            <a:avLst/>
-          </a:prstGeom>
-          <a:solidFill>
-            <a:srgbClr val="10B981"/>
-          </a:solidFill>
-          <a:ln>
-            <a:solidFill>
-              <a:srgbClr val="10B981"/>
-            </a:solidFill>
-          </a:ln>
-        </p:spPr>
-        <p:style>
-          <a:lnRef idx="1">
-            <a:schemeClr val="accent1"/>
-          </a:lnRef>
-          <a:fillRef idx="3">
-            <a:schemeClr val="accent1"/>
-          </a:fillRef>
-          <a:effectRef idx="2">
-            <a:schemeClr val="accent1"/>
-          </a:effectRef>
-          <a:fontRef idx="minor">
-            <a:schemeClr val="lt1"/>
-          </a:fontRef>
-        </p:style>
-        <p:txBody>
-          <a:bodyPr rtlCol="0" anchor="ctr"/>
-          <a:lstStyle/>
-          <a:p>
-            <a:pPr algn="ctr"/>
-          </a:p>
-        </p:txBody>
-      </p:sp>
-      <p:sp>
-        <p:nvSpPr>
-          <p:cNvPr id="16" name="Rounded Rectangle 15"/>
-          <p:cNvSpPr/>
-          <p:nvPr/>
-        </p:nvSpPr>
-        <p:spPr>
-          <a:xfrm>
-            <a:off x="4517136" y="2002536"/>
-            <a:ext cx="438912" cy="438912"/>
-          </a:xfrm>
-          <a:prstGeom prst="roundRect">
-            <a:avLst/>
-          </a:prstGeom>
-          <a:solidFill>
-            <a:srgbClr val="10B981"/>
-          </a:solidFill>
-          <a:ln>
-            <a:solidFill>
-              <a:srgbClr val="10B981"/>
-            </a:solidFill>
-          </a:ln>
-        </p:spPr>
-        <p:style>
-          <a:lnRef idx="1">
-            <a:schemeClr val="accent1"/>
-          </a:lnRef>
-          <a:fillRef idx="3">
-            <a:schemeClr val="accent1"/>
-          </a:fillRef>
-          <a:effectRef idx="2">
-            <a:schemeClr val="accent1"/>
-          </a:effectRef>
-          <a:fontRef idx="minor">
-            <a:schemeClr val="lt1"/>
-          </a:fontRef>
-        </p:style>
-        <p:txBody>
-          <a:bodyPr rtlCol="0" anchor="ctr"/>
-          <a:lstStyle/>
-          <a:p>
-            <a:pPr algn="ctr"/>
-          </a:p>
-        </p:txBody>
-      </p:sp>
-      <p:sp>
-        <p:nvSpPr>
-          <p:cNvPr id="17" name="TextBox 16"/>
-          <p:cNvSpPr txBox="1"/>
-          <p:nvPr/>
-        </p:nvSpPr>
-        <p:spPr>
-          <a:xfrm>
-            <a:off x="4517136" y="2011680"/>
-            <a:ext cx="438912" cy="420624"/>
-          </a:xfrm>
-          <a:prstGeom prst="rect">
-            <a:avLst/>
-          </a:prstGeom>
-          <a:noFill/>
-        </p:spPr>
-        <p:txBody>
-          <a:bodyPr wrap="square" anchor="ctr">
-            <a:spAutoFit/>
-          </a:bodyPr>
-          <a:lstStyle/>
-          <a:p>
-            <a:pPr algn="ctr"/>
-            <a:r>
-              <a:rPr sz="1400" b="1">
-                <a:solidFill>
-                  <a:srgbClr val="FFFFFF"/>
-                </a:solidFill>
-                <a:latin typeface="Arial"/>
-              </a:rPr>
-              <a:t>2</a:t>
-            </a:r>
-          </a:p>
-        </p:txBody>
-      </p:sp>
-      <p:sp>
-        <p:nvSpPr>
-          <p:cNvPr id="18" name="TextBox 17"/>
-          <p:cNvSpPr txBox="1"/>
-          <p:nvPr/>
-        </p:nvSpPr>
-        <p:spPr>
-          <a:xfrm>
-            <a:off x="5120640" y="1965960"/>
-            <a:ext cx="2414016" cy="329184"/>
-          </a:xfrm>
-          <a:prstGeom prst="rect">
-            <a:avLst/>
-          </a:prstGeom>
-          <a:noFill/>
-        </p:spPr>
-        <p:txBody>
-          <a:bodyPr wrap="square" anchor="t">
-            <a:spAutoFit/>
-          </a:bodyPr>
-          <a:lstStyle/>
-          <a:p>
-            <a:pPr algn="l"/>
-            <a:r>
-              <a:rPr sz="1400" b="1">
-                <a:solidFill>
-                  <a:srgbClr val="10B981"/>
-                </a:solidFill>
-                <a:latin typeface="Arial"/>
-              </a:rPr>
-              <a:t>20%</a:t>
-            </a:r>
-          </a:p>
-        </p:txBody>
-      </p:sp>
-      <p:sp>
-        <p:nvSpPr>
-          <p:cNvPr id="19" name="TextBox 18"/>
-          <p:cNvSpPr txBox="1"/>
-          <p:nvPr/>
-        </p:nvSpPr>
-        <p:spPr>
-          <a:xfrm>
-            <a:off x="5120640" y="2350008"/>
-            <a:ext cx="2414016" cy="1005839"/>
-          </a:xfrm>
-          <a:prstGeom prst="rect">
-            <a:avLst/>
-          </a:prstGeom>
-          <a:noFill/>
-        </p:spPr>
-        <p:txBody>
-          <a:bodyPr wrap="square" anchor="t">
-            <a:spAutoFit/>
-          </a:bodyPr>
-          <a:lstStyle/>
-          <a:p>
-            <a:pPr algn="l"/>
-            <a:r>
-              <a:rPr sz="1150" b="0">
-                <a:solidFill>
-                  <a:srgbClr val="161B26"/>
-                </a:solidFill>
-                <a:latin typeface="Arial"/>
-              </a:rPr>
-              <a:t>Editability and workflow fit</a:t>
-            </a:r>
-          </a:p>
-        </p:txBody>
-      </p:sp>
-      <p:sp>
-        <p:nvSpPr>
-          <p:cNvPr id="20" name="Rounded Rectangle 19"/>
-          <p:cNvSpPr/>
-          <p:nvPr/>
-        </p:nvSpPr>
-        <p:spPr>
-          <a:xfrm>
-            <a:off x="7900416" y="1783080"/>
-            <a:ext cx="3401568" cy="1719072"/>
-          </a:xfrm>
-          <a:prstGeom prst="roundRect">
-            <a:avLst/>
-          </a:prstGeom>
-          <a:solidFill>
-            <a:srgbClr val="F5F8FC"/>
-          </a:solidFill>
-          <a:ln>
-            <a:solidFill>
-              <a:srgbClr val="E2E8F0"/>
-            </a:solidFill>
-          </a:ln>
-        </p:spPr>
-        <p:style>
-          <a:lnRef idx="1">
-            <a:schemeClr val="accent1"/>
-          </a:lnRef>
-          <a:fillRef idx="3">
-            <a:schemeClr val="accent1"/>
-          </a:fillRef>
-          <a:effectRef idx="2">
-            <a:schemeClr val="accent1"/>
-          </a:effectRef>
-          <a:fontRef idx="minor">
-            <a:schemeClr val="lt1"/>
-          </a:fontRef>
-        </p:style>
-        <p:txBody>
-          <a:bodyPr rtlCol="0" anchor="ctr"/>
-          <a:lstStyle/>
-          <a:p>
-            <a:pPr algn="ctr"/>
-          </a:p>
-        </p:txBody>
-      </p:sp>
-      <p:sp>
-        <p:nvSpPr>
-          <p:cNvPr id="21" name="Rectangle 20"/>
-          <p:cNvSpPr/>
-          <p:nvPr/>
-        </p:nvSpPr>
-        <p:spPr>
-          <a:xfrm>
-            <a:off x="7900416" y="1783080"/>
-            <a:ext cx="73152" cy="1719072"/>
-          </a:xfrm>
-          <a:prstGeom prst="rect">
-            <a:avLst/>
-          </a:prstGeom>
-          <a:solidFill>
-            <a:srgbClr val="7C3AED"/>
-          </a:solidFill>
-          <a:ln>
-            <a:solidFill>
-              <a:srgbClr val="7C3AED"/>
-            </a:solidFill>
-          </a:ln>
-        </p:spPr>
-        <p:style>
-          <a:lnRef idx="1">
-            <a:schemeClr val="accent1"/>
-          </a:lnRef>
-          <a:fillRef idx="3">
-            <a:schemeClr val="accent1"/>
-          </a:fillRef>
-          <a:effectRef idx="2">
-            <a:schemeClr val="accent1"/>
-          </a:effectRef>
-          <a:fontRef idx="minor">
-            <a:schemeClr val="lt1"/>
-          </a:fontRef>
-        </p:style>
-        <p:txBody>
-          <a:bodyPr rtlCol="0" anchor="ctr"/>
-          <a:lstStyle/>
-          <a:p>
-            <a:pPr algn="ctr"/>
-          </a:p>
-        </p:txBody>
-      </p:sp>
-      <p:sp>
-        <p:nvSpPr>
-          <p:cNvPr id="22" name="Rounded Rectangle 21"/>
-          <p:cNvSpPr/>
-          <p:nvPr/>
-        </p:nvSpPr>
-        <p:spPr>
-          <a:xfrm>
-            <a:off x="8101584" y="2002536"/>
-            <a:ext cx="438912" cy="438912"/>
-          </a:xfrm>
-          <a:prstGeom prst="roundRect">
-            <a:avLst/>
-          </a:prstGeom>
-          <a:solidFill>
-            <a:srgbClr val="7C3AED"/>
-          </a:solidFill>
-          <a:ln>
-            <a:solidFill>
-              <a:srgbClr val="7C3AED"/>
-            </a:solidFill>
-          </a:ln>
-        </p:spPr>
-        <p:style>
-          <a:lnRef idx="1">
-            <a:schemeClr val="accent1"/>
-          </a:lnRef>
-          <a:fillRef idx="3">
-            <a:schemeClr val="accent1"/>
-          </a:fillRef>
-          <a:effectRef idx="2">
-            <a:schemeClr val="accent1"/>
-          </a:effectRef>
-          <a:fontRef idx="minor">
-            <a:schemeClr val="lt1"/>
-          </a:fontRef>
-        </p:style>
-        <p:txBody>
-          <a:bodyPr rtlCol="0" anchor="ctr"/>
-          <a:lstStyle/>
-          <a:p>
-            <a:pPr algn="ctr"/>
-          </a:p>
-        </p:txBody>
-      </p:sp>
-      <p:sp>
-        <p:nvSpPr>
-          <p:cNvPr id="23" name="TextBox 22"/>
-          <p:cNvSpPr txBox="1"/>
-          <p:nvPr/>
-        </p:nvSpPr>
-        <p:spPr>
-          <a:xfrm>
-            <a:off x="8101584" y="2011680"/>
-            <a:ext cx="438912" cy="420624"/>
-          </a:xfrm>
-          <a:prstGeom prst="rect">
-            <a:avLst/>
-          </a:prstGeom>
-          <a:noFill/>
-        </p:spPr>
-        <p:txBody>
-          <a:bodyPr wrap="square" anchor="ctr">
-            <a:spAutoFit/>
-          </a:bodyPr>
-          <a:lstStyle/>
-          <a:p>
-            <a:pPr algn="ctr"/>
-            <a:r>
-              <a:rPr sz="1400" b="1">
-                <a:solidFill>
-                  <a:srgbClr val="FFFFFF"/>
-                </a:solidFill>
-                <a:latin typeface="Arial"/>
-              </a:rPr>
-              <a:t>3</a:t>
-            </a:r>
-          </a:p>
-        </p:txBody>
-      </p:sp>
-      <p:sp>
-        <p:nvSpPr>
-          <p:cNvPr id="24" name="TextBox 23"/>
-          <p:cNvSpPr txBox="1"/>
-          <p:nvPr/>
-        </p:nvSpPr>
-        <p:spPr>
-          <a:xfrm>
-            <a:off x="8705088" y="1965960"/>
-            <a:ext cx="2414016" cy="329184"/>
-          </a:xfrm>
-          <a:prstGeom prst="rect">
-            <a:avLst/>
-          </a:prstGeom>
-          <a:noFill/>
-        </p:spPr>
-        <p:txBody>
-          <a:bodyPr wrap="square" anchor="t">
-            <a:spAutoFit/>
-          </a:bodyPr>
-          <a:lstStyle/>
-          <a:p>
-            <a:pPr algn="l"/>
-            <a:r>
-              <a:rPr sz="1400" b="1">
-                <a:solidFill>
-                  <a:srgbClr val="7C3AED"/>
-                </a:solidFill>
-                <a:latin typeface="Arial"/>
-              </a:rPr>
-              <a:t>15%</a:t>
-            </a:r>
-          </a:p>
-        </p:txBody>
-      </p:sp>
-      <p:sp>
-        <p:nvSpPr>
-          <p:cNvPr id="25" name="TextBox 24"/>
-          <p:cNvSpPr txBox="1"/>
-          <p:nvPr/>
-        </p:nvSpPr>
-        <p:spPr>
-          <a:xfrm>
-            <a:off x="8705088" y="2350008"/>
-            <a:ext cx="2414016" cy="1005839"/>
-          </a:xfrm>
-          <a:prstGeom prst="rect">
-            <a:avLst/>
-          </a:prstGeom>
-          <a:noFill/>
-        </p:spPr>
-        <p:txBody>
-          <a:bodyPr wrap="square" anchor="t">
-            <a:spAutoFit/>
-          </a:bodyPr>
-          <a:lstStyle/>
-          <a:p>
-            <a:pPr algn="l"/>
-            <a:r>
-              <a:rPr sz="1150" b="0">
-                <a:solidFill>
-                  <a:srgbClr val="161B26"/>
-                </a:solidFill>
-                <a:latin typeface="Arial"/>
-              </a:rPr>
-              <a:t>Brand and accessibility control</a:t>
-            </a:r>
-          </a:p>
-        </p:txBody>
-      </p:sp>
-      <p:sp>
-        <p:nvSpPr>
-          <p:cNvPr id="26" name="Rounded Rectangle 25"/>
-          <p:cNvSpPr/>
-          <p:nvPr/>
-        </p:nvSpPr>
-        <p:spPr>
-          <a:xfrm>
-            <a:off x="731520" y="3776472"/>
-            <a:ext cx="3401568" cy="1719072"/>
-          </a:xfrm>
-          <a:prstGeom prst="roundRect">
-            <a:avLst/>
-          </a:prstGeom>
-          <a:solidFill>
-            <a:srgbClr val="F5F8FC"/>
-          </a:solidFill>
-          <a:ln>
-            <a:solidFill>
-              <a:srgbClr val="E2E8F0"/>
-            </a:solidFill>
-          </a:ln>
-        </p:spPr>
-        <p:style>
-          <a:lnRef idx="1">
-            <a:schemeClr val="accent1"/>
-          </a:lnRef>
-          <a:fillRef idx="3">
-            <a:schemeClr val="accent1"/>
-          </a:fillRef>
-          <a:effectRef idx="2">
-            <a:schemeClr val="accent1"/>
-          </a:effectRef>
-          <a:fontRef idx="minor">
-            <a:schemeClr val="lt1"/>
-          </a:fontRef>
-        </p:style>
-        <p:txBody>
-          <a:bodyPr rtlCol="0" anchor="ctr"/>
-          <a:lstStyle/>
-          <a:p>
-            <a:pPr algn="ctr"/>
-          </a:p>
-        </p:txBody>
-      </p:sp>
-      <p:sp>
-        <p:nvSpPr>
-          <p:cNvPr id="27" name="Rectangle 26"/>
-          <p:cNvSpPr/>
-          <p:nvPr/>
-        </p:nvSpPr>
-        <p:spPr>
-          <a:xfrm>
-            <a:off x="731520" y="3776472"/>
-            <a:ext cx="73152" cy="1719072"/>
-          </a:xfrm>
-          <a:prstGeom prst="rect">
-            <a:avLst/>
-          </a:prstGeom>
-          <a:solidFill>
-            <a:srgbClr val="F59E0B"/>
-          </a:solidFill>
-          <a:ln>
-            <a:solidFill>
-              <a:srgbClr val="F59E0B"/>
-            </a:solidFill>
-          </a:ln>
-        </p:spPr>
-        <p:style>
-          <a:lnRef idx="1">
-            <a:schemeClr val="accent1"/>
-          </a:lnRef>
-          <a:fillRef idx="3">
-            <a:schemeClr val="accent1"/>
-          </a:fillRef>
-          <a:effectRef idx="2">
-            <a:schemeClr val="accent1"/>
-          </a:effectRef>
-          <a:fontRef idx="minor">
-            <a:schemeClr val="lt1"/>
-          </a:fontRef>
-        </p:style>
-        <p:txBody>
-          <a:bodyPr rtlCol="0" anchor="ctr"/>
-          <a:lstStyle/>
-          <a:p>
-            <a:pPr algn="ctr"/>
-          </a:p>
-        </p:txBody>
-      </p:sp>
-      <p:sp>
-        <p:nvSpPr>
-          <p:cNvPr id="28" name="Rounded Rectangle 27"/>
-          <p:cNvSpPr/>
-          <p:nvPr/>
-        </p:nvSpPr>
-        <p:spPr>
-          <a:xfrm>
-            <a:off x="932688" y="3995928"/>
-            <a:ext cx="438912" cy="438912"/>
-          </a:xfrm>
-          <a:prstGeom prst="roundRect">
-            <a:avLst/>
-          </a:prstGeom>
-          <a:solidFill>
-            <a:srgbClr val="F59E0B"/>
-          </a:solidFill>
-          <a:ln>
-            <a:solidFill>
-              <a:srgbClr val="F59E0B"/>
-            </a:solidFill>
-          </a:ln>
-        </p:spPr>
-        <p:style>
-          <a:lnRef idx="1">
-            <a:schemeClr val="accent1"/>
-          </a:lnRef>
-          <a:fillRef idx="3">
-            <a:schemeClr val="accent1"/>
-          </a:fillRef>
-          <a:effectRef idx="2">
-            <a:schemeClr val="accent1"/>
-          </a:effectRef>
-          <a:fontRef idx="minor">
-            <a:schemeClr val="lt1"/>
-          </a:fontRef>
-        </p:style>
-        <p:txBody>
-          <a:bodyPr rtlCol="0" anchor="ctr"/>
-          <a:lstStyle/>
-          <a:p>
-            <a:pPr algn="ctr"/>
-          </a:p>
-        </p:txBody>
-      </p:sp>
-      <p:sp>
-        <p:nvSpPr>
-          <p:cNvPr id="29" name="TextBox 28"/>
-          <p:cNvSpPr txBox="1"/>
-          <p:nvPr/>
-        </p:nvSpPr>
-        <p:spPr>
-          <a:xfrm>
-            <a:off x="932688" y="4005072"/>
-            <a:ext cx="438912" cy="420624"/>
-          </a:xfrm>
-          <a:prstGeom prst="rect">
-            <a:avLst/>
-          </a:prstGeom>
-          <a:noFill/>
-        </p:spPr>
-        <p:txBody>
-          <a:bodyPr wrap="square" anchor="ctr">
-            <a:spAutoFit/>
-          </a:bodyPr>
-          <a:lstStyle/>
-          <a:p>
-            <a:pPr algn="ctr"/>
-            <a:r>
-              <a:rPr sz="1400" b="1">
-                <a:solidFill>
-                  <a:srgbClr val="FFFFFF"/>
-                </a:solidFill>
-                <a:latin typeface="Arial"/>
-              </a:rPr>
-              <a:t>4</a:t>
-            </a:r>
-          </a:p>
-        </p:txBody>
-      </p:sp>
-      <p:sp>
-        <p:nvSpPr>
-          <p:cNvPr id="30" name="TextBox 29"/>
-          <p:cNvSpPr txBox="1"/>
-          <p:nvPr/>
-        </p:nvSpPr>
-        <p:spPr>
-          <a:xfrm>
-            <a:off x="1536192" y="3959352"/>
-            <a:ext cx="2414016" cy="329184"/>
-          </a:xfrm>
-          <a:prstGeom prst="rect">
-            <a:avLst/>
-          </a:prstGeom>
-          <a:noFill/>
-        </p:spPr>
-        <p:txBody>
-          <a:bodyPr wrap="square" anchor="t">
-            <a:spAutoFit/>
-          </a:bodyPr>
-          <a:lstStyle/>
-          <a:p>
-            <a:pPr algn="l"/>
-            <a:r>
-              <a:rPr sz="1400" b="1">
-                <a:solidFill>
-                  <a:srgbClr val="F59E0B"/>
-                </a:solidFill>
-                <a:latin typeface="Arial"/>
-              </a:rPr>
-              <a:t>15%</a:t>
-            </a:r>
-          </a:p>
-        </p:txBody>
-      </p:sp>
-      <p:sp>
-        <p:nvSpPr>
-          <p:cNvPr id="31" name="TextBox 30"/>
-          <p:cNvSpPr txBox="1"/>
-          <p:nvPr/>
-        </p:nvSpPr>
-        <p:spPr>
-          <a:xfrm>
-            <a:off x="1536192" y="4343400"/>
-            <a:ext cx="2414016" cy="1005839"/>
-          </a:xfrm>
-          <a:prstGeom prst="rect">
-            <a:avLst/>
-          </a:prstGeom>
-          <a:noFill/>
-        </p:spPr>
-        <p:txBody>
-          <a:bodyPr wrap="square" anchor="t">
-            <a:spAutoFit/>
-          </a:bodyPr>
-          <a:lstStyle/>
-          <a:p>
-            <a:pPr algn="l"/>
-            <a:r>
-              <a:rPr sz="1150" b="0">
-                <a:solidFill>
-                  <a:srgbClr val="161B26"/>
-                </a:solidFill>
-                <a:latin typeface="Arial"/>
-              </a:rPr>
-              <a:t>Privacy, rights and governance</a:t>
-            </a:r>
-          </a:p>
-        </p:txBody>
-      </p:sp>
-      <p:sp>
-        <p:nvSpPr>
-          <p:cNvPr id="32" name="Rounded Rectangle 31"/>
-          <p:cNvSpPr/>
-          <p:nvPr/>
-        </p:nvSpPr>
-        <p:spPr>
-          <a:xfrm>
-            <a:off x="4315968" y="3776472"/>
-            <a:ext cx="3401568" cy="1719072"/>
-          </a:xfrm>
-          <a:prstGeom prst="roundRect">
-            <a:avLst/>
-          </a:prstGeom>
-          <a:solidFill>
-            <a:srgbClr val="F5F8FC"/>
-          </a:solidFill>
-          <a:ln>
-            <a:solidFill>
-              <a:srgbClr val="E2E8F0"/>
-            </a:solidFill>
-          </a:ln>
-        </p:spPr>
-        <p:style>
-          <a:lnRef idx="1">
-            <a:schemeClr val="accent1"/>
-          </a:lnRef>
-          <a:fillRef idx="3">
-            <a:schemeClr val="accent1"/>
-          </a:fillRef>
-          <a:effectRef idx="2">
-            <a:schemeClr val="accent1"/>
-          </a:effectRef>
-          <a:fontRef idx="minor">
-            <a:schemeClr val="lt1"/>
-          </a:fontRef>
-        </p:style>
-        <p:txBody>
-          <a:bodyPr rtlCol="0" anchor="ctr"/>
-          <a:lstStyle/>
-          <a:p>
-            <a:pPr algn="ctr"/>
-          </a:p>
-        </p:txBody>
-      </p:sp>
-      <p:sp>
-        <p:nvSpPr>
-          <p:cNvPr id="33" name="Rectangle 32"/>
-          <p:cNvSpPr/>
-          <p:nvPr/>
-        </p:nvSpPr>
-        <p:spPr>
-          <a:xfrm>
-            <a:off x="4315968" y="3776472"/>
-            <a:ext cx="73152" cy="1719072"/>
-          </a:xfrm>
-          <a:prstGeom prst="rect">
-            <a:avLst/>
-          </a:prstGeom>
-          <a:solidFill>
-            <a:srgbClr val="1F6FEB"/>
-          </a:solidFill>
-          <a:ln>
-            <a:solidFill>
-              <a:srgbClr val="1F6FEB"/>
-            </a:solidFill>
-          </a:ln>
-        </p:spPr>
-        <p:style>
-          <a:lnRef idx="1">
-            <a:schemeClr val="accent1"/>
-          </a:lnRef>
-          <a:fillRef idx="3">
-            <a:schemeClr val="accent1"/>
-          </a:fillRef>
-          <a:effectRef idx="2">
-            <a:schemeClr val="accent1"/>
-          </a:effectRef>
-          <a:fontRef idx="minor">
-            <a:schemeClr val="lt1"/>
-          </a:fontRef>
-        </p:style>
-        <p:txBody>
-          <a:bodyPr rtlCol="0" anchor="ctr"/>
-          <a:lstStyle/>
-          <a:p>
-            <a:pPr algn="ctr"/>
-          </a:p>
-        </p:txBody>
-      </p:sp>
-      <p:sp>
-        <p:nvSpPr>
-          <p:cNvPr id="34" name="Rounded Rectangle 33"/>
-          <p:cNvSpPr/>
-          <p:nvPr/>
-        </p:nvSpPr>
-        <p:spPr>
-          <a:xfrm>
-            <a:off x="4517136" y="3995928"/>
-            <a:ext cx="438912" cy="438912"/>
-          </a:xfrm>
-          <a:prstGeom prst="roundRect">
-            <a:avLst/>
-          </a:prstGeom>
-          <a:solidFill>
-            <a:srgbClr val="1F6FEB"/>
-          </a:solidFill>
-          <a:ln>
-            <a:solidFill>
-              <a:srgbClr val="1F6FEB"/>
-            </a:solidFill>
-          </a:ln>
-        </p:spPr>
-        <p:style>
-          <a:lnRef idx="1">
-            <a:schemeClr val="accent1"/>
-          </a:lnRef>
-          <a:fillRef idx="3">
-            <a:schemeClr val="accent1"/>
-          </a:fillRef>
-          <a:effectRef idx="2">
-            <a:schemeClr val="accent1"/>
-          </a:effectRef>
-          <a:fontRef idx="minor">
-            <a:schemeClr val="lt1"/>
-          </a:fontRef>
-        </p:style>
-        <p:txBody>
-          <a:bodyPr rtlCol="0" anchor="ctr"/>
-          <a:lstStyle/>
-          <a:p>
-            <a:pPr algn="ctr"/>
-          </a:p>
-        </p:txBody>
-      </p:sp>
-      <p:sp>
-        <p:nvSpPr>
-          <p:cNvPr id="35" name="TextBox 34"/>
-          <p:cNvSpPr txBox="1"/>
-          <p:nvPr/>
-        </p:nvSpPr>
-        <p:spPr>
-          <a:xfrm>
-            <a:off x="4517136" y="4005072"/>
-            <a:ext cx="438912" cy="420624"/>
-          </a:xfrm>
-          <a:prstGeom prst="rect">
-            <a:avLst/>
-          </a:prstGeom>
-          <a:noFill/>
-        </p:spPr>
-        <p:txBody>
-          <a:bodyPr wrap="square" anchor="ctr">
-            <a:spAutoFit/>
-          </a:bodyPr>
-          <a:lstStyle/>
-          <a:p>
-            <a:pPr algn="ctr"/>
-            <a:r>
-              <a:rPr sz="1400" b="1">
-                <a:solidFill>
-                  <a:srgbClr val="FFFFFF"/>
-                </a:solidFill>
-                <a:latin typeface="Arial"/>
-              </a:rPr>
-              <a:t>5</a:t>
-            </a:r>
-          </a:p>
-        </p:txBody>
-      </p:sp>
-      <p:sp>
-        <p:nvSpPr>
-          <p:cNvPr id="36" name="TextBox 35"/>
-          <p:cNvSpPr txBox="1"/>
-          <p:nvPr/>
-        </p:nvSpPr>
-        <p:spPr>
-          <a:xfrm>
-            <a:off x="5120640" y="3959352"/>
-            <a:ext cx="2414016" cy="329184"/>
-          </a:xfrm>
-          <a:prstGeom prst="rect">
-            <a:avLst/>
-          </a:prstGeom>
-          <a:noFill/>
-        </p:spPr>
-        <p:txBody>
-          <a:bodyPr wrap="square" anchor="t">
-            <a:spAutoFit/>
-          </a:bodyPr>
-          <a:lstStyle/>
-          <a:p>
-            <a:pPr algn="l"/>
-            <a:r>
-              <a:rPr sz="1400" b="1">
-                <a:solidFill>
-                  <a:srgbClr val="1F6FEB"/>
-                </a:solidFill>
-                <a:latin typeface="Arial"/>
-              </a:rPr>
-              <a:t>15%</a:t>
-            </a:r>
-          </a:p>
-        </p:txBody>
-      </p:sp>
-      <p:sp>
-        <p:nvSpPr>
-          <p:cNvPr id="37" name="TextBox 36"/>
-          <p:cNvSpPr txBox="1"/>
-          <p:nvPr/>
-        </p:nvSpPr>
-        <p:spPr>
-          <a:xfrm>
-            <a:off x="5120640" y="4343400"/>
-            <a:ext cx="2414016" cy="1005839"/>
-          </a:xfrm>
-          <a:prstGeom prst="rect">
-            <a:avLst/>
-          </a:prstGeom>
-          <a:noFill/>
-        </p:spPr>
-        <p:txBody>
-          <a:bodyPr wrap="square" anchor="t">
-            <a:spAutoFit/>
-          </a:bodyPr>
-          <a:lstStyle/>
-          <a:p>
-            <a:pPr algn="l"/>
-            <a:r>
-              <a:rPr sz="1150" b="0">
-                <a:solidFill>
-                  <a:srgbClr val="161B26"/>
-                </a:solidFill>
-                <a:latin typeface="Arial"/>
-              </a:rPr>
-              <a:t>Total resource cost</a:t>
-            </a:r>
-          </a:p>
-        </p:txBody>
-      </p:sp>
-      <p:sp>
-        <p:nvSpPr>
-          <p:cNvPr id="38" name="Rounded Rectangle 37"/>
-          <p:cNvSpPr/>
-          <p:nvPr/>
-        </p:nvSpPr>
-        <p:spPr>
-          <a:xfrm>
-            <a:off x="7900416" y="3776472"/>
-            <a:ext cx="3401568" cy="1719072"/>
-          </a:xfrm>
-          <a:prstGeom prst="roundRect">
-            <a:avLst/>
-          </a:prstGeom>
-          <a:solidFill>
-            <a:srgbClr val="F5F8FC"/>
-          </a:solidFill>
-          <a:ln>
-            <a:solidFill>
-              <a:srgbClr val="E2E8F0"/>
-            </a:solidFill>
-          </a:ln>
-        </p:spPr>
-        <p:style>
-          <a:lnRef idx="1">
-            <a:schemeClr val="accent1"/>
-          </a:lnRef>
-          <a:fillRef idx="3">
-            <a:schemeClr val="accent1"/>
-          </a:fillRef>
-          <a:effectRef idx="2">
-            <a:schemeClr val="accent1"/>
-          </a:effectRef>
-          <a:fontRef idx="minor">
-            <a:schemeClr val="lt1"/>
-          </a:fontRef>
-        </p:style>
-        <p:txBody>
-          <a:bodyPr rtlCol="0" anchor="ctr"/>
-          <a:lstStyle/>
-          <a:p>
-            <a:pPr algn="ctr"/>
-          </a:p>
-        </p:txBody>
-      </p:sp>
-      <p:sp>
-        <p:nvSpPr>
-          <p:cNvPr id="39" name="Rectangle 38"/>
-          <p:cNvSpPr/>
-          <p:nvPr/>
-        </p:nvSpPr>
-        <p:spPr>
-          <a:xfrm>
-            <a:off x="7900416" y="3776472"/>
-            <a:ext cx="73152" cy="1719072"/>
-          </a:xfrm>
-          <a:prstGeom prst="rect">
-            <a:avLst/>
-          </a:prstGeom>
-          <a:solidFill>
-            <a:srgbClr val="10B981"/>
-          </a:solidFill>
-          <a:ln>
-            <a:solidFill>
-              <a:srgbClr val="10B981"/>
-            </a:solidFill>
-          </a:ln>
-        </p:spPr>
-        <p:style>
-          <a:lnRef idx="1">
-            <a:schemeClr val="accent1"/>
-          </a:lnRef>
-          <a:fillRef idx="3">
-            <a:schemeClr val="accent1"/>
-          </a:fillRef>
-          <a:effectRef idx="2">
-            <a:schemeClr val="accent1"/>
-          </a:effectRef>
-          <a:fontRef idx="minor">
-            <a:schemeClr val="lt1"/>
-          </a:fontRef>
-        </p:style>
-        <p:txBody>
-          <a:bodyPr rtlCol="0" anchor="ctr"/>
-          <a:lstStyle/>
-          <a:p>
-            <a:pPr algn="ctr"/>
-          </a:p>
-        </p:txBody>
-      </p:sp>
-      <p:sp>
-        <p:nvSpPr>
-          <p:cNvPr id="40" name="Rounded Rectangle 39"/>
-          <p:cNvSpPr/>
-          <p:nvPr/>
-        </p:nvSpPr>
-        <p:spPr>
-          <a:xfrm>
-            <a:off x="8101584" y="3995928"/>
-            <a:ext cx="438912" cy="438912"/>
-          </a:xfrm>
-          <a:prstGeom prst="roundRect">
-            <a:avLst/>
-          </a:prstGeom>
-          <a:solidFill>
-            <a:srgbClr val="10B981"/>
-          </a:solidFill>
-          <a:ln>
-            <a:solidFill>
-              <a:srgbClr val="10B981"/>
-            </a:solidFill>
-          </a:ln>
-        </p:spPr>
-        <p:style>
-          <a:lnRef idx="1">
-            <a:schemeClr val="accent1"/>
-          </a:lnRef>
-          <a:fillRef idx="3">
-            <a:schemeClr val="accent1"/>
-          </a:fillRef>
-          <a:effectRef idx="2">
-            <a:schemeClr val="accent1"/>
-          </a:effectRef>
-          <a:fontRef idx="minor">
-            <a:schemeClr val="lt1"/>
-          </a:fontRef>
-        </p:style>
-        <p:txBody>
-          <a:bodyPr rtlCol="0" anchor="ctr"/>
-          <a:lstStyle/>
-          <a:p>
-            <a:pPr algn="ctr"/>
-          </a:p>
-        </p:txBody>
-      </p:sp>
-      <p:sp>
-        <p:nvSpPr>
-          <p:cNvPr id="41" name="TextBox 40"/>
-          <p:cNvSpPr txBox="1"/>
-          <p:nvPr/>
-        </p:nvSpPr>
-        <p:spPr>
-          <a:xfrm>
-            <a:off x="8101584" y="4005072"/>
-            <a:ext cx="438912" cy="420624"/>
-          </a:xfrm>
-          <a:prstGeom prst="rect">
-            <a:avLst/>
-          </a:prstGeom>
-          <a:noFill/>
-        </p:spPr>
-        <p:txBody>
-          <a:bodyPr wrap="square" anchor="ctr">
-            <a:spAutoFit/>
-          </a:bodyPr>
-          <a:lstStyle/>
-          <a:p>
-            <a:pPr algn="ctr"/>
-            <a:r>
-              <a:rPr sz="1400" b="1">
-                <a:solidFill>
-                  <a:srgbClr val="FFFFFF"/>
-                </a:solidFill>
-                <a:latin typeface="Arial"/>
-              </a:rPr>
-              <a:t>6</a:t>
-            </a:r>
-          </a:p>
-        </p:txBody>
-      </p:sp>
-      <p:sp>
-        <p:nvSpPr>
-          <p:cNvPr id="42" name="TextBox 41"/>
-          <p:cNvSpPr txBox="1"/>
-          <p:nvPr/>
-        </p:nvSpPr>
-        <p:spPr>
-          <a:xfrm>
-            <a:off x="8705088" y="3959352"/>
-            <a:ext cx="2414016" cy="329184"/>
-          </a:xfrm>
-          <a:prstGeom prst="rect">
-            <a:avLst/>
-          </a:prstGeom>
-          <a:noFill/>
-        </p:spPr>
-        <p:txBody>
-          <a:bodyPr wrap="square" anchor="t">
-            <a:spAutoFit/>
-          </a:bodyPr>
-          <a:lstStyle/>
-          <a:p>
-            <a:pPr algn="l"/>
-            <a:r>
-              <a:rPr sz="1400" b="1">
-                <a:solidFill>
-                  <a:srgbClr val="10B981"/>
-                </a:solidFill>
-                <a:latin typeface="Arial"/>
-              </a:rPr>
-              <a:t>Gate</a:t>
-            </a:r>
-          </a:p>
-        </p:txBody>
-      </p:sp>
-      <p:sp>
-        <p:nvSpPr>
-          <p:cNvPr id="43" name="TextBox 42"/>
-          <p:cNvSpPr txBox="1"/>
-          <p:nvPr/>
-        </p:nvSpPr>
-        <p:spPr>
-          <a:xfrm>
-            <a:off x="8705088" y="4343400"/>
-            <a:ext cx="2414016" cy="1005839"/>
-          </a:xfrm>
-          <a:prstGeom prst="rect">
-            <a:avLst/>
-          </a:prstGeom>
-          <a:noFill/>
-        </p:spPr>
-        <p:txBody>
-          <a:bodyPr wrap="square" anchor="t">
-            <a:spAutoFit/>
-          </a:bodyPr>
-          <a:lstStyle/>
-          <a:p>
-            <a:pPr algn="l"/>
-            <a:r>
-              <a:rPr sz="1150" b="0">
-                <a:solidFill>
-                  <a:srgbClr val="161B26"/>
-                </a:solidFill>
-                <a:latin typeface="Arial"/>
-              </a:rPr>
-              <a:t>No option passes with unverified data or public answer-key risk</a:t>
+              <a:t>Recommend tools, budget, controls and review date.</a:t>
             </a:r>
           </a:p>
         </p:txBody>
@@ -7419,6 +6940,246 @@
             <a:avLst/>
           </a:prstGeom>
           <a:solidFill>
+            <a:srgbClr val="7C3AED"/>
+          </a:solidFill>
+          <a:ln>
+            <a:solidFill>
+              <a:srgbClr val="7C3AED"/>
+            </a:solidFill>
+          </a:ln>
+        </p:spPr>
+        <p:style>
+          <a:lnRef idx="1">
+            <a:schemeClr val="accent1"/>
+          </a:lnRef>
+          <a:fillRef idx="3">
+            <a:schemeClr val="accent1"/>
+          </a:fillRef>
+          <a:effectRef idx="2">
+            <a:schemeClr val="accent1"/>
+          </a:effectRef>
+          <a:fontRef idx="minor">
+            <a:schemeClr val="lt1"/>
+          </a:fontRef>
+        </p:style>
+        <p:txBody>
+          <a:bodyPr rtlCol="0" anchor="ctr"/>
+          <a:lstStyle/>
+          <a:p>
+            <a:pPr algn="ctr"/>
+          </a:p>
+        </p:txBody>
+      </p:sp>
+      <p:sp>
+        <p:nvSpPr>
+          <p:cNvPr id="4" name="TextBox 3"/>
+          <p:cNvSpPr txBox="1"/>
+          <p:nvPr/>
+        </p:nvSpPr>
+        <p:spPr>
+          <a:xfrm>
+            <a:off x="658368" y="384048"/>
+            <a:ext cx="10789920" cy="320040"/>
+          </a:xfrm>
+          <a:prstGeom prst="rect">
+            <a:avLst/>
+          </a:prstGeom>
+          <a:noFill/>
+        </p:spPr>
+        <p:txBody>
+          <a:bodyPr wrap="square" anchor="t">
+            <a:spAutoFit/>
+          </a:bodyPr>
+          <a:lstStyle/>
+          <a:p>
+            <a:pPr algn="l"/>
+            <a:r>
+              <a:rPr sz="1100" b="1">
+                <a:solidFill>
+                  <a:srgbClr val="7C3AED"/>
+                </a:solidFill>
+                <a:latin typeface="Arial"/>
+              </a:rPr>
+              <a:t>ACTIVITY 08 · EXAMPLE</a:t>
+            </a:r>
+          </a:p>
+        </p:txBody>
+      </p:sp>
+      <p:sp>
+        <p:nvSpPr>
+          <p:cNvPr id="5" name="TextBox 4"/>
+          <p:cNvSpPr txBox="1"/>
+          <p:nvPr/>
+        </p:nvSpPr>
+        <p:spPr>
+          <a:xfrm>
+            <a:off x="658368" y="749808"/>
+            <a:ext cx="10789920" cy="658368"/>
+          </a:xfrm>
+          <a:prstGeom prst="rect">
+            <a:avLst/>
+          </a:prstGeom>
+          <a:noFill/>
+        </p:spPr>
+        <p:txBody>
+          <a:bodyPr wrap="square" anchor="t">
+            <a:spAutoFit/>
+          </a:bodyPr>
+          <a:lstStyle/>
+          <a:p>
+            <a:pPr algn="l"/>
+            <a:r>
+              <a:rPr sz="2700" b="1">
+                <a:solidFill>
+                  <a:srgbClr val="161B26"/>
+                </a:solidFill>
+                <a:latin typeface="Arial"/>
+              </a:rPr>
+              <a:t>Worked Output</a:t>
+            </a:r>
+          </a:p>
+        </p:txBody>
+      </p:sp>
+      <p:sp>
+        <p:nvSpPr>
+          <p:cNvPr id="6" name="Rectangle 5"/>
+          <p:cNvSpPr/>
+          <p:nvPr/>
+        </p:nvSpPr>
+        <p:spPr>
+          <a:xfrm>
+            <a:off x="658368" y="1444752"/>
+            <a:ext cx="10881360" cy="18288"/>
+          </a:xfrm>
+          <a:prstGeom prst="rect">
+            <a:avLst/>
+          </a:prstGeom>
+          <a:solidFill>
+            <a:srgbClr val="E2E8F0"/>
+          </a:solidFill>
+          <a:ln>
+            <a:solidFill>
+              <a:srgbClr val="E2E8F0"/>
+            </a:solidFill>
+          </a:ln>
+        </p:spPr>
+        <p:style>
+          <a:lnRef idx="1">
+            <a:schemeClr val="accent1"/>
+          </a:lnRef>
+          <a:fillRef idx="3">
+            <a:schemeClr val="accent1"/>
+          </a:fillRef>
+          <a:effectRef idx="2">
+            <a:schemeClr val="accent1"/>
+          </a:effectRef>
+          <a:fontRef idx="minor">
+            <a:schemeClr val="lt1"/>
+          </a:fontRef>
+        </p:style>
+        <p:txBody>
+          <a:bodyPr rtlCol="0" anchor="ctr"/>
+          <a:lstStyle/>
+          <a:p>
+            <a:pPr algn="ctr"/>
+          </a:p>
+        </p:txBody>
+      </p:sp>
+      <p:sp>
+        <p:nvSpPr>
+          <p:cNvPr id="7" name="TextBox 6"/>
+          <p:cNvSpPr txBox="1"/>
+          <p:nvPr/>
+        </p:nvSpPr>
+        <p:spPr>
+          <a:xfrm>
+            <a:off x="658368" y="6473952"/>
+            <a:ext cx="9875520" cy="201168"/>
+          </a:xfrm>
+          <a:prstGeom prst="rect">
+            <a:avLst/>
+          </a:prstGeom>
+          <a:noFill/>
+        </p:spPr>
+        <p:txBody>
+          <a:bodyPr wrap="square" anchor="t">
+            <a:spAutoFit/>
+          </a:bodyPr>
+          <a:lstStyle/>
+          <a:p>
+            <a:pPr algn="l"/>
+            <a:r>
+              <a:rPr sz="800" b="0">
+                <a:solidFill>
+                  <a:srgbClr val="5B6372"/>
+                </a:solidFill>
+                <a:latin typeface="Arial"/>
+              </a:rPr>
+              <a:t>TGS-2026064178 · ACTIVITY PRACTICE · Tertiary Infotech Academy Pte Ltd</a:t>
+            </a:r>
+          </a:p>
+        </p:txBody>
+      </p:sp>
+      <p:sp>
+        <p:nvSpPr>
+          <p:cNvPr id="8" name="Rounded Rectangle 7"/>
+          <p:cNvSpPr/>
+          <p:nvPr/>
+        </p:nvSpPr>
+        <p:spPr>
+          <a:xfrm>
+            <a:off x="731520" y="1783080"/>
+            <a:ext cx="3401568" cy="1719072"/>
+          </a:xfrm>
+          <a:prstGeom prst="roundRect">
+            <a:avLst/>
+          </a:prstGeom>
+          <a:solidFill>
+            <a:srgbClr val="F5F8FC"/>
+          </a:solidFill>
+          <a:ln>
+            <a:solidFill>
+              <a:srgbClr val="E2E8F0"/>
+            </a:solidFill>
+          </a:ln>
+        </p:spPr>
+        <p:style>
+          <a:lnRef idx="1">
+            <a:schemeClr val="accent1"/>
+          </a:lnRef>
+          <a:fillRef idx="3">
+            <a:schemeClr val="accent1"/>
+          </a:fillRef>
+          <a:effectRef idx="2">
+            <a:schemeClr val="accent1"/>
+          </a:effectRef>
+          <a:fontRef idx="minor">
+            <a:schemeClr val="lt1"/>
+          </a:fontRef>
+        </p:style>
+        <p:txBody>
+          <a:bodyPr rtlCol="0" anchor="ctr"/>
+          <a:lstStyle/>
+          <a:p>
+            <a:pPr algn="ctr"/>
+          </a:p>
+        </p:txBody>
+      </p:sp>
+      <p:sp>
+        <p:nvSpPr>
+          <p:cNvPr id="9" name="Rectangle 8"/>
+          <p:cNvSpPr/>
+          <p:nvPr/>
+        </p:nvSpPr>
+        <p:spPr>
+          <a:xfrm>
+            <a:off x="731520" y="1783080"/>
+            <a:ext cx="73152" cy="1719072"/>
+          </a:xfrm>
+          <a:prstGeom prst="rect">
+            <a:avLst/>
+          </a:prstGeom>
+          <a:solidFill>
             <a:srgbClr val="1F6FEB"/>
           </a:solidFill>
           <a:ln>
@@ -7451,14 +7212,94 @@
       </p:sp>
       <p:sp>
         <p:nvSpPr>
-          <p:cNvPr id="4" name="TextBox 3"/>
+          <p:cNvPr id="10" name="Rounded Rectangle 9"/>
+          <p:cNvSpPr/>
+          <p:nvPr/>
+        </p:nvSpPr>
+        <p:spPr>
+          <a:xfrm>
+            <a:off x="932688" y="2002536"/>
+            <a:ext cx="438912" cy="438912"/>
+          </a:xfrm>
+          <a:prstGeom prst="roundRect">
+            <a:avLst/>
+          </a:prstGeom>
+          <a:solidFill>
+            <a:srgbClr val="1F6FEB"/>
+          </a:solidFill>
+          <a:ln>
+            <a:solidFill>
+              <a:srgbClr val="1F6FEB"/>
+            </a:solidFill>
+          </a:ln>
+        </p:spPr>
+        <p:style>
+          <a:lnRef idx="1">
+            <a:schemeClr val="accent1"/>
+          </a:lnRef>
+          <a:fillRef idx="3">
+            <a:schemeClr val="accent1"/>
+          </a:fillRef>
+          <a:effectRef idx="2">
+            <a:schemeClr val="accent1"/>
+          </a:effectRef>
+          <a:fontRef idx="minor">
+            <a:schemeClr val="lt1"/>
+          </a:fontRef>
+        </p:style>
+        <p:txBody>
+          <a:bodyPr rtlCol="0" anchor="ctr"/>
+          <a:lstStyle/>
+          <a:p>
+            <a:pPr algn="ctr"/>
+          </a:p>
+        </p:txBody>
+      </p:sp>
+      <p:sp>
+        <p:nvSpPr>
+          <p:cNvPr id="11" name="TextBox 10"/>
           <p:cNvSpPr txBox="1"/>
           <p:nvPr/>
         </p:nvSpPr>
         <p:spPr>
           <a:xfrm>
-            <a:off x="658368" y="384048"/>
-            <a:ext cx="10789920" cy="320040"/>
+            <a:off x="932688" y="2011680"/>
+            <a:ext cx="438912" cy="420624"/>
+          </a:xfrm>
+          <a:prstGeom prst="rect">
+            <a:avLst/>
+          </a:prstGeom>
+          <a:noFill/>
+        </p:spPr>
+        <p:txBody>
+          <a:bodyPr wrap="square" anchor="ctr">
+            <a:spAutoFit/>
+          </a:bodyPr>
+          <a:lstStyle/>
+          <a:p>
+            <a:pPr algn="ctr"/>
+            <a:r>
+              <a:rPr sz="1400" b="1">
+                <a:solidFill>
+                  <a:srgbClr val="FFFFFF"/>
+                </a:solidFill>
+                <a:latin typeface="Arial"/>
+              </a:rPr>
+              <a:t>1</a:t>
+            </a:r>
+          </a:p>
+        </p:txBody>
+      </p:sp>
+      <p:sp>
+        <p:nvSpPr>
+          <p:cNvPr id="12" name="TextBox 11"/>
+          <p:cNvSpPr txBox="1"/>
+          <p:nvPr/>
+        </p:nvSpPr>
+        <p:spPr>
+          <a:xfrm>
+            <a:off x="1536192" y="1965960"/>
+            <a:ext cx="2414016" cy="329184"/>
           </a:xfrm>
           <a:prstGeom prst="rect">
             <a:avLst/>
@@ -7473,27 +7314,27 @@
           <a:p>
             <a:pPr algn="l"/>
             <a:r>
-              <a:rPr sz="1100" b="1">
+              <a:rPr sz="1400" b="1">
                 <a:solidFill>
                   <a:srgbClr val="1F6FEB"/>
                 </a:solidFill>
                 <a:latin typeface="Arial"/>
               </a:rPr>
-              <a:t>ACTIVITY 08 · ACCEPTANCE</a:t>
-            </a:r>
-          </a:p>
-        </p:txBody>
-      </p:sp>
-      <p:sp>
-        <p:nvSpPr>
-          <p:cNvPr id="5" name="TextBox 4"/>
+              <a:t>35%</a:t>
+            </a:r>
+          </a:p>
+        </p:txBody>
+      </p:sp>
+      <p:sp>
+        <p:nvSpPr>
+          <p:cNvPr id="13" name="TextBox 12"/>
           <p:cNvSpPr txBox="1"/>
           <p:nvPr/>
         </p:nvSpPr>
         <p:spPr>
           <a:xfrm>
-            <a:off x="658368" y="749808"/>
-            <a:ext cx="10789920" cy="658368"/>
+            <a:off x="1536192" y="2350008"/>
+            <a:ext cx="2414016" cy="1005839"/>
           </a:xfrm>
           <a:prstGeom prst="rect">
             <a:avLst/>
@@ -7508,33 +7349,33 @@
           <a:p>
             <a:pPr algn="l"/>
             <a:r>
-              <a:rPr sz="2700" b="1">
+              <a:rPr sz="1150" b="0">
                 <a:solidFill>
                   <a:srgbClr val="161B26"/>
                 </a:solidFill>
                 <a:latin typeface="Arial"/>
               </a:rPr>
-              <a:t>What Good Looks Like</a:t>
-            </a:r>
-          </a:p>
-        </p:txBody>
-      </p:sp>
-      <p:sp>
-        <p:nvSpPr>
-          <p:cNvPr id="6" name="Rectangle 5"/>
+              <a:t>Message and data effectiveness</a:t>
+            </a:r>
+          </a:p>
+        </p:txBody>
+      </p:sp>
+      <p:sp>
+        <p:nvSpPr>
+          <p:cNvPr id="14" name="Rounded Rectangle 13"/>
           <p:cNvSpPr/>
           <p:nvPr/>
         </p:nvSpPr>
         <p:spPr>
           <a:xfrm>
-            <a:off x="658368" y="1444752"/>
-            <a:ext cx="10881360" cy="18288"/>
-          </a:xfrm>
-          <a:prstGeom prst="rect">
-            <a:avLst/>
-          </a:prstGeom>
-          <a:solidFill>
-            <a:srgbClr val="E2E8F0"/>
+            <a:off x="4315968" y="1783080"/>
+            <a:ext cx="3401568" cy="1719072"/>
+          </a:xfrm>
+          <a:prstGeom prst="roundRect">
+            <a:avLst/>
+          </a:prstGeom>
+          <a:solidFill>
+            <a:srgbClr val="F5F8FC"/>
           </a:solidFill>
           <a:ln>
             <a:solidFill>
@@ -7566,14 +7407,139 @@
       </p:sp>
       <p:sp>
         <p:nvSpPr>
-          <p:cNvPr id="7" name="TextBox 6"/>
+          <p:cNvPr id="15" name="Rectangle 14"/>
+          <p:cNvSpPr/>
+          <p:nvPr/>
+        </p:nvSpPr>
+        <p:spPr>
+          <a:xfrm>
+            <a:off x="4315968" y="1783080"/>
+            <a:ext cx="73152" cy="1719072"/>
+          </a:xfrm>
+          <a:prstGeom prst="rect">
+            <a:avLst/>
+          </a:prstGeom>
+          <a:solidFill>
+            <a:srgbClr val="10B981"/>
+          </a:solidFill>
+          <a:ln>
+            <a:solidFill>
+              <a:srgbClr val="10B981"/>
+            </a:solidFill>
+          </a:ln>
+        </p:spPr>
+        <p:style>
+          <a:lnRef idx="1">
+            <a:schemeClr val="accent1"/>
+          </a:lnRef>
+          <a:fillRef idx="3">
+            <a:schemeClr val="accent1"/>
+          </a:fillRef>
+          <a:effectRef idx="2">
+            <a:schemeClr val="accent1"/>
+          </a:effectRef>
+          <a:fontRef idx="minor">
+            <a:schemeClr val="lt1"/>
+          </a:fontRef>
+        </p:style>
+        <p:txBody>
+          <a:bodyPr rtlCol="0" anchor="ctr"/>
+          <a:lstStyle/>
+          <a:p>
+            <a:pPr algn="ctr"/>
+          </a:p>
+        </p:txBody>
+      </p:sp>
+      <p:sp>
+        <p:nvSpPr>
+          <p:cNvPr id="16" name="Rounded Rectangle 15"/>
+          <p:cNvSpPr/>
+          <p:nvPr/>
+        </p:nvSpPr>
+        <p:spPr>
+          <a:xfrm>
+            <a:off x="4517136" y="2002536"/>
+            <a:ext cx="438912" cy="438912"/>
+          </a:xfrm>
+          <a:prstGeom prst="roundRect">
+            <a:avLst/>
+          </a:prstGeom>
+          <a:solidFill>
+            <a:srgbClr val="10B981"/>
+          </a:solidFill>
+          <a:ln>
+            <a:solidFill>
+              <a:srgbClr val="10B981"/>
+            </a:solidFill>
+          </a:ln>
+        </p:spPr>
+        <p:style>
+          <a:lnRef idx="1">
+            <a:schemeClr val="accent1"/>
+          </a:lnRef>
+          <a:fillRef idx="3">
+            <a:schemeClr val="accent1"/>
+          </a:fillRef>
+          <a:effectRef idx="2">
+            <a:schemeClr val="accent1"/>
+          </a:effectRef>
+          <a:fontRef idx="minor">
+            <a:schemeClr val="lt1"/>
+          </a:fontRef>
+        </p:style>
+        <p:txBody>
+          <a:bodyPr rtlCol="0" anchor="ctr"/>
+          <a:lstStyle/>
+          <a:p>
+            <a:pPr algn="ctr"/>
+          </a:p>
+        </p:txBody>
+      </p:sp>
+      <p:sp>
+        <p:nvSpPr>
+          <p:cNvPr id="17" name="TextBox 16"/>
           <p:cNvSpPr txBox="1"/>
           <p:nvPr/>
         </p:nvSpPr>
         <p:spPr>
           <a:xfrm>
-            <a:off x="658368" y="6473952"/>
-            <a:ext cx="9875520" cy="201168"/>
+            <a:off x="4517136" y="2011680"/>
+            <a:ext cx="438912" cy="420624"/>
+          </a:xfrm>
+          <a:prstGeom prst="rect">
+            <a:avLst/>
+          </a:prstGeom>
+          <a:noFill/>
+        </p:spPr>
+        <p:txBody>
+          <a:bodyPr wrap="square" anchor="ctr">
+            <a:spAutoFit/>
+          </a:bodyPr>
+          <a:lstStyle/>
+          <a:p>
+            <a:pPr algn="ctr"/>
+            <a:r>
+              <a:rPr sz="1400" b="1">
+                <a:solidFill>
+                  <a:srgbClr val="FFFFFF"/>
+                </a:solidFill>
+                <a:latin typeface="Arial"/>
+              </a:rPr>
+              <a:t>2</a:t>
+            </a:r>
+          </a:p>
+        </p:txBody>
+      </p:sp>
+      <p:sp>
+        <p:nvSpPr>
+          <p:cNvPr id="18" name="TextBox 17"/>
+          <p:cNvSpPr txBox="1"/>
+          <p:nvPr/>
+        </p:nvSpPr>
+        <p:spPr>
+          <a:xfrm>
+            <a:off x="5120640" y="1965960"/>
+            <a:ext cx="2414016" cy="329184"/>
           </a:xfrm>
           <a:prstGeom prst="rect">
             <a:avLst/>
@@ -7588,13 +7554,1266 @@
           <a:p>
             <a:pPr algn="l"/>
             <a:r>
-              <a:rPr sz="800" b="0">
-                <a:solidFill>
-                  <a:srgbClr val="5B6372"/>
+              <a:rPr sz="1400" b="1">
+                <a:solidFill>
+                  <a:srgbClr val="10B981"/>
                 </a:solidFill>
                 <a:latin typeface="Arial"/>
               </a:rPr>
-              <a:t>TGS-2024048310 · ACTIVITY PRACTICE · Tertiary Infotech Academy Pte Ltd</a:t>
+              <a:t>20%</a:t>
+            </a:r>
+          </a:p>
+        </p:txBody>
+      </p:sp>
+      <p:sp>
+        <p:nvSpPr>
+          <p:cNvPr id="19" name="TextBox 18"/>
+          <p:cNvSpPr txBox="1"/>
+          <p:nvPr/>
+        </p:nvSpPr>
+        <p:spPr>
+          <a:xfrm>
+            <a:off x="5120640" y="2350008"/>
+            <a:ext cx="2414016" cy="1005839"/>
+          </a:xfrm>
+          <a:prstGeom prst="rect">
+            <a:avLst/>
+          </a:prstGeom>
+          <a:noFill/>
+        </p:spPr>
+        <p:txBody>
+          <a:bodyPr wrap="square" anchor="t">
+            <a:spAutoFit/>
+          </a:bodyPr>
+          <a:lstStyle/>
+          <a:p>
+            <a:pPr algn="l"/>
+            <a:r>
+              <a:rPr sz="1150" b="0">
+                <a:solidFill>
+                  <a:srgbClr val="161B26"/>
+                </a:solidFill>
+                <a:latin typeface="Arial"/>
+              </a:rPr>
+              <a:t>Editability and workflow fit</a:t>
+            </a:r>
+          </a:p>
+        </p:txBody>
+      </p:sp>
+      <p:sp>
+        <p:nvSpPr>
+          <p:cNvPr id="20" name="Rounded Rectangle 19"/>
+          <p:cNvSpPr/>
+          <p:nvPr/>
+        </p:nvSpPr>
+        <p:spPr>
+          <a:xfrm>
+            <a:off x="7900416" y="1783080"/>
+            <a:ext cx="3401568" cy="1719072"/>
+          </a:xfrm>
+          <a:prstGeom prst="roundRect">
+            <a:avLst/>
+          </a:prstGeom>
+          <a:solidFill>
+            <a:srgbClr val="F5F8FC"/>
+          </a:solidFill>
+          <a:ln>
+            <a:solidFill>
+              <a:srgbClr val="E2E8F0"/>
+            </a:solidFill>
+          </a:ln>
+        </p:spPr>
+        <p:style>
+          <a:lnRef idx="1">
+            <a:schemeClr val="accent1"/>
+          </a:lnRef>
+          <a:fillRef idx="3">
+            <a:schemeClr val="accent1"/>
+          </a:fillRef>
+          <a:effectRef idx="2">
+            <a:schemeClr val="accent1"/>
+          </a:effectRef>
+          <a:fontRef idx="minor">
+            <a:schemeClr val="lt1"/>
+          </a:fontRef>
+        </p:style>
+        <p:txBody>
+          <a:bodyPr rtlCol="0" anchor="ctr"/>
+          <a:lstStyle/>
+          <a:p>
+            <a:pPr algn="ctr"/>
+          </a:p>
+        </p:txBody>
+      </p:sp>
+      <p:sp>
+        <p:nvSpPr>
+          <p:cNvPr id="21" name="Rectangle 20"/>
+          <p:cNvSpPr/>
+          <p:nvPr/>
+        </p:nvSpPr>
+        <p:spPr>
+          <a:xfrm>
+            <a:off x="7900416" y="1783080"/>
+            <a:ext cx="73152" cy="1719072"/>
+          </a:xfrm>
+          <a:prstGeom prst="rect">
+            <a:avLst/>
+          </a:prstGeom>
+          <a:solidFill>
+            <a:srgbClr val="7C3AED"/>
+          </a:solidFill>
+          <a:ln>
+            <a:solidFill>
+              <a:srgbClr val="7C3AED"/>
+            </a:solidFill>
+          </a:ln>
+        </p:spPr>
+        <p:style>
+          <a:lnRef idx="1">
+            <a:schemeClr val="accent1"/>
+          </a:lnRef>
+          <a:fillRef idx="3">
+            <a:schemeClr val="accent1"/>
+          </a:fillRef>
+          <a:effectRef idx="2">
+            <a:schemeClr val="accent1"/>
+          </a:effectRef>
+          <a:fontRef idx="minor">
+            <a:schemeClr val="lt1"/>
+          </a:fontRef>
+        </p:style>
+        <p:txBody>
+          <a:bodyPr rtlCol="0" anchor="ctr"/>
+          <a:lstStyle/>
+          <a:p>
+            <a:pPr algn="ctr"/>
+          </a:p>
+        </p:txBody>
+      </p:sp>
+      <p:sp>
+        <p:nvSpPr>
+          <p:cNvPr id="22" name="Rounded Rectangle 21"/>
+          <p:cNvSpPr/>
+          <p:nvPr/>
+        </p:nvSpPr>
+        <p:spPr>
+          <a:xfrm>
+            <a:off x="8101584" y="2002536"/>
+            <a:ext cx="438912" cy="438912"/>
+          </a:xfrm>
+          <a:prstGeom prst="roundRect">
+            <a:avLst/>
+          </a:prstGeom>
+          <a:solidFill>
+            <a:srgbClr val="7C3AED"/>
+          </a:solidFill>
+          <a:ln>
+            <a:solidFill>
+              <a:srgbClr val="7C3AED"/>
+            </a:solidFill>
+          </a:ln>
+        </p:spPr>
+        <p:style>
+          <a:lnRef idx="1">
+            <a:schemeClr val="accent1"/>
+          </a:lnRef>
+          <a:fillRef idx="3">
+            <a:schemeClr val="accent1"/>
+          </a:fillRef>
+          <a:effectRef idx="2">
+            <a:schemeClr val="accent1"/>
+          </a:effectRef>
+          <a:fontRef idx="minor">
+            <a:schemeClr val="lt1"/>
+          </a:fontRef>
+        </p:style>
+        <p:txBody>
+          <a:bodyPr rtlCol="0" anchor="ctr"/>
+          <a:lstStyle/>
+          <a:p>
+            <a:pPr algn="ctr"/>
+          </a:p>
+        </p:txBody>
+      </p:sp>
+      <p:sp>
+        <p:nvSpPr>
+          <p:cNvPr id="23" name="TextBox 22"/>
+          <p:cNvSpPr txBox="1"/>
+          <p:nvPr/>
+        </p:nvSpPr>
+        <p:spPr>
+          <a:xfrm>
+            <a:off x="8101584" y="2011680"/>
+            <a:ext cx="438912" cy="420624"/>
+          </a:xfrm>
+          <a:prstGeom prst="rect">
+            <a:avLst/>
+          </a:prstGeom>
+          <a:noFill/>
+        </p:spPr>
+        <p:txBody>
+          <a:bodyPr wrap="square" anchor="ctr">
+            <a:spAutoFit/>
+          </a:bodyPr>
+          <a:lstStyle/>
+          <a:p>
+            <a:pPr algn="ctr"/>
+            <a:r>
+              <a:rPr sz="1400" b="1">
+                <a:solidFill>
+                  <a:srgbClr val="FFFFFF"/>
+                </a:solidFill>
+                <a:latin typeface="Arial"/>
+              </a:rPr>
+              <a:t>3</a:t>
+            </a:r>
+          </a:p>
+        </p:txBody>
+      </p:sp>
+      <p:sp>
+        <p:nvSpPr>
+          <p:cNvPr id="24" name="TextBox 23"/>
+          <p:cNvSpPr txBox="1"/>
+          <p:nvPr/>
+        </p:nvSpPr>
+        <p:spPr>
+          <a:xfrm>
+            <a:off x="8705088" y="1965960"/>
+            <a:ext cx="2414016" cy="329184"/>
+          </a:xfrm>
+          <a:prstGeom prst="rect">
+            <a:avLst/>
+          </a:prstGeom>
+          <a:noFill/>
+        </p:spPr>
+        <p:txBody>
+          <a:bodyPr wrap="square" anchor="t">
+            <a:spAutoFit/>
+          </a:bodyPr>
+          <a:lstStyle/>
+          <a:p>
+            <a:pPr algn="l"/>
+            <a:r>
+              <a:rPr sz="1400" b="1">
+                <a:solidFill>
+                  <a:srgbClr val="7C3AED"/>
+                </a:solidFill>
+                <a:latin typeface="Arial"/>
+              </a:rPr>
+              <a:t>15%</a:t>
+            </a:r>
+          </a:p>
+        </p:txBody>
+      </p:sp>
+      <p:sp>
+        <p:nvSpPr>
+          <p:cNvPr id="25" name="TextBox 24"/>
+          <p:cNvSpPr txBox="1"/>
+          <p:nvPr/>
+        </p:nvSpPr>
+        <p:spPr>
+          <a:xfrm>
+            <a:off x="8705088" y="2350008"/>
+            <a:ext cx="2414016" cy="1005839"/>
+          </a:xfrm>
+          <a:prstGeom prst="rect">
+            <a:avLst/>
+          </a:prstGeom>
+          <a:noFill/>
+        </p:spPr>
+        <p:txBody>
+          <a:bodyPr wrap="square" anchor="t">
+            <a:spAutoFit/>
+          </a:bodyPr>
+          <a:lstStyle/>
+          <a:p>
+            <a:pPr algn="l"/>
+            <a:r>
+              <a:rPr sz="1150" b="0">
+                <a:solidFill>
+                  <a:srgbClr val="161B26"/>
+                </a:solidFill>
+                <a:latin typeface="Arial"/>
+              </a:rPr>
+              <a:t>Brand and accessibility control</a:t>
+            </a:r>
+          </a:p>
+        </p:txBody>
+      </p:sp>
+      <p:sp>
+        <p:nvSpPr>
+          <p:cNvPr id="26" name="Rounded Rectangle 25"/>
+          <p:cNvSpPr/>
+          <p:nvPr/>
+        </p:nvSpPr>
+        <p:spPr>
+          <a:xfrm>
+            <a:off x="731520" y="3776472"/>
+            <a:ext cx="3401568" cy="1719072"/>
+          </a:xfrm>
+          <a:prstGeom prst="roundRect">
+            <a:avLst/>
+          </a:prstGeom>
+          <a:solidFill>
+            <a:srgbClr val="F5F8FC"/>
+          </a:solidFill>
+          <a:ln>
+            <a:solidFill>
+              <a:srgbClr val="E2E8F0"/>
+            </a:solidFill>
+          </a:ln>
+        </p:spPr>
+        <p:style>
+          <a:lnRef idx="1">
+            <a:schemeClr val="accent1"/>
+          </a:lnRef>
+          <a:fillRef idx="3">
+            <a:schemeClr val="accent1"/>
+          </a:fillRef>
+          <a:effectRef idx="2">
+            <a:schemeClr val="accent1"/>
+          </a:effectRef>
+          <a:fontRef idx="minor">
+            <a:schemeClr val="lt1"/>
+          </a:fontRef>
+        </p:style>
+        <p:txBody>
+          <a:bodyPr rtlCol="0" anchor="ctr"/>
+          <a:lstStyle/>
+          <a:p>
+            <a:pPr algn="ctr"/>
+          </a:p>
+        </p:txBody>
+      </p:sp>
+      <p:sp>
+        <p:nvSpPr>
+          <p:cNvPr id="27" name="Rectangle 26"/>
+          <p:cNvSpPr/>
+          <p:nvPr/>
+        </p:nvSpPr>
+        <p:spPr>
+          <a:xfrm>
+            <a:off x="731520" y="3776472"/>
+            <a:ext cx="73152" cy="1719072"/>
+          </a:xfrm>
+          <a:prstGeom prst="rect">
+            <a:avLst/>
+          </a:prstGeom>
+          <a:solidFill>
+            <a:srgbClr val="F59E0B"/>
+          </a:solidFill>
+          <a:ln>
+            <a:solidFill>
+              <a:srgbClr val="F59E0B"/>
+            </a:solidFill>
+          </a:ln>
+        </p:spPr>
+        <p:style>
+          <a:lnRef idx="1">
+            <a:schemeClr val="accent1"/>
+          </a:lnRef>
+          <a:fillRef idx="3">
+            <a:schemeClr val="accent1"/>
+          </a:fillRef>
+          <a:effectRef idx="2">
+            <a:schemeClr val="accent1"/>
+          </a:effectRef>
+          <a:fontRef idx="minor">
+            <a:schemeClr val="lt1"/>
+          </a:fontRef>
+        </p:style>
+        <p:txBody>
+          <a:bodyPr rtlCol="0" anchor="ctr"/>
+          <a:lstStyle/>
+          <a:p>
+            <a:pPr algn="ctr"/>
+          </a:p>
+        </p:txBody>
+      </p:sp>
+      <p:sp>
+        <p:nvSpPr>
+          <p:cNvPr id="28" name="Rounded Rectangle 27"/>
+          <p:cNvSpPr/>
+          <p:nvPr/>
+        </p:nvSpPr>
+        <p:spPr>
+          <a:xfrm>
+            <a:off x="932688" y="3995928"/>
+            <a:ext cx="438912" cy="438912"/>
+          </a:xfrm>
+          <a:prstGeom prst="roundRect">
+            <a:avLst/>
+          </a:prstGeom>
+          <a:solidFill>
+            <a:srgbClr val="F59E0B"/>
+          </a:solidFill>
+          <a:ln>
+            <a:solidFill>
+              <a:srgbClr val="F59E0B"/>
+            </a:solidFill>
+          </a:ln>
+        </p:spPr>
+        <p:style>
+          <a:lnRef idx="1">
+            <a:schemeClr val="accent1"/>
+          </a:lnRef>
+          <a:fillRef idx="3">
+            <a:schemeClr val="accent1"/>
+          </a:fillRef>
+          <a:effectRef idx="2">
+            <a:schemeClr val="accent1"/>
+          </a:effectRef>
+          <a:fontRef idx="minor">
+            <a:schemeClr val="lt1"/>
+          </a:fontRef>
+        </p:style>
+        <p:txBody>
+          <a:bodyPr rtlCol="0" anchor="ctr"/>
+          <a:lstStyle/>
+          <a:p>
+            <a:pPr algn="ctr"/>
+          </a:p>
+        </p:txBody>
+      </p:sp>
+      <p:sp>
+        <p:nvSpPr>
+          <p:cNvPr id="29" name="TextBox 28"/>
+          <p:cNvSpPr txBox="1"/>
+          <p:nvPr/>
+        </p:nvSpPr>
+        <p:spPr>
+          <a:xfrm>
+            <a:off x="932688" y="4005072"/>
+            <a:ext cx="438912" cy="420624"/>
+          </a:xfrm>
+          <a:prstGeom prst="rect">
+            <a:avLst/>
+          </a:prstGeom>
+          <a:noFill/>
+        </p:spPr>
+        <p:txBody>
+          <a:bodyPr wrap="square" anchor="ctr">
+            <a:spAutoFit/>
+          </a:bodyPr>
+          <a:lstStyle/>
+          <a:p>
+            <a:pPr algn="ctr"/>
+            <a:r>
+              <a:rPr sz="1400" b="1">
+                <a:solidFill>
+                  <a:srgbClr val="FFFFFF"/>
+                </a:solidFill>
+                <a:latin typeface="Arial"/>
+              </a:rPr>
+              <a:t>4</a:t>
+            </a:r>
+          </a:p>
+        </p:txBody>
+      </p:sp>
+      <p:sp>
+        <p:nvSpPr>
+          <p:cNvPr id="30" name="TextBox 29"/>
+          <p:cNvSpPr txBox="1"/>
+          <p:nvPr/>
+        </p:nvSpPr>
+        <p:spPr>
+          <a:xfrm>
+            <a:off x="1536192" y="3959352"/>
+            <a:ext cx="2414016" cy="329184"/>
+          </a:xfrm>
+          <a:prstGeom prst="rect">
+            <a:avLst/>
+          </a:prstGeom>
+          <a:noFill/>
+        </p:spPr>
+        <p:txBody>
+          <a:bodyPr wrap="square" anchor="t">
+            <a:spAutoFit/>
+          </a:bodyPr>
+          <a:lstStyle/>
+          <a:p>
+            <a:pPr algn="l"/>
+            <a:r>
+              <a:rPr sz="1400" b="1">
+                <a:solidFill>
+                  <a:srgbClr val="F59E0B"/>
+                </a:solidFill>
+                <a:latin typeface="Arial"/>
+              </a:rPr>
+              <a:t>15%</a:t>
+            </a:r>
+          </a:p>
+        </p:txBody>
+      </p:sp>
+      <p:sp>
+        <p:nvSpPr>
+          <p:cNvPr id="31" name="TextBox 30"/>
+          <p:cNvSpPr txBox="1"/>
+          <p:nvPr/>
+        </p:nvSpPr>
+        <p:spPr>
+          <a:xfrm>
+            <a:off x="1536192" y="4343400"/>
+            <a:ext cx="2414016" cy="1005839"/>
+          </a:xfrm>
+          <a:prstGeom prst="rect">
+            <a:avLst/>
+          </a:prstGeom>
+          <a:noFill/>
+        </p:spPr>
+        <p:txBody>
+          <a:bodyPr wrap="square" anchor="t">
+            <a:spAutoFit/>
+          </a:bodyPr>
+          <a:lstStyle/>
+          <a:p>
+            <a:pPr algn="l"/>
+            <a:r>
+              <a:rPr sz="1150" b="0">
+                <a:solidFill>
+                  <a:srgbClr val="161B26"/>
+                </a:solidFill>
+                <a:latin typeface="Arial"/>
+              </a:rPr>
+              <a:t>Privacy, rights and governance</a:t>
+            </a:r>
+          </a:p>
+        </p:txBody>
+      </p:sp>
+      <p:sp>
+        <p:nvSpPr>
+          <p:cNvPr id="32" name="Rounded Rectangle 31"/>
+          <p:cNvSpPr/>
+          <p:nvPr/>
+        </p:nvSpPr>
+        <p:spPr>
+          <a:xfrm>
+            <a:off x="4315968" y="3776472"/>
+            <a:ext cx="3401568" cy="1719072"/>
+          </a:xfrm>
+          <a:prstGeom prst="roundRect">
+            <a:avLst/>
+          </a:prstGeom>
+          <a:solidFill>
+            <a:srgbClr val="F5F8FC"/>
+          </a:solidFill>
+          <a:ln>
+            <a:solidFill>
+              <a:srgbClr val="E2E8F0"/>
+            </a:solidFill>
+          </a:ln>
+        </p:spPr>
+        <p:style>
+          <a:lnRef idx="1">
+            <a:schemeClr val="accent1"/>
+          </a:lnRef>
+          <a:fillRef idx="3">
+            <a:schemeClr val="accent1"/>
+          </a:fillRef>
+          <a:effectRef idx="2">
+            <a:schemeClr val="accent1"/>
+          </a:effectRef>
+          <a:fontRef idx="minor">
+            <a:schemeClr val="lt1"/>
+          </a:fontRef>
+        </p:style>
+        <p:txBody>
+          <a:bodyPr rtlCol="0" anchor="ctr"/>
+          <a:lstStyle/>
+          <a:p>
+            <a:pPr algn="ctr"/>
+          </a:p>
+        </p:txBody>
+      </p:sp>
+      <p:sp>
+        <p:nvSpPr>
+          <p:cNvPr id="33" name="Rectangle 32"/>
+          <p:cNvSpPr/>
+          <p:nvPr/>
+        </p:nvSpPr>
+        <p:spPr>
+          <a:xfrm>
+            <a:off x="4315968" y="3776472"/>
+            <a:ext cx="73152" cy="1719072"/>
+          </a:xfrm>
+          <a:prstGeom prst="rect">
+            <a:avLst/>
+          </a:prstGeom>
+          <a:solidFill>
+            <a:srgbClr val="1F6FEB"/>
+          </a:solidFill>
+          <a:ln>
+            <a:solidFill>
+              <a:srgbClr val="1F6FEB"/>
+            </a:solidFill>
+          </a:ln>
+        </p:spPr>
+        <p:style>
+          <a:lnRef idx="1">
+            <a:schemeClr val="accent1"/>
+          </a:lnRef>
+          <a:fillRef idx="3">
+            <a:schemeClr val="accent1"/>
+          </a:fillRef>
+          <a:effectRef idx="2">
+            <a:schemeClr val="accent1"/>
+          </a:effectRef>
+          <a:fontRef idx="minor">
+            <a:schemeClr val="lt1"/>
+          </a:fontRef>
+        </p:style>
+        <p:txBody>
+          <a:bodyPr rtlCol="0" anchor="ctr"/>
+          <a:lstStyle/>
+          <a:p>
+            <a:pPr algn="ctr"/>
+          </a:p>
+        </p:txBody>
+      </p:sp>
+      <p:sp>
+        <p:nvSpPr>
+          <p:cNvPr id="34" name="Rounded Rectangle 33"/>
+          <p:cNvSpPr/>
+          <p:nvPr/>
+        </p:nvSpPr>
+        <p:spPr>
+          <a:xfrm>
+            <a:off x="4517136" y="3995928"/>
+            <a:ext cx="438912" cy="438912"/>
+          </a:xfrm>
+          <a:prstGeom prst="roundRect">
+            <a:avLst/>
+          </a:prstGeom>
+          <a:solidFill>
+            <a:srgbClr val="1F6FEB"/>
+          </a:solidFill>
+          <a:ln>
+            <a:solidFill>
+              <a:srgbClr val="1F6FEB"/>
+            </a:solidFill>
+          </a:ln>
+        </p:spPr>
+        <p:style>
+          <a:lnRef idx="1">
+            <a:schemeClr val="accent1"/>
+          </a:lnRef>
+          <a:fillRef idx="3">
+            <a:schemeClr val="accent1"/>
+          </a:fillRef>
+          <a:effectRef idx="2">
+            <a:schemeClr val="accent1"/>
+          </a:effectRef>
+          <a:fontRef idx="minor">
+            <a:schemeClr val="lt1"/>
+          </a:fontRef>
+        </p:style>
+        <p:txBody>
+          <a:bodyPr rtlCol="0" anchor="ctr"/>
+          <a:lstStyle/>
+          <a:p>
+            <a:pPr algn="ctr"/>
+          </a:p>
+        </p:txBody>
+      </p:sp>
+      <p:sp>
+        <p:nvSpPr>
+          <p:cNvPr id="35" name="TextBox 34"/>
+          <p:cNvSpPr txBox="1"/>
+          <p:nvPr/>
+        </p:nvSpPr>
+        <p:spPr>
+          <a:xfrm>
+            <a:off x="4517136" y="4005072"/>
+            <a:ext cx="438912" cy="420624"/>
+          </a:xfrm>
+          <a:prstGeom prst="rect">
+            <a:avLst/>
+          </a:prstGeom>
+          <a:noFill/>
+        </p:spPr>
+        <p:txBody>
+          <a:bodyPr wrap="square" anchor="ctr">
+            <a:spAutoFit/>
+          </a:bodyPr>
+          <a:lstStyle/>
+          <a:p>
+            <a:pPr algn="ctr"/>
+            <a:r>
+              <a:rPr sz="1400" b="1">
+                <a:solidFill>
+                  <a:srgbClr val="FFFFFF"/>
+                </a:solidFill>
+                <a:latin typeface="Arial"/>
+              </a:rPr>
+              <a:t>5</a:t>
+            </a:r>
+          </a:p>
+        </p:txBody>
+      </p:sp>
+      <p:sp>
+        <p:nvSpPr>
+          <p:cNvPr id="36" name="TextBox 35"/>
+          <p:cNvSpPr txBox="1"/>
+          <p:nvPr/>
+        </p:nvSpPr>
+        <p:spPr>
+          <a:xfrm>
+            <a:off x="5120640" y="3959352"/>
+            <a:ext cx="2414016" cy="329184"/>
+          </a:xfrm>
+          <a:prstGeom prst="rect">
+            <a:avLst/>
+          </a:prstGeom>
+          <a:noFill/>
+        </p:spPr>
+        <p:txBody>
+          <a:bodyPr wrap="square" anchor="t">
+            <a:spAutoFit/>
+          </a:bodyPr>
+          <a:lstStyle/>
+          <a:p>
+            <a:pPr algn="l"/>
+            <a:r>
+              <a:rPr sz="1400" b="1">
+                <a:solidFill>
+                  <a:srgbClr val="1F6FEB"/>
+                </a:solidFill>
+                <a:latin typeface="Arial"/>
+              </a:rPr>
+              <a:t>15%</a:t>
+            </a:r>
+          </a:p>
+        </p:txBody>
+      </p:sp>
+      <p:sp>
+        <p:nvSpPr>
+          <p:cNvPr id="37" name="TextBox 36"/>
+          <p:cNvSpPr txBox="1"/>
+          <p:nvPr/>
+        </p:nvSpPr>
+        <p:spPr>
+          <a:xfrm>
+            <a:off x="5120640" y="4343400"/>
+            <a:ext cx="2414016" cy="1005839"/>
+          </a:xfrm>
+          <a:prstGeom prst="rect">
+            <a:avLst/>
+          </a:prstGeom>
+          <a:noFill/>
+        </p:spPr>
+        <p:txBody>
+          <a:bodyPr wrap="square" anchor="t">
+            <a:spAutoFit/>
+          </a:bodyPr>
+          <a:lstStyle/>
+          <a:p>
+            <a:pPr algn="l"/>
+            <a:r>
+              <a:rPr sz="1150" b="0">
+                <a:solidFill>
+                  <a:srgbClr val="161B26"/>
+                </a:solidFill>
+                <a:latin typeface="Arial"/>
+              </a:rPr>
+              <a:t>Total resource cost</a:t>
+            </a:r>
+          </a:p>
+        </p:txBody>
+      </p:sp>
+      <p:sp>
+        <p:nvSpPr>
+          <p:cNvPr id="38" name="Rounded Rectangle 37"/>
+          <p:cNvSpPr/>
+          <p:nvPr/>
+        </p:nvSpPr>
+        <p:spPr>
+          <a:xfrm>
+            <a:off x="7900416" y="3776472"/>
+            <a:ext cx="3401568" cy="1719072"/>
+          </a:xfrm>
+          <a:prstGeom prst="roundRect">
+            <a:avLst/>
+          </a:prstGeom>
+          <a:solidFill>
+            <a:srgbClr val="F5F8FC"/>
+          </a:solidFill>
+          <a:ln>
+            <a:solidFill>
+              <a:srgbClr val="E2E8F0"/>
+            </a:solidFill>
+          </a:ln>
+        </p:spPr>
+        <p:style>
+          <a:lnRef idx="1">
+            <a:schemeClr val="accent1"/>
+          </a:lnRef>
+          <a:fillRef idx="3">
+            <a:schemeClr val="accent1"/>
+          </a:fillRef>
+          <a:effectRef idx="2">
+            <a:schemeClr val="accent1"/>
+          </a:effectRef>
+          <a:fontRef idx="minor">
+            <a:schemeClr val="lt1"/>
+          </a:fontRef>
+        </p:style>
+        <p:txBody>
+          <a:bodyPr rtlCol="0" anchor="ctr"/>
+          <a:lstStyle/>
+          <a:p>
+            <a:pPr algn="ctr"/>
+          </a:p>
+        </p:txBody>
+      </p:sp>
+      <p:sp>
+        <p:nvSpPr>
+          <p:cNvPr id="39" name="Rectangle 38"/>
+          <p:cNvSpPr/>
+          <p:nvPr/>
+        </p:nvSpPr>
+        <p:spPr>
+          <a:xfrm>
+            <a:off x="7900416" y="3776472"/>
+            <a:ext cx="73152" cy="1719072"/>
+          </a:xfrm>
+          <a:prstGeom prst="rect">
+            <a:avLst/>
+          </a:prstGeom>
+          <a:solidFill>
+            <a:srgbClr val="10B981"/>
+          </a:solidFill>
+          <a:ln>
+            <a:solidFill>
+              <a:srgbClr val="10B981"/>
+            </a:solidFill>
+          </a:ln>
+        </p:spPr>
+        <p:style>
+          <a:lnRef idx="1">
+            <a:schemeClr val="accent1"/>
+          </a:lnRef>
+          <a:fillRef idx="3">
+            <a:schemeClr val="accent1"/>
+          </a:fillRef>
+          <a:effectRef idx="2">
+            <a:schemeClr val="accent1"/>
+          </a:effectRef>
+          <a:fontRef idx="minor">
+            <a:schemeClr val="lt1"/>
+          </a:fontRef>
+        </p:style>
+        <p:txBody>
+          <a:bodyPr rtlCol="0" anchor="ctr"/>
+          <a:lstStyle/>
+          <a:p>
+            <a:pPr algn="ctr"/>
+          </a:p>
+        </p:txBody>
+      </p:sp>
+      <p:sp>
+        <p:nvSpPr>
+          <p:cNvPr id="40" name="Rounded Rectangle 39"/>
+          <p:cNvSpPr/>
+          <p:nvPr/>
+        </p:nvSpPr>
+        <p:spPr>
+          <a:xfrm>
+            <a:off x="8101584" y="3995928"/>
+            <a:ext cx="438912" cy="438912"/>
+          </a:xfrm>
+          <a:prstGeom prst="roundRect">
+            <a:avLst/>
+          </a:prstGeom>
+          <a:solidFill>
+            <a:srgbClr val="10B981"/>
+          </a:solidFill>
+          <a:ln>
+            <a:solidFill>
+              <a:srgbClr val="10B981"/>
+            </a:solidFill>
+          </a:ln>
+        </p:spPr>
+        <p:style>
+          <a:lnRef idx="1">
+            <a:schemeClr val="accent1"/>
+          </a:lnRef>
+          <a:fillRef idx="3">
+            <a:schemeClr val="accent1"/>
+          </a:fillRef>
+          <a:effectRef idx="2">
+            <a:schemeClr val="accent1"/>
+          </a:effectRef>
+          <a:fontRef idx="minor">
+            <a:schemeClr val="lt1"/>
+          </a:fontRef>
+        </p:style>
+        <p:txBody>
+          <a:bodyPr rtlCol="0" anchor="ctr"/>
+          <a:lstStyle/>
+          <a:p>
+            <a:pPr algn="ctr"/>
+          </a:p>
+        </p:txBody>
+      </p:sp>
+      <p:sp>
+        <p:nvSpPr>
+          <p:cNvPr id="41" name="TextBox 40"/>
+          <p:cNvSpPr txBox="1"/>
+          <p:nvPr/>
+        </p:nvSpPr>
+        <p:spPr>
+          <a:xfrm>
+            <a:off x="8101584" y="4005072"/>
+            <a:ext cx="438912" cy="420624"/>
+          </a:xfrm>
+          <a:prstGeom prst="rect">
+            <a:avLst/>
+          </a:prstGeom>
+          <a:noFill/>
+        </p:spPr>
+        <p:txBody>
+          <a:bodyPr wrap="square" anchor="ctr">
+            <a:spAutoFit/>
+          </a:bodyPr>
+          <a:lstStyle/>
+          <a:p>
+            <a:pPr algn="ctr"/>
+            <a:r>
+              <a:rPr sz="1400" b="1">
+                <a:solidFill>
+                  <a:srgbClr val="FFFFFF"/>
+                </a:solidFill>
+                <a:latin typeface="Arial"/>
+              </a:rPr>
+              <a:t>6</a:t>
+            </a:r>
+          </a:p>
+        </p:txBody>
+      </p:sp>
+      <p:sp>
+        <p:nvSpPr>
+          <p:cNvPr id="42" name="TextBox 41"/>
+          <p:cNvSpPr txBox="1"/>
+          <p:nvPr/>
+        </p:nvSpPr>
+        <p:spPr>
+          <a:xfrm>
+            <a:off x="8705088" y="3959352"/>
+            <a:ext cx="2414016" cy="329184"/>
+          </a:xfrm>
+          <a:prstGeom prst="rect">
+            <a:avLst/>
+          </a:prstGeom>
+          <a:noFill/>
+        </p:spPr>
+        <p:txBody>
+          <a:bodyPr wrap="square" anchor="t">
+            <a:spAutoFit/>
+          </a:bodyPr>
+          <a:lstStyle/>
+          <a:p>
+            <a:pPr algn="l"/>
+            <a:r>
+              <a:rPr sz="1400" b="1">
+                <a:solidFill>
+                  <a:srgbClr val="10B981"/>
+                </a:solidFill>
+                <a:latin typeface="Arial"/>
+              </a:rPr>
+              <a:t>Gate</a:t>
+            </a:r>
+          </a:p>
+        </p:txBody>
+      </p:sp>
+      <p:sp>
+        <p:nvSpPr>
+          <p:cNvPr id="43" name="TextBox 42"/>
+          <p:cNvSpPr txBox="1"/>
+          <p:nvPr/>
+        </p:nvSpPr>
+        <p:spPr>
+          <a:xfrm>
+            <a:off x="8705088" y="4343400"/>
+            <a:ext cx="2414016" cy="1005839"/>
+          </a:xfrm>
+          <a:prstGeom prst="rect">
+            <a:avLst/>
+          </a:prstGeom>
+          <a:noFill/>
+        </p:spPr>
+        <p:txBody>
+          <a:bodyPr wrap="square" anchor="t">
+            <a:spAutoFit/>
+          </a:bodyPr>
+          <a:lstStyle/>
+          <a:p>
+            <a:pPr algn="l"/>
+            <a:r>
+              <a:rPr sz="1150" b="0">
+                <a:solidFill>
+                  <a:srgbClr val="161B26"/>
+                </a:solidFill>
+                <a:latin typeface="Arial"/>
+              </a:rPr>
+              <a:t>No option passes with unverified data or public answer-key risk</a:t>
+            </a:r>
+          </a:p>
+        </p:txBody>
+      </p:sp>
+    </p:spTree>
+  </p:cSld>
+  <p:clrMapOvr>
+    <a:masterClrMapping/>
+  </p:clrMapOvr>
+</p:sld>
+</file>
+
+<file path=ppt/slides/slide6.xml><?xml version="1.0" encoding="utf-8"?>
+<p:sld xmlns:a="http://schemas.openxmlformats.org/drawingml/2006/main" xmlns:p="http://schemas.openxmlformats.org/presentationml/2006/main" xmlns:r="http://schemas.openxmlformats.org/officeDocument/2006/relationships">
+  <p:cSld>
+    <p:spTree>
+      <p:nvGrpSpPr>
+        <p:cNvPr id="1" name=""/>
+        <p:cNvGrpSpPr/>
+        <p:nvPr/>
+      </p:nvGrpSpPr>
+      <p:grpSpPr/>
+      <p:sp>
+        <p:nvSpPr>
+          <p:cNvPr id="2" name="Rectangle 1"/>
+          <p:cNvSpPr/>
+          <p:nvPr/>
+        </p:nvSpPr>
+        <p:spPr>
+          <a:xfrm>
+            <a:off x="0" y="0"/>
+            <a:ext cx="12191695" cy="6858000"/>
+          </a:xfrm>
+          <a:prstGeom prst="rect">
+            <a:avLst/>
+          </a:prstGeom>
+          <a:solidFill>
+            <a:srgbClr val="FFFFFF"/>
+          </a:solidFill>
+          <a:ln>
+            <a:solidFill>
+              <a:srgbClr val="FFFFFF"/>
+            </a:solidFill>
+          </a:ln>
+        </p:spPr>
+        <p:style>
+          <a:lnRef idx="1">
+            <a:schemeClr val="accent1"/>
+          </a:lnRef>
+          <a:fillRef idx="3">
+            <a:schemeClr val="accent1"/>
+          </a:fillRef>
+          <a:effectRef idx="2">
+            <a:schemeClr val="accent1"/>
+          </a:effectRef>
+          <a:fontRef idx="minor">
+            <a:schemeClr val="lt1"/>
+          </a:fontRef>
+        </p:style>
+        <p:txBody>
+          <a:bodyPr rtlCol="0" anchor="ctr"/>
+          <a:lstStyle/>
+          <a:p>
+            <a:pPr algn="ctr"/>
+          </a:p>
+        </p:txBody>
+      </p:sp>
+      <p:sp>
+        <p:nvSpPr>
+          <p:cNvPr id="3" name="Rectangle 2"/>
+          <p:cNvSpPr/>
+          <p:nvPr/>
+        </p:nvSpPr>
+        <p:spPr>
+          <a:xfrm>
+            <a:off x="0" y="0"/>
+            <a:ext cx="164592" cy="6858000"/>
+          </a:xfrm>
+          <a:prstGeom prst="rect">
+            <a:avLst/>
+          </a:prstGeom>
+          <a:solidFill>
+            <a:srgbClr val="1F6FEB"/>
+          </a:solidFill>
+          <a:ln>
+            <a:solidFill>
+              <a:srgbClr val="1F6FEB"/>
+            </a:solidFill>
+          </a:ln>
+        </p:spPr>
+        <p:style>
+          <a:lnRef idx="1">
+            <a:schemeClr val="accent1"/>
+          </a:lnRef>
+          <a:fillRef idx="3">
+            <a:schemeClr val="accent1"/>
+          </a:fillRef>
+          <a:effectRef idx="2">
+            <a:schemeClr val="accent1"/>
+          </a:effectRef>
+          <a:fontRef idx="minor">
+            <a:schemeClr val="lt1"/>
+          </a:fontRef>
+        </p:style>
+        <p:txBody>
+          <a:bodyPr rtlCol="0" anchor="ctr"/>
+          <a:lstStyle/>
+          <a:p>
+            <a:pPr algn="ctr"/>
+          </a:p>
+        </p:txBody>
+      </p:sp>
+      <p:sp>
+        <p:nvSpPr>
+          <p:cNvPr id="4" name="TextBox 3"/>
+          <p:cNvSpPr txBox="1"/>
+          <p:nvPr/>
+        </p:nvSpPr>
+        <p:spPr>
+          <a:xfrm>
+            <a:off x="658368" y="384048"/>
+            <a:ext cx="10789920" cy="320040"/>
+          </a:xfrm>
+          <a:prstGeom prst="rect">
+            <a:avLst/>
+          </a:prstGeom>
+          <a:noFill/>
+        </p:spPr>
+        <p:txBody>
+          <a:bodyPr wrap="square" anchor="t">
+            <a:spAutoFit/>
+          </a:bodyPr>
+          <a:lstStyle/>
+          <a:p>
+            <a:pPr algn="l"/>
+            <a:r>
+              <a:rPr sz="1100" b="1">
+                <a:solidFill>
+                  <a:srgbClr val="1F6FEB"/>
+                </a:solidFill>
+                <a:latin typeface="Arial"/>
+              </a:rPr>
+              <a:t>ACTIVITY 08 · ACCEPTANCE</a:t>
+            </a:r>
+          </a:p>
+        </p:txBody>
+      </p:sp>
+      <p:sp>
+        <p:nvSpPr>
+          <p:cNvPr id="5" name="TextBox 4"/>
+          <p:cNvSpPr txBox="1"/>
+          <p:nvPr/>
+        </p:nvSpPr>
+        <p:spPr>
+          <a:xfrm>
+            <a:off x="658368" y="749808"/>
+            <a:ext cx="10789920" cy="658368"/>
+          </a:xfrm>
+          <a:prstGeom prst="rect">
+            <a:avLst/>
+          </a:prstGeom>
+          <a:noFill/>
+        </p:spPr>
+        <p:txBody>
+          <a:bodyPr wrap="square" anchor="t">
+            <a:spAutoFit/>
+          </a:bodyPr>
+          <a:lstStyle/>
+          <a:p>
+            <a:pPr algn="l"/>
+            <a:r>
+              <a:rPr sz="2700" b="1">
+                <a:solidFill>
+                  <a:srgbClr val="161B26"/>
+                </a:solidFill>
+                <a:latin typeface="Arial"/>
+              </a:rPr>
+              <a:t>What Good Looks Like</a:t>
+            </a:r>
+          </a:p>
+        </p:txBody>
+      </p:sp>
+      <p:sp>
+        <p:nvSpPr>
+          <p:cNvPr id="6" name="Rectangle 5"/>
+          <p:cNvSpPr/>
+          <p:nvPr/>
+        </p:nvSpPr>
+        <p:spPr>
+          <a:xfrm>
+            <a:off x="658368" y="1444752"/>
+            <a:ext cx="10881360" cy="18288"/>
+          </a:xfrm>
+          <a:prstGeom prst="rect">
+            <a:avLst/>
+          </a:prstGeom>
+          <a:solidFill>
+            <a:srgbClr val="E2E8F0"/>
+          </a:solidFill>
+          <a:ln>
+            <a:solidFill>
+              <a:srgbClr val="E2E8F0"/>
+            </a:solidFill>
+          </a:ln>
+        </p:spPr>
+        <p:style>
+          <a:lnRef idx="1">
+            <a:schemeClr val="accent1"/>
+          </a:lnRef>
+          <a:fillRef idx="3">
+            <a:schemeClr val="accent1"/>
+          </a:fillRef>
+          <a:effectRef idx="2">
+            <a:schemeClr val="accent1"/>
+          </a:effectRef>
+          <a:fontRef idx="minor">
+            <a:schemeClr val="lt1"/>
+          </a:fontRef>
+        </p:style>
+        <p:txBody>
+          <a:bodyPr rtlCol="0" anchor="ctr"/>
+          <a:lstStyle/>
+          <a:p>
+            <a:pPr algn="ctr"/>
+          </a:p>
+        </p:txBody>
+      </p:sp>
+      <p:sp>
+        <p:nvSpPr>
+          <p:cNvPr id="7" name="TextBox 6"/>
+          <p:cNvSpPr txBox="1"/>
+          <p:nvPr/>
+        </p:nvSpPr>
+        <p:spPr>
+          <a:xfrm>
+            <a:off x="658368" y="6473952"/>
+            <a:ext cx="9875520" cy="201168"/>
+          </a:xfrm>
+          <a:prstGeom prst="rect">
+            <a:avLst/>
+          </a:prstGeom>
+          <a:noFill/>
+        </p:spPr>
+        <p:txBody>
+          <a:bodyPr wrap="square" anchor="t">
+            <a:spAutoFit/>
+          </a:bodyPr>
+          <a:lstStyle/>
+          <a:p>
+            <a:pPr algn="l"/>
+            <a:r>
+              <a:rPr sz="800" b="0">
+                <a:solidFill>
+                  <a:srgbClr val="5B6372"/>
+                </a:solidFill>
+                <a:latin typeface="Arial"/>
+              </a:rPr>
+              <a:t>TGS-2026064178 · ACTIVITY PRACTICE · Tertiary Infotech Academy Pte Ltd</a:t>
             </a:r>
           </a:p>
         </p:txBody>
